--- a/reports/cdcnn-experiment-review.pptx
+++ b/reports/cdcnn-experiment-review.pptx
@@ -26,6 +26,11 @@
     <p:sldId id="274" r:id="rId25"/>
     <p:sldId id="275" r:id="rId26"/>
     <p:sldId id="276" r:id="rId27"/>
+    <p:sldId id="277" r:id="rId28"/>
+    <p:sldId id="278" r:id="rId29"/>
+    <p:sldId id="279" r:id="rId30"/>
+    <p:sldId id="280" r:id="rId31"/>
+    <p:sldId id="281" r:id="rId32"/>
   </p:sldIdLst>
   <p:sldSz cx="12191695" cy="6858000" type="screen4x3"/>
   <p:notesSz cx="6858000" cy="9144000"/>
@@ -3267,479 +3272,37 @@
                 </a:solidFill>
                 <a:latin typeface="Cambria"/>
               </a:rPr>
-              <a:t>進步從哪裡來</a:t>
+              <a:t>我們的實驗協定</a:t>
+            </a:r>
+          </a:p>
+          <a:p>
+            <a:pPr>
+              <a:spcBef>
+                <a:spcPts val="600"/>
+              </a:spcBef>
+            </a:pPr>
+            <a:r>
+              <a:rPr sz="1500" b="0" i="1">
+                <a:solidFill>
+                  <a:srgbClr val="5A5A66"/>
+                </a:solidFill>
+                <a:latin typeface="Calibri"/>
+              </a:rPr>
+              <a:t>比論文更嚴格，且全程可稽核</a:t>
             </a:r>
           </a:p>
         </p:txBody>
       </p:sp>
-      <p:graphicFrame>
-        <p:nvGraphicFramePr>
-          <p:cNvPr id="3" name="Table 2"/>
-          <p:cNvGraphicFramePr>
-            <a:graphicFrameLocks noGrp="1"/>
-          </p:cNvGraphicFramePr>
-          <p:nvPr/>
-        </p:nvGraphicFramePr>
-        <p:xfrm>
-          <a:off x="685800" y="1783080"/>
-          <a:ext cx="10820095" cy="3456432"/>
-        </p:xfrm>
-        <a:graphic>
-          <a:graphicData uri="http://schemas.openxmlformats.org/drawingml/2006/table">
-            <a:tbl>
-              <a:tblPr firstRow="1" bandRow="1">
-                <a:tableStyleId>{5C22544A-7EE6-4342-B048-85BDC9FD1C3A}</a:tableStyleId>
-              </a:tblPr>
-              <a:tblGrid>
-                <a:gridCol w="6492057"/>
-                <a:gridCol w="4328038"/>
-              </a:tblGrid>
-              <a:tr h="384048">
-                <a:tc>
-                  <a:txBody>
-                    <a:bodyPr/>
-                    <a:lstStyle/>
-                    <a:p>
-                      <a:pPr algn="l"/>
-                      <a:r>
-                        <a:rPr sz="1300" b="1">
-                          <a:solidFill>
-                            <a:srgbClr val="FFFFFF"/>
-                          </a:solidFill>
-                          <a:latin typeface="Calibri"/>
-                        </a:rPr>
-                        <a:t>模型</a:t>
-                      </a:r>
-                    </a:p>
-                  </a:txBody>
-                  <a:tcPr>
-                    <a:solidFill>
-                      <a:srgbClr val="1E2761"/>
-                    </a:solidFill>
-                  </a:tcPr>
-                </a:tc>
-                <a:tc>
-                  <a:txBody>
-                    <a:bodyPr/>
-                    <a:lstStyle/>
-                    <a:p>
-                      <a:pPr algn="r"/>
-                      <a:r>
-                        <a:rPr sz="1300" b="1">
-                          <a:solidFill>
-                            <a:srgbClr val="FFFFFF"/>
-                          </a:solidFill>
-                          <a:latin typeface="Calibri"/>
-                        </a:rPr>
-                        <a:t>Target mean</a:t>
-                      </a:r>
-                    </a:p>
-                  </a:txBody>
-                  <a:tcPr>
-                    <a:solidFill>
-                      <a:srgbClr val="1E2761"/>
-                    </a:solidFill>
-                  </a:tcPr>
-                </a:tc>
-              </a:tr>
-              <a:tr h="384048">
-                <a:tc>
-                  <a:txBody>
-                    <a:bodyPr/>
-                    <a:lstStyle/>
-                    <a:p>
-                      <a:pPr algn="l"/>
-                      <a:r>
-                        <a:rPr sz="1300" b="0">
-                          <a:solidFill>
-                            <a:srgbClr val="1A1A1A"/>
-                          </a:solidFill>
-                          <a:latin typeface="Calibri"/>
-                        </a:rPr>
-                        <a:t>A1 增強</a:t>
-                      </a:r>
-                    </a:p>
-                  </a:txBody>
-                  <a:tcPr>
-                    <a:solidFill>
-                      <a:srgbClr val="F2F5FC"/>
-                    </a:solidFill>
-                  </a:tcPr>
-                </a:tc>
-                <a:tc>
-                  <a:txBody>
-                    <a:bodyPr/>
-                    <a:lstStyle/>
-                    <a:p>
-                      <a:pPr algn="r"/>
-                      <a:r>
-                        <a:rPr sz="1300" b="0">
-                          <a:solidFill>
-                            <a:srgbClr val="1A1A1A"/>
-                          </a:solidFill>
-                          <a:latin typeface="Calibri"/>
-                        </a:rPr>
-                        <a:t>0.372</a:t>
-                      </a:r>
-                    </a:p>
-                  </a:txBody>
-                  <a:tcPr>
-                    <a:solidFill>
-                      <a:srgbClr val="F2F5FC"/>
-                    </a:solidFill>
-                  </a:tcPr>
-                </a:tc>
-              </a:tr>
-              <a:tr h="384048">
-                <a:tc>
-                  <a:txBody>
-                    <a:bodyPr/>
-                    <a:lstStyle/>
-                    <a:p>
-                      <a:pPr algn="l"/>
-                      <a:r>
-                        <a:rPr sz="1300" b="0">
-                          <a:solidFill>
-                            <a:srgbClr val="1A1A1A"/>
-                          </a:solidFill>
-                          <a:latin typeface="Calibri"/>
-                        </a:rPr>
-                        <a:t>A2 特徵生成</a:t>
-                      </a:r>
-                    </a:p>
-                  </a:txBody>
-                  <a:tcPr>
-                    <a:solidFill>
-                      <a:srgbClr val="FFFFFF"/>
-                    </a:solidFill>
-                  </a:tcPr>
-                </a:tc>
-                <a:tc>
-                  <a:txBody>
-                    <a:bodyPr/>
-                    <a:lstStyle/>
-                    <a:p>
-                      <a:pPr algn="r"/>
-                      <a:r>
-                        <a:rPr sz="1300" b="0">
-                          <a:solidFill>
-                            <a:srgbClr val="1A1A1A"/>
-                          </a:solidFill>
-                          <a:latin typeface="Calibri"/>
-                        </a:rPr>
-                        <a:t>0.397</a:t>
-                      </a:r>
-                    </a:p>
-                  </a:txBody>
-                  <a:tcPr>
-                    <a:solidFill>
-                      <a:srgbClr val="FFFFFF"/>
-                    </a:solidFill>
-                  </a:tcPr>
-                </a:tc>
-              </a:tr>
-              <a:tr h="384048">
-                <a:tc>
-                  <a:txBody>
-                    <a:bodyPr/>
-                    <a:lstStyle/>
-                    <a:p>
-                      <a:pPr algn="l"/>
-                      <a:r>
-                        <a:rPr sz="1300" b="0">
-                          <a:solidFill>
-                            <a:srgbClr val="1A1A1A"/>
-                          </a:solidFill>
-                          <a:latin typeface="Calibri"/>
-                        </a:rPr>
-                        <a:t>B0 基線</a:t>
-                      </a:r>
-                    </a:p>
-                  </a:txBody>
-                  <a:tcPr>
-                    <a:solidFill>
-                      <a:srgbClr val="F2F5FC"/>
-                    </a:solidFill>
-                  </a:tcPr>
-                </a:tc>
-                <a:tc>
-                  <a:txBody>
-                    <a:bodyPr/>
-                    <a:lstStyle/>
-                    <a:p>
-                      <a:pPr algn="r"/>
-                      <a:r>
-                        <a:rPr sz="1300" b="0">
-                          <a:solidFill>
-                            <a:srgbClr val="1A1A1A"/>
-                          </a:solidFill>
-                          <a:latin typeface="Calibri"/>
-                        </a:rPr>
-                        <a:t>0.410</a:t>
-                      </a:r>
-                    </a:p>
-                  </a:txBody>
-                  <a:tcPr>
-                    <a:solidFill>
-                      <a:srgbClr val="F2F5FC"/>
-                    </a:solidFill>
-                  </a:tcPr>
-                </a:tc>
-              </a:tr>
-              <a:tr h="384048">
-                <a:tc>
-                  <a:txBody>
-                    <a:bodyPr/>
-                    <a:lstStyle/>
-                    <a:p>
-                      <a:pPr algn="l"/>
-                      <a:r>
-                        <a:rPr sz="1300" b="1">
-                          <a:solidFill>
-                            <a:srgbClr val="C0392B"/>
-                          </a:solidFill>
-                          <a:latin typeface="Calibri"/>
-                        </a:rPr>
-                        <a:t>A3 完整 CDCNN（v6.3）</a:t>
-                      </a:r>
-                    </a:p>
-                  </a:txBody>
-                  <a:tcPr>
-                    <a:solidFill>
-                      <a:srgbClr val="FFFFFF"/>
-                    </a:solidFill>
-                  </a:tcPr>
-                </a:tc>
-                <a:tc>
-                  <a:txBody>
-                    <a:bodyPr/>
-                    <a:lstStyle/>
-                    <a:p>
-                      <a:pPr algn="r"/>
-                      <a:r>
-                        <a:rPr sz="1300" b="1">
-                          <a:solidFill>
-                            <a:srgbClr val="C0392B"/>
-                          </a:solidFill>
-                          <a:latin typeface="Calibri"/>
-                        </a:rPr>
-                        <a:t>0.460</a:t>
-                      </a:r>
-                    </a:p>
-                  </a:txBody>
-                  <a:tcPr>
-                    <a:solidFill>
-                      <a:srgbClr val="FFFFFF"/>
-                    </a:solidFill>
-                  </a:tcPr>
-                </a:tc>
-              </a:tr>
-              <a:tr h="384048">
-                <a:tc>
-                  <a:txBody>
-                    <a:bodyPr/>
-                    <a:lstStyle/>
-                    <a:p>
-                      <a:pPr algn="l"/>
-                      <a:r>
-                        <a:rPr sz="1300" b="0">
-                          <a:solidFill>
-                            <a:srgbClr val="1A1A1A"/>
-                          </a:solidFill>
-                          <a:latin typeface="Calibri"/>
-                        </a:rPr>
-                        <a:t>+ LayerNorm</a:t>
-                      </a:r>
-                    </a:p>
-                  </a:txBody>
-                  <a:tcPr>
-                    <a:solidFill>
-                      <a:srgbClr val="F2F5FC"/>
-                    </a:solidFill>
-                  </a:tcPr>
-                </a:tc>
-                <a:tc>
-                  <a:txBody>
-                    <a:bodyPr/>
-                    <a:lstStyle/>
-                    <a:p>
-                      <a:pPr algn="r"/>
-                      <a:r>
-                        <a:rPr sz="1300" b="0">
-                          <a:solidFill>
-                            <a:srgbClr val="1A1A1A"/>
-                          </a:solidFill>
-                          <a:latin typeface="Calibri"/>
-                        </a:rPr>
-                        <a:t>0.492</a:t>
-                      </a:r>
-                    </a:p>
-                  </a:txBody>
-                  <a:tcPr>
-                    <a:solidFill>
-                      <a:srgbClr val="F2F5FC"/>
-                    </a:solidFill>
-                  </a:tcPr>
-                </a:tc>
-              </a:tr>
-              <a:tr h="384048">
-                <a:tc>
-                  <a:txBody>
-                    <a:bodyPr/>
-                    <a:lstStyle/>
-                    <a:p>
-                      <a:pPr algn="l"/>
-                      <a:r>
-                        <a:rPr sz="1300" b="0">
-                          <a:solidFill>
-                            <a:srgbClr val="1A1A1A"/>
-                          </a:solidFill>
-                          <a:latin typeface="Calibri"/>
-                        </a:rPr>
-                        <a:t>+ 逐樣本輸入</a:t>
-                      </a:r>
-                    </a:p>
-                  </a:txBody>
-                  <a:tcPr>
-                    <a:solidFill>
-                      <a:srgbClr val="FFFFFF"/>
-                    </a:solidFill>
-                  </a:tcPr>
-                </a:tc>
-                <a:tc>
-                  <a:txBody>
-                    <a:bodyPr/>
-                    <a:lstStyle/>
-                    <a:p>
-                      <a:pPr algn="r"/>
-                      <a:r>
-                        <a:rPr sz="1300" b="0">
-                          <a:solidFill>
-                            <a:srgbClr val="1A1A1A"/>
-                          </a:solidFill>
-                          <a:latin typeface="Calibri"/>
-                        </a:rPr>
-                        <a:t>0.557</a:t>
-                      </a:r>
-                    </a:p>
-                  </a:txBody>
-                  <a:tcPr>
-                    <a:solidFill>
-                      <a:srgbClr val="FFFFFF"/>
-                    </a:solidFill>
-                  </a:tcPr>
-                </a:tc>
-              </a:tr>
-              <a:tr h="384048">
-                <a:tc>
-                  <a:txBody>
-                    <a:bodyPr/>
-                    <a:lstStyle/>
-                    <a:p>
-                      <a:pPr algn="l"/>
-                      <a:r>
-                        <a:rPr sz="1300" b="1">
-                          <a:solidFill>
-                            <a:srgbClr val="C0392B"/>
-                          </a:solidFill>
-                          <a:latin typeface="Calibri"/>
-                        </a:rPr>
-                        <a:t>+ 界限（目前最佳）</a:t>
-                      </a:r>
-                    </a:p>
-                  </a:txBody>
-                  <a:tcPr>
-                    <a:solidFill>
-                      <a:srgbClr val="F2F5FC"/>
-                    </a:solidFill>
-                  </a:tcPr>
-                </a:tc>
-                <a:tc>
-                  <a:txBody>
-                    <a:bodyPr/>
-                    <a:lstStyle/>
-                    <a:p>
-                      <a:pPr algn="r"/>
-                      <a:r>
-                        <a:rPr sz="1300" b="1">
-                          <a:solidFill>
-                            <a:srgbClr val="C0392B"/>
-                          </a:solidFill>
-                          <a:latin typeface="Calibri"/>
-                        </a:rPr>
-                        <a:t>0.561</a:t>
-                      </a:r>
-                    </a:p>
-                  </a:txBody>
-                  <a:tcPr>
-                    <a:solidFill>
-                      <a:srgbClr val="F2F5FC"/>
-                    </a:solidFill>
-                  </a:tcPr>
-                </a:tc>
-              </a:tr>
-              <a:tr h="384048">
-                <a:tc>
-                  <a:txBody>
-                    <a:bodyPr/>
-                    <a:lstStyle/>
-                    <a:p>
-                      <a:pPr algn="l"/>
-                      <a:r>
-                        <a:rPr sz="1300" b="0">
-                          <a:solidFill>
-                            <a:srgbClr val="1A1A1A"/>
-                          </a:solidFill>
-                          <a:latin typeface="Calibri"/>
-                        </a:rPr>
-                        <a:t>論文 ResNet / CDWC / CDCNN</a:t>
-                      </a:r>
-                    </a:p>
-                  </a:txBody>
-                  <a:tcPr>
-                    <a:solidFill>
-                      <a:srgbClr val="FFFFFF"/>
-                    </a:solidFill>
-                  </a:tcPr>
-                </a:tc>
-                <a:tc>
-                  <a:txBody>
-                    <a:bodyPr/>
-                    <a:lstStyle/>
-                    <a:p>
-                      <a:pPr algn="r"/>
-                      <a:r>
-                        <a:rPr sz="1300" b="0">
-                          <a:solidFill>
-                            <a:srgbClr val="1A1A1A"/>
-                          </a:solidFill>
-                          <a:latin typeface="Calibri"/>
-                        </a:rPr>
-                        <a:t>0.634 / 0.670 / 0.723</a:t>
-                      </a:r>
-                    </a:p>
-                  </a:txBody>
-                  <a:tcPr>
-                    <a:solidFill>
-                      <a:srgbClr val="FFFFFF"/>
-                    </a:solidFill>
-                  </a:tcPr>
-                </a:tc>
-              </a:tr>
-            </a:tbl>
-          </a:graphicData>
-        </a:graphic>
-      </p:graphicFrame>
       <p:sp>
         <p:nvSpPr>
-          <p:cNvPr id="4" name="TextBox 3"/>
+          <p:cNvPr id="3" name="TextBox 2"/>
           <p:cNvSpPr txBox="1"/>
           <p:nvPr/>
         </p:nvSpPr>
         <p:spPr>
           <a:xfrm>
-            <a:off x="685800" y="5495544"/>
-            <a:ext cx="10820095" cy="914400"/>
+            <a:off x="685800" y="1737360"/>
+            <a:ext cx="10820095" cy="4480560"/>
           </a:xfrm>
           <a:prstGeom prst="rect">
             <a:avLst/>
@@ -3752,15 +3315,128 @@
           </a:bodyPr>
           <a:lstStyle/>
           <a:p>
-            <a:pPr algn="l"/>
-            <a:r>
-              <a:rPr sz="1300" b="0" i="0">
-                <a:solidFill>
-                  <a:srgbClr val="5A5A66"/>
-                </a:solidFill>
-                <a:latin typeface="Calibri"/>
-              </a:rPr>
-              <a:t>0.460 → 0.561，全部來自正規化，不是來自 CDCNN 的任何一個元件。</a:t>
+            <a:pPr algn="l">
+              <a:spcAft>
+                <a:spcPts val="1200"/>
+              </a:spcAft>
+            </a:pPr>
+            <a:r>
+              <a:rPr sz="1700" b="1" i="0">
+                <a:solidFill>
+                  <a:srgbClr val="C0392B"/>
+                </a:solidFill>
+                <a:latin typeface="Calibri"/>
+              </a:rPr>
+              <a:t>▍ </a:t>
+            </a:r>
+            <a:r>
+              <a:rPr sz="1700" b="1" i="0">
+                <a:solidFill>
+                  <a:srgbClr val="1A1A1A"/>
+                </a:solidFill>
+                <a:latin typeface="Calibri"/>
+              </a:rPr>
+              <a:t>只用 Batch 1（445 筆）做訓練、正規化擬合、交叉驗證與所有選擇</a:t>
+            </a:r>
+          </a:p>
+          <a:p>
+            <a:pPr>
+              <a:spcAft>
+                <a:spcPts val="1200"/>
+              </a:spcAft>
+            </a:pPr>
+            <a:r>
+              <a:rPr sz="1700" b="1" i="0">
+                <a:solidFill>
+                  <a:srgbClr val="C0392B"/>
+                </a:solidFill>
+                <a:latin typeface="Calibri"/>
+              </a:rPr>
+              <a:t>▍ </a:t>
+            </a:r>
+            <a:r>
+              <a:rPr sz="1700" b="1" i="0">
+                <a:solidFill>
+                  <a:srgbClr val="1A1A1A"/>
+                </a:solidFill>
+                <a:latin typeface="Calibri"/>
+              </a:rPr>
+              <a:t>所有檢查點凍結並雜湊後，目標批次才各載入一次</a:t>
+            </a:r>
+          </a:p>
+          <a:p>
+            <a:pPr>
+              <a:spcAft>
+                <a:spcPts val="1200"/>
+              </a:spcAft>
+            </a:pPr>
+            <a:r>
+              <a:rPr sz="1700" b="0" i="0">
+                <a:solidFill>
+                  <a:srgbClr val="CADCFC"/>
+                </a:solidFill>
+                <a:latin typeface="Calibri"/>
+              </a:rPr>
+              <a:t>· </a:t>
+            </a:r>
+            <a:r>
+              <a:rPr sz="1700" b="0" i="0">
+                <a:solidFill>
+                  <a:srgbClr val="1A1A1A"/>
+                </a:solidFill>
+                <a:latin typeface="Calibri"/>
+              </a:rPr>
+              <a:t>五個固定種子、100 epochs、SGD、StepLR、batch 64</a:t>
+            </a:r>
+          </a:p>
+          <a:p>
+            <a:pPr>
+              <a:spcAft>
+                <a:spcPts val="1200"/>
+              </a:spcAft>
+            </a:pPr>
+            <a:r>
+              <a:rPr sz="1700" b="0" i="0">
+                <a:solidFill>
+                  <a:srgbClr val="CADCFC"/>
+                </a:solidFill>
+                <a:latin typeface="Calibri"/>
+              </a:rPr>
+              <a:t>· </a:t>
+            </a:r>
+            <a:r>
+              <a:rPr sz="1700" b="0" i="0">
+                <a:solidFill>
+                  <a:srgbClr val="1A1A1A"/>
+                </a:solidFill>
+                <a:latin typeface="Calibri"/>
+              </a:rPr>
+              <a:t>每次執行寫入獨立目錄，附洩漏稽核；違規即失敗</a:t>
+            </a:r>
+          </a:p>
+          <a:p>
+            <a:pPr>
+              <a:spcAft>
+                <a:spcPts val="1200"/>
+              </a:spcAft>
+            </a:pPr>
+            <a:r>
+              <a:rPr sz="1700" b="0" i="0">
+                <a:solidFill>
+                  <a:srgbClr val="CADCFC"/>
+                </a:solidFill>
+                <a:latin typeface="Calibri"/>
+              </a:rPr>
+              <a:t>· </a:t>
+            </a:r>
+            <a:r>
+              <a:rPr sz="1700" b="0" i="0">
+                <a:solidFill>
+                  <a:srgbClr val="1A1A1A"/>
+                </a:solidFill>
+                <a:latin typeface="Calibri"/>
+              </a:rPr>
+              <a:t>指標：target mean＝九個目標批次準確率的未加權平均（與論文相同）</a:t>
             </a:r>
           </a:p>
         </p:txBody>
@@ -3813,7 +3489,7 @@
                 </a:solidFill>
                 <a:latin typeface="Cambria"/>
               </a:rPr>
-              <a:t>輸入修好後，CDCNN 元件仍然無效</a:t>
+              <a:t>正式的四階段結果</a:t>
             </a:r>
           </a:p>
         </p:txBody>
@@ -3828,7 +3504,7 @@
         </p:nvGraphicFramePr>
         <p:xfrm>
           <a:off x="685800" y="1783080"/>
-          <a:ext cx="10820094" cy="1536192"/>
+          <a:ext cx="10820090" cy="1920240"/>
         </p:xfrm>
         <a:graphic>
           <a:graphicData uri="http://schemas.openxmlformats.org/drawingml/2006/table">
@@ -3837,9 +3513,15 @@
                 <a:tableStyleId>{5C22544A-7EE6-4342-B048-85BDC9FD1C3A}</a:tableStyleId>
               </a:tblPr>
               <a:tblGrid>
-                <a:gridCol w="4328038"/>
-                <a:gridCol w="3246028"/>
-                <a:gridCol w="3246028"/>
+                <a:gridCol w="2380420"/>
+                <a:gridCol w="1082009"/>
+                <a:gridCol w="1190210"/>
+                <a:gridCol w="973808"/>
+                <a:gridCol w="973808"/>
+                <a:gridCol w="973808"/>
+                <a:gridCol w="973808"/>
+                <a:gridCol w="973808"/>
+                <a:gridCol w="1298411"/>
               </a:tblGrid>
               <a:tr h="384048">
                 <a:tc>
@@ -3855,7 +3537,7 @@
                           </a:solidFill>
                           <a:latin typeface="Calibri"/>
                         </a:rPr>
-                        <a:t>消融步驟</a:t>
+                        <a:t>Stage</a:t>
                       </a:r>
                     </a:p>
                   </a:txBody>
@@ -3878,7 +3560,7 @@
                           </a:solidFill>
                           <a:latin typeface="Calibri"/>
                         </a:rPr>
-                        <a:t>未正規化輸入</a:t>
+                        <a:t>CV</a:t>
                       </a:r>
                     </a:p>
                   </a:txBody>
@@ -3901,7 +3583,145 @@
                           </a:solidFill>
                           <a:latin typeface="Calibri"/>
                         </a:rPr>
-                        <a:t>逐樣本正規化輸入</a:t>
+                        <a:t>Target</a:t>
+                      </a:r>
+                    </a:p>
+                  </a:txBody>
+                  <a:tcPr>
+                    <a:solidFill>
+                      <a:srgbClr val="1E2761"/>
+                    </a:solidFill>
+                  </a:tcPr>
+                </a:tc>
+                <a:tc>
+                  <a:txBody>
+                    <a:bodyPr/>
+                    <a:lstStyle/>
+                    <a:p>
+                      <a:pPr algn="r"/>
+                      <a:r>
+                        <a:rPr sz="1300" b="1">
+                          <a:solidFill>
+                            <a:srgbClr val="FFFFFF"/>
+                          </a:solidFill>
+                          <a:latin typeface="Calibri"/>
+                        </a:rPr>
+                        <a:t>B2</a:t>
+                      </a:r>
+                    </a:p>
+                  </a:txBody>
+                  <a:tcPr>
+                    <a:solidFill>
+                      <a:srgbClr val="1E2761"/>
+                    </a:solidFill>
+                  </a:tcPr>
+                </a:tc>
+                <a:tc>
+                  <a:txBody>
+                    <a:bodyPr/>
+                    <a:lstStyle/>
+                    <a:p>
+                      <a:pPr algn="r"/>
+                      <a:r>
+                        <a:rPr sz="1300" b="1">
+                          <a:solidFill>
+                            <a:srgbClr val="FFFFFF"/>
+                          </a:solidFill>
+                          <a:latin typeface="Calibri"/>
+                        </a:rPr>
+                        <a:t>B4</a:t>
+                      </a:r>
+                    </a:p>
+                  </a:txBody>
+                  <a:tcPr>
+                    <a:solidFill>
+                      <a:srgbClr val="1E2761"/>
+                    </a:solidFill>
+                  </a:tcPr>
+                </a:tc>
+                <a:tc>
+                  <a:txBody>
+                    <a:bodyPr/>
+                    <a:lstStyle/>
+                    <a:p>
+                      <a:pPr algn="r"/>
+                      <a:r>
+                        <a:rPr sz="1300" b="1">
+                          <a:solidFill>
+                            <a:srgbClr val="FFFFFF"/>
+                          </a:solidFill>
+                          <a:latin typeface="Calibri"/>
+                        </a:rPr>
+                        <a:t>B6</a:t>
+                      </a:r>
+                    </a:p>
+                  </a:txBody>
+                  <a:tcPr>
+                    <a:solidFill>
+                      <a:srgbClr val="1E2761"/>
+                    </a:solidFill>
+                  </a:tcPr>
+                </a:tc>
+                <a:tc>
+                  <a:txBody>
+                    <a:bodyPr/>
+                    <a:lstStyle/>
+                    <a:p>
+                      <a:pPr algn="r"/>
+                      <a:r>
+                        <a:rPr sz="1300" b="1">
+                          <a:solidFill>
+                            <a:srgbClr val="FFFFFF"/>
+                          </a:solidFill>
+                          <a:latin typeface="Calibri"/>
+                        </a:rPr>
+                        <a:t>B8</a:t>
+                      </a:r>
+                    </a:p>
+                  </a:txBody>
+                  <a:tcPr>
+                    <a:solidFill>
+                      <a:srgbClr val="1E2761"/>
+                    </a:solidFill>
+                  </a:tcPr>
+                </a:tc>
+                <a:tc>
+                  <a:txBody>
+                    <a:bodyPr/>
+                    <a:lstStyle/>
+                    <a:p>
+                      <a:pPr algn="r"/>
+                      <a:r>
+                        <a:rPr sz="1300" b="1">
+                          <a:solidFill>
+                            <a:srgbClr val="FFFFFF"/>
+                          </a:solidFill>
+                          <a:latin typeface="Calibri"/>
+                        </a:rPr>
+                        <a:t>B10</a:t>
+                      </a:r>
+                    </a:p>
+                  </a:txBody>
+                  <a:tcPr>
+                    <a:solidFill>
+                      <a:srgbClr val="1E2761"/>
+                    </a:solidFill>
+                  </a:tcPr>
+                </a:tc>
+                <a:tc>
+                  <a:txBody>
+                    <a:bodyPr/>
+                    <a:lstStyle/>
+                    <a:p>
+                      <a:pPr algn="r"/>
+                      <a:r>
+                        <a:rPr sz="1300" b="1">
+                          <a:solidFill>
+                            <a:srgbClr val="FFFFFF"/>
+                          </a:solidFill>
+                          <a:latin typeface="Calibri"/>
+                        </a:rPr>
+                        <a:t>論文</a:t>
                       </a:r>
                     </a:p>
                   </a:txBody>
@@ -3926,7 +3746,7 @@
                           </a:solidFill>
                           <a:latin typeface="Calibri"/>
                         </a:rPr>
-                        <a:t>界限 + 梯度裁剪</a:t>
+                        <a:t>B0 基線</a:t>
                       </a:r>
                     </a:p>
                   </a:txBody>
@@ -3949,7 +3769,7 @@
                           </a:solidFill>
                           <a:latin typeface="Calibri"/>
                         </a:rPr>
-                        <a:t>−0.0022</a:t>
+                        <a:t>0.978</a:t>
                       </a:r>
                     </a:p>
                   </a:txBody>
@@ -3972,7 +3792,145 @@
                           </a:solidFill>
                           <a:latin typeface="Calibri"/>
                         </a:rPr>
-                        <a:t>+0.0044</a:t>
+                        <a:t>0.410</a:t>
+                      </a:r>
+                    </a:p>
+                  </a:txBody>
+                  <a:tcPr>
+                    <a:solidFill>
+                      <a:srgbClr val="F2F5FC"/>
+                    </a:solidFill>
+                  </a:tcPr>
+                </a:tc>
+                <a:tc>
+                  <a:txBody>
+                    <a:bodyPr/>
+                    <a:lstStyle/>
+                    <a:p>
+                      <a:pPr algn="r"/>
+                      <a:r>
+                        <a:rPr sz="1300" b="0">
+                          <a:solidFill>
+                            <a:srgbClr val="1A1A1A"/>
+                          </a:solidFill>
+                          <a:latin typeface="Calibri"/>
+                        </a:rPr>
+                        <a:t>0.74</a:t>
+                      </a:r>
+                    </a:p>
+                  </a:txBody>
+                  <a:tcPr>
+                    <a:solidFill>
+                      <a:srgbClr val="F2F5FC"/>
+                    </a:solidFill>
+                  </a:tcPr>
+                </a:tc>
+                <a:tc>
+                  <a:txBody>
+                    <a:bodyPr/>
+                    <a:lstStyle/>
+                    <a:p>
+                      <a:pPr algn="r"/>
+                      <a:r>
+                        <a:rPr sz="1300" b="0">
+                          <a:solidFill>
+                            <a:srgbClr val="1A1A1A"/>
+                          </a:solidFill>
+                          <a:latin typeface="Calibri"/>
+                        </a:rPr>
+                        <a:t>0.50</a:t>
+                      </a:r>
+                    </a:p>
+                  </a:txBody>
+                  <a:tcPr>
+                    <a:solidFill>
+                      <a:srgbClr val="F2F5FC"/>
+                    </a:solidFill>
+                  </a:tcPr>
+                </a:tc>
+                <a:tc>
+                  <a:txBody>
+                    <a:bodyPr/>
+                    <a:lstStyle/>
+                    <a:p>
+                      <a:pPr algn="r"/>
+                      <a:r>
+                        <a:rPr sz="1300" b="0">
+                          <a:solidFill>
+                            <a:srgbClr val="1A1A1A"/>
+                          </a:solidFill>
+                          <a:latin typeface="Calibri"/>
+                        </a:rPr>
+                        <a:t>0.48</a:t>
+                      </a:r>
+                    </a:p>
+                  </a:txBody>
+                  <a:tcPr>
+                    <a:solidFill>
+                      <a:srgbClr val="F2F5FC"/>
+                    </a:solidFill>
+                  </a:tcPr>
+                </a:tc>
+                <a:tc>
+                  <a:txBody>
+                    <a:bodyPr/>
+                    <a:lstStyle/>
+                    <a:p>
+                      <a:pPr algn="r"/>
+                      <a:r>
+                        <a:rPr sz="1300" b="0">
+                          <a:solidFill>
+                            <a:srgbClr val="1A1A1A"/>
+                          </a:solidFill>
+                          <a:latin typeface="Calibri"/>
+                        </a:rPr>
+                        <a:t>0.20</a:t>
+                      </a:r>
+                    </a:p>
+                  </a:txBody>
+                  <a:tcPr>
+                    <a:solidFill>
+                      <a:srgbClr val="F2F5FC"/>
+                    </a:solidFill>
+                  </a:tcPr>
+                </a:tc>
+                <a:tc>
+                  <a:txBody>
+                    <a:bodyPr/>
+                    <a:lstStyle/>
+                    <a:p>
+                      <a:pPr algn="r"/>
+                      <a:r>
+                        <a:rPr sz="1300" b="0">
+                          <a:solidFill>
+                            <a:srgbClr val="1A1A1A"/>
+                          </a:solidFill>
+                          <a:latin typeface="Calibri"/>
+                        </a:rPr>
+                        <a:t>0.29</a:t>
+                      </a:r>
+                    </a:p>
+                  </a:txBody>
+                  <a:tcPr>
+                    <a:solidFill>
+                      <a:srgbClr val="F2F5FC"/>
+                    </a:solidFill>
+                  </a:tcPr>
+                </a:tc>
+                <a:tc>
+                  <a:txBody>
+                    <a:bodyPr/>
+                    <a:lstStyle/>
+                    <a:p>
+                      <a:pPr algn="r"/>
+                      <a:r>
+                        <a:rPr sz="1300" b="0">
+                          <a:solidFill>
+                            <a:srgbClr val="1A1A1A"/>
+                          </a:solidFill>
+                          <a:latin typeface="Calibri"/>
+                        </a:rPr>
+                        <a:t>0.634</a:t>
                       </a:r>
                     </a:p>
                   </a:txBody>
@@ -3997,7 +3955,7 @@
                           </a:solidFill>
                           <a:latin typeface="Calibri"/>
                         </a:rPr>
-                        <a:t>增強 + 特徵生成</a:t>
+                        <a:t>A1 +增強</a:t>
                       </a:r>
                     </a:p>
                   </a:txBody>
@@ -4020,7 +3978,7 @@
                           </a:solidFill>
                           <a:latin typeface="Calibri"/>
                         </a:rPr>
-                        <a:t>−0.0328</a:t>
+                        <a:t>0.980</a:t>
                       </a:r>
                     </a:p>
                   </a:txBody>
@@ -4043,7 +4001,145 @@
                           </a:solidFill>
                           <a:latin typeface="Calibri"/>
                         </a:rPr>
-                        <a:t>−0.0224</a:t>
+                        <a:t>0.372</a:t>
+                      </a:r>
+                    </a:p>
+                  </a:txBody>
+                  <a:tcPr>
+                    <a:solidFill>
+                      <a:srgbClr val="FFFFFF"/>
+                    </a:solidFill>
+                  </a:tcPr>
+                </a:tc>
+                <a:tc>
+                  <a:txBody>
+                    <a:bodyPr/>
+                    <a:lstStyle/>
+                    <a:p>
+                      <a:pPr algn="r"/>
+                      <a:r>
+                        <a:rPr sz="1300" b="0">
+                          <a:solidFill>
+                            <a:srgbClr val="1A1A1A"/>
+                          </a:solidFill>
+                          <a:latin typeface="Calibri"/>
+                        </a:rPr>
+                        <a:t>0.73</a:t>
+                      </a:r>
+                    </a:p>
+                  </a:txBody>
+                  <a:tcPr>
+                    <a:solidFill>
+                      <a:srgbClr val="FFFFFF"/>
+                    </a:solidFill>
+                  </a:tcPr>
+                </a:tc>
+                <a:tc>
+                  <a:txBody>
+                    <a:bodyPr/>
+                    <a:lstStyle/>
+                    <a:p>
+                      <a:pPr algn="r"/>
+                      <a:r>
+                        <a:rPr sz="1300" b="0">
+                          <a:solidFill>
+                            <a:srgbClr val="1A1A1A"/>
+                          </a:solidFill>
+                          <a:latin typeface="Calibri"/>
+                        </a:rPr>
+                        <a:t>0.49</a:t>
+                      </a:r>
+                    </a:p>
+                  </a:txBody>
+                  <a:tcPr>
+                    <a:solidFill>
+                      <a:srgbClr val="FFFFFF"/>
+                    </a:solidFill>
+                  </a:tcPr>
+                </a:tc>
+                <a:tc>
+                  <a:txBody>
+                    <a:bodyPr/>
+                    <a:lstStyle/>
+                    <a:p>
+                      <a:pPr algn="r"/>
+                      <a:r>
+                        <a:rPr sz="1300" b="0">
+                          <a:solidFill>
+                            <a:srgbClr val="1A1A1A"/>
+                          </a:solidFill>
+                          <a:latin typeface="Calibri"/>
+                        </a:rPr>
+                        <a:t>0.42</a:t>
+                      </a:r>
+                    </a:p>
+                  </a:txBody>
+                  <a:tcPr>
+                    <a:solidFill>
+                      <a:srgbClr val="FFFFFF"/>
+                    </a:solidFill>
+                  </a:tcPr>
+                </a:tc>
+                <a:tc>
+                  <a:txBody>
+                    <a:bodyPr/>
+                    <a:lstStyle/>
+                    <a:p>
+                      <a:pPr algn="r"/>
+                      <a:r>
+                        <a:rPr sz="1300" b="0">
+                          <a:solidFill>
+                            <a:srgbClr val="1A1A1A"/>
+                          </a:solidFill>
+                          <a:latin typeface="Calibri"/>
+                        </a:rPr>
+                        <a:t>0.13</a:t>
+                      </a:r>
+                    </a:p>
+                  </a:txBody>
+                  <a:tcPr>
+                    <a:solidFill>
+                      <a:srgbClr val="FFFFFF"/>
+                    </a:solidFill>
+                  </a:tcPr>
+                </a:tc>
+                <a:tc>
+                  <a:txBody>
+                    <a:bodyPr/>
+                    <a:lstStyle/>
+                    <a:p>
+                      <a:pPr algn="r"/>
+                      <a:r>
+                        <a:rPr sz="1300" b="0">
+                          <a:solidFill>
+                            <a:srgbClr val="1A1A1A"/>
+                          </a:solidFill>
+                          <a:latin typeface="Calibri"/>
+                        </a:rPr>
+                        <a:t>0.30</a:t>
+                      </a:r>
+                    </a:p>
+                  </a:txBody>
+                  <a:tcPr>
+                    <a:solidFill>
+                      <a:srgbClr val="FFFFFF"/>
+                    </a:solidFill>
+                  </a:tcPr>
+                </a:tc>
+                <a:tc>
+                  <a:txBody>
+                    <a:bodyPr/>
+                    <a:lstStyle/>
+                    <a:p>
+                      <a:pPr algn="r"/>
+                      <a:r>
+                        <a:rPr sz="1300" b="0">
+                          <a:solidFill>
+                            <a:srgbClr val="1A1A1A"/>
+                          </a:solidFill>
+                          <a:latin typeface="Calibri"/>
+                        </a:rPr>
+                        <a:t>—</a:t>
                       </a:r>
                     </a:p>
                   </a:txBody>
@@ -4068,7 +4164,7 @@
                           </a:solidFill>
                           <a:latin typeface="Calibri"/>
                         </a:rPr>
-                        <a:t>對比損失</a:t>
+                        <a:t>A2 +特徵生成</a:t>
                       </a:r>
                     </a:p>
                   </a:txBody>
@@ -4091,7 +4187,7 @@
                           </a:solidFill>
                           <a:latin typeface="Calibri"/>
                         </a:rPr>
-                        <a:t>+0.0029</a:t>
+                        <a:t>0.982</a:t>
                       </a:r>
                     </a:p>
                   </a:txBody>
@@ -4114,13 +4210,360 @@
                           </a:solidFill>
                           <a:latin typeface="Calibri"/>
                         </a:rPr>
-                        <a:t>−0.0049</a:t>
+                        <a:t>0.397</a:t>
                       </a:r>
                     </a:p>
                   </a:txBody>
                   <a:tcPr>
                     <a:solidFill>
                       <a:srgbClr val="F2F5FC"/>
+                    </a:solidFill>
+                  </a:tcPr>
+                </a:tc>
+                <a:tc>
+                  <a:txBody>
+                    <a:bodyPr/>
+                    <a:lstStyle/>
+                    <a:p>
+                      <a:pPr algn="r"/>
+                      <a:r>
+                        <a:rPr sz="1300" b="0">
+                          <a:solidFill>
+                            <a:srgbClr val="1A1A1A"/>
+                          </a:solidFill>
+                          <a:latin typeface="Calibri"/>
+                        </a:rPr>
+                        <a:t>0.77</a:t>
+                      </a:r>
+                    </a:p>
+                  </a:txBody>
+                  <a:tcPr>
+                    <a:solidFill>
+                      <a:srgbClr val="F2F5FC"/>
+                    </a:solidFill>
+                  </a:tcPr>
+                </a:tc>
+                <a:tc>
+                  <a:txBody>
+                    <a:bodyPr/>
+                    <a:lstStyle/>
+                    <a:p>
+                      <a:pPr algn="r"/>
+                      <a:r>
+                        <a:rPr sz="1300" b="0">
+                          <a:solidFill>
+                            <a:srgbClr val="1A1A1A"/>
+                          </a:solidFill>
+                          <a:latin typeface="Calibri"/>
+                        </a:rPr>
+                        <a:t>0.49</a:t>
+                      </a:r>
+                    </a:p>
+                  </a:txBody>
+                  <a:tcPr>
+                    <a:solidFill>
+                      <a:srgbClr val="F2F5FC"/>
+                    </a:solidFill>
+                  </a:tcPr>
+                </a:tc>
+                <a:tc>
+                  <a:txBody>
+                    <a:bodyPr/>
+                    <a:lstStyle/>
+                    <a:p>
+                      <a:pPr algn="r"/>
+                      <a:r>
+                        <a:rPr sz="1300" b="0">
+                          <a:solidFill>
+                            <a:srgbClr val="1A1A1A"/>
+                          </a:solidFill>
+                          <a:latin typeface="Calibri"/>
+                        </a:rPr>
+                        <a:t>0.42</a:t>
+                      </a:r>
+                    </a:p>
+                  </a:txBody>
+                  <a:tcPr>
+                    <a:solidFill>
+                      <a:srgbClr val="F2F5FC"/>
+                    </a:solidFill>
+                  </a:tcPr>
+                </a:tc>
+                <a:tc>
+                  <a:txBody>
+                    <a:bodyPr/>
+                    <a:lstStyle/>
+                    <a:p>
+                      <a:pPr algn="r"/>
+                      <a:r>
+                        <a:rPr sz="1300" b="0">
+                          <a:solidFill>
+                            <a:srgbClr val="1A1A1A"/>
+                          </a:solidFill>
+                          <a:latin typeface="Calibri"/>
+                        </a:rPr>
+                        <a:t>0.17</a:t>
+                      </a:r>
+                    </a:p>
+                  </a:txBody>
+                  <a:tcPr>
+                    <a:solidFill>
+                      <a:srgbClr val="F2F5FC"/>
+                    </a:solidFill>
+                  </a:tcPr>
+                </a:tc>
+                <a:tc>
+                  <a:txBody>
+                    <a:bodyPr/>
+                    <a:lstStyle/>
+                    <a:p>
+                      <a:pPr algn="r"/>
+                      <a:r>
+                        <a:rPr sz="1300" b="0">
+                          <a:solidFill>
+                            <a:srgbClr val="1A1A1A"/>
+                          </a:solidFill>
+                          <a:latin typeface="Calibri"/>
+                        </a:rPr>
+                        <a:t>0.31</a:t>
+                      </a:r>
+                    </a:p>
+                  </a:txBody>
+                  <a:tcPr>
+                    <a:solidFill>
+                      <a:srgbClr val="F2F5FC"/>
+                    </a:solidFill>
+                  </a:tcPr>
+                </a:tc>
+                <a:tc>
+                  <a:txBody>
+                    <a:bodyPr/>
+                    <a:lstStyle/>
+                    <a:p>
+                      <a:pPr algn="r"/>
+                      <a:r>
+                        <a:rPr sz="1300" b="0">
+                          <a:solidFill>
+                            <a:srgbClr val="1A1A1A"/>
+                          </a:solidFill>
+                          <a:latin typeface="Calibri"/>
+                        </a:rPr>
+                        <a:t>0.670</a:t>
+                      </a:r>
+                    </a:p>
+                  </a:txBody>
+                  <a:tcPr>
+                    <a:solidFill>
+                      <a:srgbClr val="F2F5FC"/>
+                    </a:solidFill>
+                  </a:tcPr>
+                </a:tc>
+              </a:tr>
+              <a:tr h="384048">
+                <a:tc>
+                  <a:txBody>
+                    <a:bodyPr/>
+                    <a:lstStyle/>
+                    <a:p>
+                      <a:pPr algn="l"/>
+                      <a:r>
+                        <a:rPr sz="1300" b="1">
+                          <a:solidFill>
+                            <a:srgbClr val="C0392B"/>
+                          </a:solidFill>
+                          <a:latin typeface="Calibri"/>
+                        </a:rPr>
+                        <a:t>A3 +對比學習</a:t>
+                      </a:r>
+                    </a:p>
+                  </a:txBody>
+                  <a:tcPr>
+                    <a:solidFill>
+                      <a:srgbClr val="FFFFFF"/>
+                    </a:solidFill>
+                  </a:tcPr>
+                </a:tc>
+                <a:tc>
+                  <a:txBody>
+                    <a:bodyPr/>
+                    <a:lstStyle/>
+                    <a:p>
+                      <a:pPr algn="r"/>
+                      <a:r>
+                        <a:rPr sz="1300" b="1">
+                          <a:solidFill>
+                            <a:srgbClr val="C0392B"/>
+                          </a:solidFill>
+                          <a:latin typeface="Calibri"/>
+                        </a:rPr>
+                        <a:t>0.968</a:t>
+                      </a:r>
+                    </a:p>
+                  </a:txBody>
+                  <a:tcPr>
+                    <a:solidFill>
+                      <a:srgbClr val="FFFFFF"/>
+                    </a:solidFill>
+                  </a:tcPr>
+                </a:tc>
+                <a:tc>
+                  <a:txBody>
+                    <a:bodyPr/>
+                    <a:lstStyle/>
+                    <a:p>
+                      <a:pPr algn="r"/>
+                      <a:r>
+                        <a:rPr sz="1300" b="1">
+                          <a:solidFill>
+                            <a:srgbClr val="C0392B"/>
+                          </a:solidFill>
+                          <a:latin typeface="Calibri"/>
+                        </a:rPr>
+                        <a:t>0.460</a:t>
+                      </a:r>
+                    </a:p>
+                  </a:txBody>
+                  <a:tcPr>
+                    <a:solidFill>
+                      <a:srgbClr val="FFFFFF"/>
+                    </a:solidFill>
+                  </a:tcPr>
+                </a:tc>
+                <a:tc>
+                  <a:txBody>
+                    <a:bodyPr/>
+                    <a:lstStyle/>
+                    <a:p>
+                      <a:pPr algn="r"/>
+                      <a:r>
+                        <a:rPr sz="1300" b="1">
+                          <a:solidFill>
+                            <a:srgbClr val="C0392B"/>
+                          </a:solidFill>
+                          <a:latin typeface="Calibri"/>
+                        </a:rPr>
+                        <a:t>0.89</a:t>
+                      </a:r>
+                    </a:p>
+                  </a:txBody>
+                  <a:tcPr>
+                    <a:solidFill>
+                      <a:srgbClr val="FFFFFF"/>
+                    </a:solidFill>
+                  </a:tcPr>
+                </a:tc>
+                <a:tc>
+                  <a:txBody>
+                    <a:bodyPr/>
+                    <a:lstStyle/>
+                    <a:p>
+                      <a:pPr algn="r"/>
+                      <a:r>
+                        <a:rPr sz="1300" b="1">
+                          <a:solidFill>
+                            <a:srgbClr val="C0392B"/>
+                          </a:solidFill>
+                          <a:latin typeface="Calibri"/>
+                        </a:rPr>
+                        <a:t>0.58</a:t>
+                      </a:r>
+                    </a:p>
+                  </a:txBody>
+                  <a:tcPr>
+                    <a:solidFill>
+                      <a:srgbClr val="FFFFFF"/>
+                    </a:solidFill>
+                  </a:tcPr>
+                </a:tc>
+                <a:tc>
+                  <a:txBody>
+                    <a:bodyPr/>
+                    <a:lstStyle/>
+                    <a:p>
+                      <a:pPr algn="r"/>
+                      <a:r>
+                        <a:rPr sz="1300" b="1">
+                          <a:solidFill>
+                            <a:srgbClr val="C0392B"/>
+                          </a:solidFill>
+                          <a:latin typeface="Calibri"/>
+                        </a:rPr>
+                        <a:t>0.41</a:t>
+                      </a:r>
+                    </a:p>
+                  </a:txBody>
+                  <a:tcPr>
+                    <a:solidFill>
+                      <a:srgbClr val="FFFFFF"/>
+                    </a:solidFill>
+                  </a:tcPr>
+                </a:tc>
+                <a:tc>
+                  <a:txBody>
+                    <a:bodyPr/>
+                    <a:lstStyle/>
+                    <a:p>
+                      <a:pPr algn="r"/>
+                      <a:r>
+                        <a:rPr sz="1300" b="1">
+                          <a:solidFill>
+                            <a:srgbClr val="C0392B"/>
+                          </a:solidFill>
+                          <a:latin typeface="Calibri"/>
+                        </a:rPr>
+                        <a:t>0.17</a:t>
+                      </a:r>
+                    </a:p>
+                  </a:txBody>
+                  <a:tcPr>
+                    <a:solidFill>
+                      <a:srgbClr val="FFFFFF"/>
+                    </a:solidFill>
+                  </a:tcPr>
+                </a:tc>
+                <a:tc>
+                  <a:txBody>
+                    <a:bodyPr/>
+                    <a:lstStyle/>
+                    <a:p>
+                      <a:pPr algn="r"/>
+                      <a:r>
+                        <a:rPr sz="1300" b="1">
+                          <a:solidFill>
+                            <a:srgbClr val="C0392B"/>
+                          </a:solidFill>
+                          <a:latin typeface="Calibri"/>
+                        </a:rPr>
+                        <a:t>0.42</a:t>
+                      </a:r>
+                    </a:p>
+                  </a:txBody>
+                  <a:tcPr>
+                    <a:solidFill>
+                      <a:srgbClr val="FFFFFF"/>
+                    </a:solidFill>
+                  </a:tcPr>
+                </a:tc>
+                <a:tc>
+                  <a:txBody>
+                    <a:bodyPr/>
+                    <a:lstStyle/>
+                    <a:p>
+                      <a:pPr algn="r"/>
+                      <a:r>
+                        <a:rPr sz="1300" b="1">
+                          <a:solidFill>
+                            <a:srgbClr val="C0392B"/>
+                          </a:solidFill>
+                          <a:latin typeface="Calibri"/>
+                        </a:rPr>
+                        <a:t>0.723</a:t>
+                      </a:r>
+                    </a:p>
+                  </a:txBody>
+                  <a:tcPr>
+                    <a:solidFill>
+                      <a:srgbClr val="FFFFFF"/>
                     </a:solidFill>
                   </a:tcPr>
                 </a:tc>
@@ -4137,7 +4580,7 @@
         </p:nvSpPr>
         <p:spPr>
           <a:xfrm>
-            <a:off x="685800" y="3575304"/>
+            <a:off x="685800" y="3959352"/>
             <a:ext cx="10820095" cy="914400"/>
           </a:xfrm>
           <a:prstGeom prst="rect">
@@ -4159,7 +4602,7 @@
                 </a:solidFill>
                 <a:latin typeface="Calibri"/>
               </a:rPr>
-              <a:t>輸入條件不是阻礙它們的原因。同時，逐樣本正規化讓完整 CDCNN 也提升 +0.0738（A3 0.460 → 0.534）。</a:t>
+              <a:t>四個 stage 的 Batch 1 CV 都在 0.97–0.98：問題不在擬合，在泛化。A1 與 A2 比基線還差，順序沒有重現論文。</a:t>
             </a:r>
           </a:p>
         </p:txBody>
@@ -4212,21 +4655,419 @@
                 </a:solidFill>
                 <a:latin typeface="Cambria"/>
               </a:rPr>
-              <a:t>增強為什麼扣分：不是雜訊，是排程</a:t>
+              <a:t>第一個發現：A3 的增益不是對比學習</a:t>
+            </a:r>
+          </a:p>
+          <a:p>
+            <a:pPr>
+              <a:spcBef>
+                <a:spcPts val="600"/>
+              </a:spcBef>
+            </a:pPr>
+            <a:r>
+              <a:rPr sz="1500" b="0" i="1">
+                <a:solidFill>
+                  <a:srgbClr val="5A5A66"/>
+                </a:solidFill>
+                <a:latin typeface="Calibri"/>
+              </a:rPr>
+              <a:t>v6.3 一次給了 A3 四樣東西，把它們拆開量</a:t>
             </a:r>
           </a:p>
         </p:txBody>
       </p:sp>
+      <p:graphicFrame>
+        <p:nvGraphicFramePr>
+          <p:cNvPr id="3" name="Table 2"/>
+          <p:cNvGraphicFramePr>
+            <a:graphicFrameLocks noGrp="1"/>
+          </p:cNvGraphicFramePr>
+          <p:nvPr/>
+        </p:nvGraphicFramePr>
+        <p:xfrm>
+          <a:off x="685800" y="1783080"/>
+          <a:ext cx="10820093" cy="1920240"/>
+        </p:xfrm>
+        <a:graphic>
+          <a:graphicData uri="http://schemas.openxmlformats.org/drawingml/2006/table">
+            <a:tbl>
+              <a:tblPr firstRow="1" bandRow="1">
+                <a:tableStyleId>{5C22544A-7EE6-4342-B048-85BDC9FD1C3A}</a:tableStyleId>
+              </a:tblPr>
+              <a:tblGrid>
+                <a:gridCol w="5410047"/>
+                <a:gridCol w="2705023"/>
+                <a:gridCol w="2705023"/>
+              </a:tblGrid>
+              <a:tr h="384048">
+                <a:tc>
+                  <a:txBody>
+                    <a:bodyPr/>
+                    <a:lstStyle/>
+                    <a:p>
+                      <a:pPr algn="l"/>
+                      <a:r>
+                        <a:rPr sz="1300" b="1">
+                          <a:solidFill>
+                            <a:srgbClr val="FFFFFF"/>
+                          </a:solidFill>
+                          <a:latin typeface="Calibri"/>
+                        </a:rPr>
+                        <a:t>拆解出的成分</a:t>
+                      </a:r>
+                    </a:p>
+                  </a:txBody>
+                  <a:tcPr>
+                    <a:solidFill>
+                      <a:srgbClr val="1E2761"/>
+                    </a:solidFill>
+                  </a:tcPr>
+                </a:tc>
+                <a:tc>
+                  <a:txBody>
+                    <a:bodyPr/>
+                    <a:lstStyle/>
+                    <a:p>
+                      <a:pPr algn="r"/>
+                      <a:r>
+                        <a:rPr sz="1300" b="1">
+                          <a:solidFill>
+                            <a:srgbClr val="FFFFFF"/>
+                          </a:solidFill>
+                          <a:latin typeface="Calibri"/>
+                        </a:rPr>
+                        <a:t>效果</a:t>
+                      </a:r>
+                    </a:p>
+                  </a:txBody>
+                  <a:tcPr>
+                    <a:solidFill>
+                      <a:srgbClr val="1E2761"/>
+                    </a:solidFill>
+                  </a:tcPr>
+                </a:tc>
+                <a:tc>
+                  <a:txBody>
+                    <a:bodyPr/>
+                    <a:lstStyle/>
+                    <a:p>
+                      <a:pPr algn="r"/>
+                      <a:r>
+                        <a:rPr sz="1300" b="1">
+                          <a:solidFill>
+                            <a:srgbClr val="FFFFFF"/>
+                          </a:solidFill>
+                          <a:latin typeface="Calibri"/>
+                        </a:rPr>
+                        <a:t>改善的種子</a:t>
+                      </a:r>
+                    </a:p>
+                  </a:txBody>
+                  <a:tcPr>
+                    <a:solidFill>
+                      <a:srgbClr val="1E2761"/>
+                    </a:solidFill>
+                  </a:tcPr>
+                </a:tc>
+              </a:tr>
+              <a:tr h="384048">
+                <a:tc>
+                  <a:txBody>
+                    <a:bodyPr/>
+                    <a:lstStyle/>
+                    <a:p>
+                      <a:pPr algn="l"/>
+                      <a:r>
+                        <a:rPr sz="1300" b="1">
+                          <a:solidFill>
+                            <a:srgbClr val="C0392B"/>
+                          </a:solidFill>
+                          <a:latin typeface="Calibri"/>
+                        </a:rPr>
+                        <a:t>LayerNorm 取代 BatchNorm</a:t>
+                      </a:r>
+                    </a:p>
+                  </a:txBody>
+                  <a:tcPr>
+                    <a:solidFill>
+                      <a:srgbClr val="F2F5FC"/>
+                    </a:solidFill>
+                  </a:tcPr>
+                </a:tc>
+                <a:tc>
+                  <a:txBody>
+                    <a:bodyPr/>
+                    <a:lstStyle/>
+                    <a:p>
+                      <a:pPr algn="r"/>
+                      <a:r>
+                        <a:rPr sz="1300" b="1">
+                          <a:solidFill>
+                            <a:srgbClr val="C0392B"/>
+                          </a:solidFill>
+                          <a:latin typeface="Calibri"/>
+                        </a:rPr>
+                        <a:t>+0.0845</a:t>
+                      </a:r>
+                    </a:p>
+                  </a:txBody>
+                  <a:tcPr>
+                    <a:solidFill>
+                      <a:srgbClr val="F2F5FC"/>
+                    </a:solidFill>
+                  </a:tcPr>
+                </a:tc>
+                <a:tc>
+                  <a:txBody>
+                    <a:bodyPr/>
+                    <a:lstStyle/>
+                    <a:p>
+                      <a:pPr algn="r"/>
+                      <a:r>
+                        <a:rPr sz="1300" b="1">
+                          <a:solidFill>
+                            <a:srgbClr val="C0392B"/>
+                          </a:solidFill>
+                          <a:latin typeface="Calibri"/>
+                        </a:rPr>
+                        <a:t>5/5</a:t>
+                      </a:r>
+                    </a:p>
+                  </a:txBody>
+                  <a:tcPr>
+                    <a:solidFill>
+                      <a:srgbClr val="F2F5FC"/>
+                    </a:solidFill>
+                  </a:tcPr>
+                </a:tc>
+              </a:tr>
+              <a:tr h="384048">
+                <a:tc>
+                  <a:txBody>
+                    <a:bodyPr/>
+                    <a:lstStyle/>
+                    <a:p>
+                      <a:pPr algn="l"/>
+                      <a:r>
+                        <a:rPr sz="1300" b="0">
+                          <a:solidFill>
+                            <a:srgbClr val="1A1A1A"/>
+                          </a:solidFill>
+                          <a:latin typeface="Calibri"/>
+                        </a:rPr>
+                        <a:t>硬性界限 + 梯度裁剪</a:t>
+                      </a:r>
+                    </a:p>
+                  </a:txBody>
+                  <a:tcPr>
+                    <a:solidFill>
+                      <a:srgbClr val="FFFFFF"/>
+                    </a:solidFill>
+                  </a:tcPr>
+                </a:tc>
+                <a:tc>
+                  <a:txBody>
+                    <a:bodyPr/>
+                    <a:lstStyle/>
+                    <a:p>
+                      <a:pPr algn="r"/>
+                      <a:r>
+                        <a:rPr sz="1300" b="0">
+                          <a:solidFill>
+                            <a:srgbClr val="1A1A1A"/>
+                          </a:solidFill>
+                          <a:latin typeface="Calibri"/>
+                        </a:rPr>
+                        <a:t>−0.0022</a:t>
+                      </a:r>
+                    </a:p>
+                  </a:txBody>
+                  <a:tcPr>
+                    <a:solidFill>
+                      <a:srgbClr val="FFFFFF"/>
+                    </a:solidFill>
+                  </a:tcPr>
+                </a:tc>
+                <a:tc>
+                  <a:txBody>
+                    <a:bodyPr/>
+                    <a:lstStyle/>
+                    <a:p>
+                      <a:pPr algn="r"/>
+                      <a:r>
+                        <a:rPr sz="1300" b="0">
+                          <a:solidFill>
+                            <a:srgbClr val="1A1A1A"/>
+                          </a:solidFill>
+                          <a:latin typeface="Calibri"/>
+                        </a:rPr>
+                        <a:t>1/5</a:t>
+                      </a:r>
+                    </a:p>
+                  </a:txBody>
+                  <a:tcPr>
+                    <a:solidFill>
+                      <a:srgbClr val="FFFFFF"/>
+                    </a:solidFill>
+                  </a:tcPr>
+                </a:tc>
+              </a:tr>
+              <a:tr h="384048">
+                <a:tc>
+                  <a:txBody>
+                    <a:bodyPr/>
+                    <a:lstStyle/>
+                    <a:p>
+                      <a:pPr algn="l"/>
+                      <a:r>
+                        <a:rPr sz="1300" b="0">
+                          <a:solidFill>
+                            <a:srgbClr val="1A1A1A"/>
+                          </a:solidFill>
+                          <a:latin typeface="Calibri"/>
+                        </a:rPr>
+                        <a:t>增強 + 特徵生成</a:t>
+                      </a:r>
+                    </a:p>
+                  </a:txBody>
+                  <a:tcPr>
+                    <a:solidFill>
+                      <a:srgbClr val="F2F5FC"/>
+                    </a:solidFill>
+                  </a:tcPr>
+                </a:tc>
+                <a:tc>
+                  <a:txBody>
+                    <a:bodyPr/>
+                    <a:lstStyle/>
+                    <a:p>
+                      <a:pPr algn="r"/>
+                      <a:r>
+                        <a:rPr sz="1300" b="0">
+                          <a:solidFill>
+                            <a:srgbClr val="1A1A1A"/>
+                          </a:solidFill>
+                          <a:latin typeface="Calibri"/>
+                        </a:rPr>
+                        <a:t>−0.0328</a:t>
+                      </a:r>
+                    </a:p>
+                  </a:txBody>
+                  <a:tcPr>
+                    <a:solidFill>
+                      <a:srgbClr val="F2F5FC"/>
+                    </a:solidFill>
+                  </a:tcPr>
+                </a:tc>
+                <a:tc>
+                  <a:txBody>
+                    <a:bodyPr/>
+                    <a:lstStyle/>
+                    <a:p>
+                      <a:pPr algn="r"/>
+                      <a:r>
+                        <a:rPr sz="1300" b="0">
+                          <a:solidFill>
+                            <a:srgbClr val="1A1A1A"/>
+                          </a:solidFill>
+                          <a:latin typeface="Calibri"/>
+                        </a:rPr>
+                        <a:t>0/5</a:t>
+                      </a:r>
+                    </a:p>
+                  </a:txBody>
+                  <a:tcPr>
+                    <a:solidFill>
+                      <a:srgbClr val="F2F5FC"/>
+                    </a:solidFill>
+                  </a:tcPr>
+                </a:tc>
+              </a:tr>
+              <a:tr h="384048">
+                <a:tc>
+                  <a:txBody>
+                    <a:bodyPr/>
+                    <a:lstStyle/>
+                    <a:p>
+                      <a:pPr algn="l"/>
+                      <a:r>
+                        <a:rPr sz="1300" b="0">
+                          <a:solidFill>
+                            <a:srgbClr val="1A1A1A"/>
+                          </a:solidFill>
+                          <a:latin typeface="Calibri"/>
+                        </a:rPr>
+                        <a:t>對比損失</a:t>
+                      </a:r>
+                    </a:p>
+                  </a:txBody>
+                  <a:tcPr>
+                    <a:solidFill>
+                      <a:srgbClr val="FFFFFF"/>
+                    </a:solidFill>
+                  </a:tcPr>
+                </a:tc>
+                <a:tc>
+                  <a:txBody>
+                    <a:bodyPr/>
+                    <a:lstStyle/>
+                    <a:p>
+                      <a:pPr algn="r"/>
+                      <a:r>
+                        <a:rPr sz="1300" b="0">
+                          <a:solidFill>
+                            <a:srgbClr val="1A1A1A"/>
+                          </a:solidFill>
+                          <a:latin typeface="Calibri"/>
+                        </a:rPr>
+                        <a:t>+0.0029</a:t>
+                      </a:r>
+                    </a:p>
+                  </a:txBody>
+                  <a:tcPr>
+                    <a:solidFill>
+                      <a:srgbClr val="FFFFFF"/>
+                    </a:solidFill>
+                  </a:tcPr>
+                </a:tc>
+                <a:tc>
+                  <a:txBody>
+                    <a:bodyPr/>
+                    <a:lstStyle/>
+                    <a:p>
+                      <a:pPr algn="r"/>
+                      <a:r>
+                        <a:rPr sz="1300" b="0">
+                          <a:solidFill>
+                            <a:srgbClr val="1A1A1A"/>
+                          </a:solidFill>
+                          <a:latin typeface="Calibri"/>
+                        </a:rPr>
+                        <a:t>4/5</a:t>
+                      </a:r>
+                    </a:p>
+                  </a:txBody>
+                  <a:tcPr>
+                    <a:solidFill>
+                      <a:srgbClr val="FFFFFF"/>
+                    </a:solidFill>
+                  </a:tcPr>
+                </a:tc>
+              </a:tr>
+            </a:tbl>
+          </a:graphicData>
+        </a:graphic>
+      </p:graphicFrame>
       <p:sp>
         <p:nvSpPr>
-          <p:cNvPr id="3" name="TextBox 2"/>
+          <p:cNvPr id="4" name="TextBox 3"/>
           <p:cNvSpPr txBox="1"/>
           <p:nvPr/>
         </p:nvSpPr>
         <p:spPr>
           <a:xfrm>
-            <a:off x="685800" y="1737360"/>
-            <a:ext cx="10820095" cy="4480560"/>
+            <a:off x="685800" y="3959352"/>
+            <a:ext cx="10820095" cy="914400"/>
           </a:xfrm>
           <a:prstGeom prst="rect">
             <a:avLst/>
@@ -4239,153 +5080,15 @@
           </a:bodyPr>
           <a:lstStyle/>
           <a:p>
-            <a:pPr algn="l">
-              <a:spcAft>
-                <a:spcPts val="1200"/>
-              </a:spcAft>
-            </a:pPr>
-            <a:r>
-              <a:rPr sz="1700" b="0" i="0">
-                <a:solidFill>
-                  <a:srgbClr val="CADCFC"/>
-                </a:solidFill>
-                <a:latin typeface="Calibri"/>
-              </a:rPr>
-              <a:t>· </a:t>
-            </a:r>
-            <a:r>
-              <a:rPr sz="1700" b="0" i="0">
-                <a:solidFill>
-                  <a:srgbClr val="1A1A1A"/>
-                </a:solidFill>
-                <a:latin typeface="Calibri"/>
-              </a:rPr>
-              <a:t>雜訊縮小 20 倍（1.0 → 0.05），target mean 只變 +0.0026</a:t>
-            </a:r>
-          </a:p>
-          <a:p>
-            <a:pPr>
-              <a:spcAft>
-                <a:spcPts val="1200"/>
-              </a:spcAft>
-            </a:pPr>
-            <a:r>
-              <a:rPr sz="1700" b="1" i="0">
-                <a:solidFill>
-                  <a:srgbClr val="C0392B"/>
-                </a:solidFill>
-                <a:latin typeface="Calibri"/>
-              </a:rPr>
-              <a:t>▍ </a:t>
-            </a:r>
-            <a:r>
-              <a:rPr sz="1700" b="1" i="0">
-                <a:solidFill>
-                  <a:srgbClr val="1A1A1A"/>
-                </a:solidFill>
-                <a:latin typeface="Calibri"/>
-              </a:rPr>
-              <a:t>零雜訊的純複製對照仍然扣 −0.0114（真實增強 −0.0131）</a:t>
-            </a:r>
-          </a:p>
-          <a:p>
-            <a:pPr>
-              <a:spcAft>
-                <a:spcPts val="1200"/>
-              </a:spcAft>
-            </a:pPr>
-            <a:r>
-              <a:rPr sz="1700" b="1" i="0">
-                <a:solidFill>
-                  <a:srgbClr val="C0392B"/>
-                </a:solidFill>
-                <a:latin typeface="Calibri"/>
-              </a:rPr>
-              <a:t>▍ </a:t>
-            </a:r>
-            <a:r>
-              <a:rPr sz="1700" b="1" i="0">
-                <a:solidFill>
-                  <a:srgbClr val="1A1A1A"/>
-                </a:solidFill>
-                <a:latin typeface="Calibri"/>
-              </a:rPr>
-              <a:t>真正原因：增強 stage 有 890 筆而非 445 筆，在固定 100 epoch 下多了一倍的優化步數</a:t>
-            </a:r>
-          </a:p>
-          <a:p>
-            <a:pPr>
-              <a:spcAft>
-                <a:spcPts val="1200"/>
-              </a:spcAft>
-            </a:pPr>
-            <a:r>
-              <a:rPr sz="1700" b="0" i="0">
-                <a:solidFill>
-                  <a:srgbClr val="CADCFC"/>
-                </a:solidFill>
-                <a:latin typeface="Calibri"/>
-              </a:rPr>
-              <a:t>· </a:t>
-            </a:r>
-            <a:r>
-              <a:rPr sz="1700" b="0" i="0">
-                <a:solidFill>
-                  <a:srgbClr val="1A1A1A"/>
-                </a:solidFill>
-                <a:latin typeface="Calibri"/>
-              </a:rPr>
-              <a:t>本專案（與原本 v6.3）所有「A1 對 B0」的比較都被排程長度混淆</a:t>
-            </a:r>
-          </a:p>
-          <a:p>
-            <a:pPr>
-              <a:spcAft>
-                <a:spcPts val="1200"/>
-              </a:spcAft>
-            </a:pPr>
-            <a:r>
-              <a:rPr sz="1700" b="0" i="0">
-                <a:solidFill>
-                  <a:srgbClr val="CADCFC"/>
-                </a:solidFill>
-                <a:latin typeface="Calibri"/>
-              </a:rPr>
-              <a:t>· </a:t>
-            </a:r>
-            <a:r>
-              <a:rPr sz="1700" b="0" i="0">
-                <a:solidFill>
-                  <a:srgbClr val="1A1A1A"/>
-                </a:solidFill>
-                <a:latin typeface="Calibri"/>
-              </a:rPr>
-              <a:t>修正：每個 epoch 從增強池抽一份來源大小的子集，使步數對齊</a:t>
-            </a:r>
-          </a:p>
-          <a:p>
-            <a:pPr>
-              <a:spcAft>
-                <a:spcPts val="1200"/>
-              </a:spcAft>
-            </a:pPr>
-            <a:r>
-              <a:rPr sz="1700" b="0" i="0">
-                <a:solidFill>
-                  <a:srgbClr val="CADCFC"/>
-                </a:solidFill>
-                <a:latin typeface="Calibri"/>
-              </a:rPr>
-              <a:t>· </a:t>
-            </a:r>
-            <a:r>
-              <a:rPr sz="1700" b="0" i="0">
-                <a:solidFill>
-                  <a:srgbClr val="1A1A1A"/>
-                </a:solidFill>
-                <a:latin typeface="Calibri"/>
-              </a:rPr>
-              <a:t>對齊本身 +0.0043；種子標準差從 0.0364 降到 0.0136（最穩定的一組）</a:t>
+            <a:pPr algn="l"/>
+            <a:r>
+              <a:rPr sz="1300" b="0" i="0">
+                <a:solidFill>
+                  <a:srgbClr val="5A5A66"/>
+                </a:solidFill>
+                <a:latin typeface="Calibri"/>
+              </a:rPr>
+              <a:t>BatchNorm 把 Batch 1 的統計量套到漂移資料上；LayerNorm 逐樣本正規化。增益最大的正是漂移最嚴重的批次。</a:t>
             </a:r>
           </a:p>
         </p:txBody>
@@ -4438,6 +5141,1933 @@
                 </a:solidFill>
                 <a:latin typeface="Cambria"/>
               </a:rPr>
+              <a:t>對照論文後的轉折</a:t>
+            </a:r>
+          </a:p>
+        </p:txBody>
+      </p:sp>
+      <p:sp>
+        <p:nvSpPr>
+          <p:cNvPr id="3" name="TextBox 2"/>
+          <p:cNvSpPr txBox="1"/>
+          <p:nvPr/>
+        </p:nvSpPr>
+        <p:spPr>
+          <a:xfrm>
+            <a:off x="685800" y="1737360"/>
+            <a:ext cx="10820095" cy="4480560"/>
+          </a:xfrm>
+          <a:prstGeom prst="rect">
+            <a:avLst/>
+          </a:prstGeom>
+          <a:noFill/>
+        </p:spPr>
+        <p:txBody>
+          <a:bodyPr wrap="square" lIns="0" rIns="0" tIns="0" bIns="0" anchor="t">
+            <a:spAutoFit/>
+          </a:bodyPr>
+          <a:lstStyle/>
+          <a:p>
+            <a:pPr algn="l">
+              <a:spcAft>
+                <a:spcPts val="1200"/>
+              </a:spcAft>
+            </a:pPr>
+            <a:r>
+              <a:rPr sz="1700" b="1" i="0">
+                <a:solidFill>
+                  <a:srgbClr val="C0392B"/>
+                </a:solidFill>
+                <a:latin typeface="Calibri"/>
+              </a:rPr>
+              <a:t>▍ </a:t>
+            </a:r>
+            <a:r>
+              <a:rPr sz="1700" b="1" i="0">
+                <a:solidFill>
+                  <a:srgbClr val="1A1A1A"/>
+                </a:solidFill>
+                <a:latin typeface="Calibri"/>
+              </a:rPr>
+              <a:t>論文的純 ResNet 基線 0.6344，贏過我們當時所有 stage（最高 0.4922）</a:t>
+            </a:r>
+          </a:p>
+          <a:p>
+            <a:pPr>
+              <a:spcAft>
+                <a:spcPts val="1200"/>
+              </a:spcAft>
+            </a:pPr>
+            <a:r>
+              <a:rPr sz="1700" b="0" i="0">
+                <a:solidFill>
+                  <a:srgbClr val="CADCFC"/>
+                </a:solidFill>
+                <a:latin typeface="Calibri"/>
+              </a:rPr>
+              <a:t>· </a:t>
+            </a:r>
+            <a:r>
+              <a:rPr sz="1700" b="0" i="0">
+                <a:solidFill>
+                  <a:srgbClr val="1A1A1A"/>
+                </a:solidFill>
+                <a:latin typeface="Calibri"/>
+              </a:rPr>
+              <a:t>差距在 CDCNN 三個元件「之外」——不是方法不夠，是上游有問題</a:t>
+            </a:r>
+          </a:p>
+          <a:p>
+            <a:pPr>
+              <a:spcAft>
+                <a:spcPts val="1200"/>
+              </a:spcAft>
+            </a:pPr>
+            <a:r>
+              <a:rPr sz="1900" b="1" i="0">
+                <a:solidFill>
+                  <a:srgbClr val="1E2761"/>
+                </a:solidFill>
+                <a:latin typeface="Cambria"/>
+              </a:rPr>
+              <a:t>讀完全文與補充資料後找到三個未聲明的差異：</a:t>
+            </a:r>
+          </a:p>
+          <a:p>
+            <a:pPr>
+              <a:spcAft>
+                <a:spcPts val="1200"/>
+              </a:spcAft>
+            </a:pPr>
+            <a:r>
+              <a:rPr sz="1700" b="0" i="0">
+                <a:solidFill>
+                  <a:srgbClr val="CADCFC"/>
+                </a:solidFill>
+                <a:latin typeface="Calibri"/>
+              </a:rPr>
+              <a:t>· </a:t>
+            </a:r>
+            <a:r>
+              <a:rPr sz="1700" b="0" i="0">
+                <a:solidFill>
+                  <a:srgbClr val="1A1A1A"/>
+                </a:solidFill>
+                <a:latin typeface="Calibri"/>
+              </a:rPr>
+              <a:t>對比損失應接在 FC128 之前、且沒有可學的投影 head</a:t>
+            </a:r>
+          </a:p>
+          <a:p>
+            <a:pPr>
+              <a:spcAft>
+                <a:spcPts val="1200"/>
+              </a:spcAft>
+            </a:pPr>
+            <a:r>
+              <a:rPr sz="1700" b="0" i="0">
+                <a:solidFill>
+                  <a:srgbClr val="CADCFC"/>
+                </a:solidFill>
+                <a:latin typeface="Calibri"/>
+              </a:rPr>
+              <a:t>· </a:t>
+            </a:r>
+            <a:r>
+              <a:rPr sz="1700" b="0" i="0">
+                <a:solidFill>
+                  <a:srgbClr val="1A1A1A"/>
+                </a:solidFill>
+                <a:latin typeface="Calibri"/>
+              </a:rPr>
+              <a:t>Eq. (16) 除以的是變異數而非標準差；Block 5 內層為 512 寬</a:t>
+            </a:r>
+          </a:p>
+          <a:p>
+            <a:pPr>
+              <a:spcAft>
+                <a:spcPts val="1200"/>
+              </a:spcAft>
+            </a:pPr>
+            <a:r>
+              <a:rPr sz="1700" b="0" i="0">
+                <a:solidFill>
+                  <a:srgbClr val="CADCFC"/>
+                </a:solidFill>
+                <a:latin typeface="Calibri"/>
+              </a:rPr>
+              <a:t>· </a:t>
+            </a:r>
+            <a:r>
+              <a:rPr sz="1700" b="0" i="0">
+                <a:solidFill>
+                  <a:srgbClr val="1A1A1A"/>
+                </a:solidFill>
+                <a:latin typeface="Calibri"/>
+              </a:rPr>
+              <a:t>論文本身亦有矛盾處：統計量維度前後不一致、Table 2 有兩處計數錯誤</a:t>
+            </a:r>
+          </a:p>
+        </p:txBody>
+      </p:sp>
+    </p:spTree>
+  </p:cSld>
+  <p:clrMapOvr>
+    <a:masterClrMapping/>
+  </p:clrMapOvr>
+</p:sld>
+</file>
+
+<file path=ppt/slides/slide14.xml><?xml version="1.0" encoding="utf-8"?>
+<p:sld xmlns:a="http://schemas.openxmlformats.org/drawingml/2006/main" xmlns:p="http://schemas.openxmlformats.org/presentationml/2006/main" xmlns:r="http://schemas.openxmlformats.org/officeDocument/2006/relationships">
+  <p:cSld>
+    <p:spTree>
+      <p:nvGrpSpPr>
+        <p:cNvPr id="1" name=""/>
+        <p:cNvGrpSpPr/>
+        <p:nvPr/>
+      </p:nvGrpSpPr>
+      <p:grpSpPr/>
+      <p:sp>
+        <p:nvSpPr>
+          <p:cNvPr id="2" name="TextBox 1"/>
+          <p:cNvSpPr txBox="1"/>
+          <p:nvPr/>
+        </p:nvSpPr>
+        <p:spPr>
+          <a:xfrm>
+            <a:off x="685800" y="502920"/>
+            <a:ext cx="10820095" cy="822960"/>
+          </a:xfrm>
+          <a:prstGeom prst="rect">
+            <a:avLst/>
+          </a:prstGeom>
+          <a:noFill/>
+        </p:spPr>
+        <p:txBody>
+          <a:bodyPr wrap="square" lIns="0" rIns="0" tIns="0" bIns="0" anchor="t">
+            <a:spAutoFit/>
+          </a:bodyPr>
+          <a:lstStyle/>
+          <a:p>
+            <a:pPr algn="l"/>
+            <a:r>
+              <a:rPr sz="3400" b="1" i="0">
+                <a:solidFill>
+                  <a:srgbClr val="1E2761"/>
+                </a:solidFill>
+                <a:latin typeface="Cambria"/>
+              </a:rPr>
+              <a:t>突破：逐樣本輸入正規化</a:t>
+            </a:r>
+          </a:p>
+        </p:txBody>
+      </p:sp>
+      <p:sp>
+        <p:nvSpPr>
+          <p:cNvPr id="3" name="Rounded Rectangle 2"/>
+          <p:cNvSpPr/>
+          <p:nvPr/>
+        </p:nvSpPr>
+        <p:spPr>
+          <a:xfrm>
+            <a:off x="685800" y="1783080"/>
+            <a:ext cx="2464993" cy="1600200"/>
+          </a:xfrm>
+          <a:prstGeom prst="roundRect">
+            <a:avLst/>
+          </a:prstGeom>
+          <a:solidFill>
+            <a:srgbClr val="F2F5FC"/>
+          </a:solidFill>
+          <a:ln>
+            <a:solidFill>
+              <a:srgbClr val="CADCFC"/>
+            </a:solidFill>
+          </a:ln>
+          <a:effectLst/>
+        </p:spPr>
+        <p:style>
+          <a:lnRef idx="1">
+            <a:schemeClr val="accent1"/>
+          </a:lnRef>
+          <a:fillRef idx="3">
+            <a:schemeClr val="accent1"/>
+          </a:fillRef>
+          <a:effectRef idx="2">
+            <a:schemeClr val="accent1"/>
+          </a:effectRef>
+          <a:fontRef idx="minor">
+            <a:schemeClr val="lt1"/>
+          </a:fontRef>
+        </p:style>
+        <p:txBody>
+          <a:bodyPr rtlCol="0" anchor="ctr"/>
+          <a:lstStyle/>
+          <a:p>
+            <a:pPr algn="ctr"/>
+          </a:p>
+        </p:txBody>
+      </p:sp>
+      <p:sp>
+        <p:nvSpPr>
+          <p:cNvPr id="4" name="TextBox 3"/>
+          <p:cNvSpPr txBox="1"/>
+          <p:nvPr/>
+        </p:nvSpPr>
+        <p:spPr>
+          <a:xfrm>
+            <a:off x="685800" y="1965960"/>
+            <a:ext cx="2464993" cy="1280160"/>
+          </a:xfrm>
+          <a:prstGeom prst="rect">
+            <a:avLst/>
+          </a:prstGeom>
+          <a:noFill/>
+        </p:spPr>
+        <p:txBody>
+          <a:bodyPr wrap="square" lIns="0" rIns="0" tIns="0" bIns="0" anchor="t">
+            <a:spAutoFit/>
+          </a:bodyPr>
+          <a:lstStyle/>
+          <a:p>
+            <a:pPr algn="ctr"/>
+            <a:r>
+              <a:rPr sz="4000" b="1" i="0">
+                <a:solidFill>
+                  <a:srgbClr val="1E2761"/>
+                </a:solidFill>
+                <a:latin typeface="Cambria"/>
+              </a:rPr>
+              <a:t>+0.109</a:t>
+            </a:r>
+          </a:p>
+          <a:p>
+            <a:pPr algn="ctr">
+              <a:spcBef>
+                <a:spcPts val="400"/>
+              </a:spcBef>
+            </a:pPr>
+            <a:r>
+              <a:rPr sz="1300" b="0" i="0">
+                <a:solidFill>
+                  <a:srgbClr val="5A5A66"/>
+                </a:solidFill>
+                <a:latin typeface="Calibri"/>
+              </a:rPr>
+              <a:t>逐樣本輸入正規化</a:t>
+            </a:r>
+          </a:p>
+        </p:txBody>
+      </p:sp>
+      <p:sp>
+        <p:nvSpPr>
+          <p:cNvPr id="5" name="Rounded Rectangle 4"/>
+          <p:cNvSpPr/>
+          <p:nvPr/>
+        </p:nvSpPr>
+        <p:spPr>
+          <a:xfrm>
+            <a:off x="3470833" y="1783080"/>
+            <a:ext cx="2464993" cy="1600200"/>
+          </a:xfrm>
+          <a:prstGeom prst="roundRect">
+            <a:avLst/>
+          </a:prstGeom>
+          <a:solidFill>
+            <a:srgbClr val="F2F5FC"/>
+          </a:solidFill>
+          <a:ln>
+            <a:solidFill>
+              <a:srgbClr val="CADCFC"/>
+            </a:solidFill>
+          </a:ln>
+          <a:effectLst/>
+        </p:spPr>
+        <p:style>
+          <a:lnRef idx="1">
+            <a:schemeClr val="accent1"/>
+          </a:lnRef>
+          <a:fillRef idx="3">
+            <a:schemeClr val="accent1"/>
+          </a:fillRef>
+          <a:effectRef idx="2">
+            <a:schemeClr val="accent1"/>
+          </a:effectRef>
+          <a:fontRef idx="minor">
+            <a:schemeClr val="lt1"/>
+          </a:fontRef>
+        </p:style>
+        <p:txBody>
+          <a:bodyPr rtlCol="0" anchor="ctr"/>
+          <a:lstStyle/>
+          <a:p>
+            <a:pPr algn="ctr"/>
+          </a:p>
+        </p:txBody>
+      </p:sp>
+      <p:sp>
+        <p:nvSpPr>
+          <p:cNvPr id="6" name="TextBox 5"/>
+          <p:cNvSpPr txBox="1"/>
+          <p:nvPr/>
+        </p:nvSpPr>
+        <p:spPr>
+          <a:xfrm>
+            <a:off x="3470833" y="1965960"/>
+            <a:ext cx="2464993" cy="1280160"/>
+          </a:xfrm>
+          <a:prstGeom prst="rect">
+            <a:avLst/>
+          </a:prstGeom>
+          <a:noFill/>
+        </p:spPr>
+        <p:txBody>
+          <a:bodyPr wrap="square" lIns="0" rIns="0" tIns="0" bIns="0" anchor="t">
+            <a:spAutoFit/>
+          </a:bodyPr>
+          <a:lstStyle/>
+          <a:p>
+            <a:pPr algn="ctr"/>
+            <a:r>
+              <a:rPr sz="4000" b="1" i="0">
+                <a:solidFill>
+                  <a:srgbClr val="1E2761"/>
+                </a:solidFill>
+                <a:latin typeface="Cambria"/>
+              </a:rPr>
+              <a:t>+0.085</a:t>
+            </a:r>
+          </a:p>
+          <a:p>
+            <a:pPr algn="ctr">
+              <a:spcBef>
+                <a:spcPts val="400"/>
+              </a:spcBef>
+            </a:pPr>
+            <a:r>
+              <a:rPr sz="1300" b="0" i="0">
+                <a:solidFill>
+                  <a:srgbClr val="5A5A66"/>
+                </a:solidFill>
+                <a:latin typeface="Calibri"/>
+              </a:rPr>
+              <a:t>LayerNorm</a:t>
+            </a:r>
+          </a:p>
+        </p:txBody>
+      </p:sp>
+      <p:sp>
+        <p:nvSpPr>
+          <p:cNvPr id="7" name="Rounded Rectangle 6"/>
+          <p:cNvSpPr/>
+          <p:nvPr/>
+        </p:nvSpPr>
+        <p:spPr>
+          <a:xfrm>
+            <a:off x="6255867" y="1783080"/>
+            <a:ext cx="2464993" cy="1600200"/>
+          </a:xfrm>
+          <a:prstGeom prst="roundRect">
+            <a:avLst/>
+          </a:prstGeom>
+          <a:solidFill>
+            <a:srgbClr val="F2F5FC"/>
+          </a:solidFill>
+          <a:ln>
+            <a:solidFill>
+              <a:srgbClr val="CADCFC"/>
+            </a:solidFill>
+          </a:ln>
+          <a:effectLst/>
+        </p:spPr>
+        <p:style>
+          <a:lnRef idx="1">
+            <a:schemeClr val="accent1"/>
+          </a:lnRef>
+          <a:fillRef idx="3">
+            <a:schemeClr val="accent1"/>
+          </a:fillRef>
+          <a:effectRef idx="2">
+            <a:schemeClr val="accent1"/>
+          </a:effectRef>
+          <a:fontRef idx="minor">
+            <a:schemeClr val="lt1"/>
+          </a:fontRef>
+        </p:style>
+        <p:txBody>
+          <a:bodyPr rtlCol="0" anchor="ctr"/>
+          <a:lstStyle/>
+          <a:p>
+            <a:pPr algn="ctr"/>
+          </a:p>
+        </p:txBody>
+      </p:sp>
+      <p:sp>
+        <p:nvSpPr>
+          <p:cNvPr id="8" name="TextBox 7"/>
+          <p:cNvSpPr txBox="1"/>
+          <p:nvPr/>
+        </p:nvSpPr>
+        <p:spPr>
+          <a:xfrm>
+            <a:off x="6255867" y="1965960"/>
+            <a:ext cx="2464993" cy="1280160"/>
+          </a:xfrm>
+          <a:prstGeom prst="rect">
+            <a:avLst/>
+          </a:prstGeom>
+          <a:noFill/>
+        </p:spPr>
+        <p:txBody>
+          <a:bodyPr wrap="square" lIns="0" rIns="0" tIns="0" bIns="0" anchor="t">
+            <a:spAutoFit/>
+          </a:bodyPr>
+          <a:lstStyle/>
+          <a:p>
+            <a:pPr algn="ctr"/>
+            <a:r>
+              <a:rPr sz="4000" b="1" i="0">
+                <a:solidFill>
+                  <a:srgbClr val="1E2761"/>
+                </a:solidFill>
+                <a:latin typeface="Cambria"/>
+              </a:rPr>
+              <a:t>+0.149</a:t>
+            </a:r>
+          </a:p>
+          <a:p>
+            <a:pPr algn="ctr">
+              <a:spcBef>
+                <a:spcPts val="400"/>
+              </a:spcBef>
+            </a:pPr>
+            <a:r>
+              <a:rPr sz="1300" b="0" i="0">
+                <a:solidFill>
+                  <a:srgbClr val="5A5A66"/>
+                </a:solidFill>
+                <a:latin typeface="Calibri"/>
+              </a:rPr>
+              <a:t>兩者合併</a:t>
+            </a:r>
+          </a:p>
+        </p:txBody>
+      </p:sp>
+      <p:sp>
+        <p:nvSpPr>
+          <p:cNvPr id="9" name="Rounded Rectangle 8"/>
+          <p:cNvSpPr/>
+          <p:nvPr/>
+        </p:nvSpPr>
+        <p:spPr>
+          <a:xfrm>
+            <a:off x="9040901" y="1783080"/>
+            <a:ext cx="2464993" cy="1600200"/>
+          </a:xfrm>
+          <a:prstGeom prst="roundRect">
+            <a:avLst/>
+          </a:prstGeom>
+          <a:solidFill>
+            <a:srgbClr val="F2F5FC"/>
+          </a:solidFill>
+          <a:ln>
+            <a:solidFill>
+              <a:srgbClr val="CADCFC"/>
+            </a:solidFill>
+          </a:ln>
+          <a:effectLst/>
+        </p:spPr>
+        <p:style>
+          <a:lnRef idx="1">
+            <a:schemeClr val="accent1"/>
+          </a:lnRef>
+          <a:fillRef idx="3">
+            <a:schemeClr val="accent1"/>
+          </a:fillRef>
+          <a:effectRef idx="2">
+            <a:schemeClr val="accent1"/>
+          </a:effectRef>
+          <a:fontRef idx="minor">
+            <a:schemeClr val="lt1"/>
+          </a:fontRef>
+        </p:style>
+        <p:txBody>
+          <a:bodyPr rtlCol="0" anchor="ctr"/>
+          <a:lstStyle/>
+          <a:p>
+            <a:pPr algn="ctr"/>
+          </a:p>
+        </p:txBody>
+      </p:sp>
+      <p:sp>
+        <p:nvSpPr>
+          <p:cNvPr id="10" name="TextBox 9"/>
+          <p:cNvSpPr txBox="1"/>
+          <p:nvPr/>
+        </p:nvSpPr>
+        <p:spPr>
+          <a:xfrm>
+            <a:off x="9040901" y="1965960"/>
+            <a:ext cx="2464993" cy="1280160"/>
+          </a:xfrm>
+          <a:prstGeom prst="rect">
+            <a:avLst/>
+          </a:prstGeom>
+          <a:noFill/>
+        </p:spPr>
+        <p:txBody>
+          <a:bodyPr wrap="square" lIns="0" rIns="0" tIns="0" bIns="0" anchor="t">
+            <a:spAutoFit/>
+          </a:bodyPr>
+          <a:lstStyle/>
+          <a:p>
+            <a:pPr algn="ctr"/>
+            <a:r>
+              <a:rPr sz="4000" b="1" i="0">
+                <a:solidFill>
+                  <a:srgbClr val="1E2761"/>
+                </a:solidFill>
+                <a:latin typeface="Cambria"/>
+              </a:rPr>
+              <a:t>0/5</a:t>
+            </a:r>
+          </a:p>
+          <a:p>
+            <a:pPr algn="ctr">
+              <a:spcBef>
+                <a:spcPts val="400"/>
+              </a:spcBef>
+            </a:pPr>
+            <a:r>
+              <a:rPr sz="1300" b="0" i="0">
+                <a:solidFill>
+                  <a:srgbClr val="5A5A66"/>
+                </a:solidFill>
+                <a:latin typeface="Calibri"/>
+              </a:rPr>
+              <a:t>壓極端值（clip）有效的種子</a:t>
+            </a:r>
+          </a:p>
+        </p:txBody>
+      </p:sp>
+      <p:sp>
+        <p:nvSpPr>
+          <p:cNvPr id="11" name="TextBox 10"/>
+          <p:cNvSpPr txBox="1"/>
+          <p:nvPr/>
+        </p:nvSpPr>
+        <p:spPr>
+          <a:xfrm>
+            <a:off x="685800" y="3794760"/>
+            <a:ext cx="10820095" cy="2423160"/>
+          </a:xfrm>
+          <a:prstGeom prst="rect">
+            <a:avLst/>
+          </a:prstGeom>
+          <a:noFill/>
+        </p:spPr>
+        <p:txBody>
+          <a:bodyPr wrap="square" lIns="0" rIns="0" tIns="0" bIns="0" anchor="t">
+            <a:spAutoFit/>
+          </a:bodyPr>
+          <a:lstStyle/>
+          <a:p>
+            <a:pPr algn="l">
+              <a:spcAft>
+                <a:spcPts val="1200"/>
+              </a:spcAft>
+            </a:pPr>
+            <a:r>
+              <a:rPr sz="1700" b="1" i="0">
+                <a:solidFill>
+                  <a:srgbClr val="C0392B"/>
+                </a:solidFill>
+                <a:latin typeface="Calibri"/>
+              </a:rPr>
+              <a:t>▍ </a:t>
+            </a:r>
+            <a:r>
+              <a:rPr sz="1700" b="1" i="0">
+                <a:solidFill>
+                  <a:srgbClr val="1A1A1A"/>
+                </a:solidFill>
+                <a:latin typeface="Calibri"/>
+              </a:rPr>
+              <a:t>在 Batch 1 的 scaler 下，Batch 2 有 |z| ≈ 1.5×10⁴ 的極端值</a:t>
+            </a:r>
+          </a:p>
+          <a:p>
+            <a:pPr>
+              <a:spcAft>
+                <a:spcPts val="1200"/>
+              </a:spcAft>
+            </a:pPr>
+            <a:r>
+              <a:rPr sz="1700" b="0" i="0">
+                <a:solidFill>
+                  <a:srgbClr val="CADCFC"/>
+                </a:solidFill>
+                <a:latin typeface="Calibri"/>
+              </a:rPr>
+              <a:t>· </a:t>
+            </a:r>
+            <a:r>
+              <a:rPr sz="1700" b="0" i="0">
+                <a:solidFill>
+                  <a:srgbClr val="1A1A1A"/>
+                </a:solidFill>
+                <a:latin typeface="Calibri"/>
+              </a:rPr>
+              <a:t>但 signed-log 與 clip 都無效——有效的是移除每個樣本自己的偏移與增益</a:t>
+            </a:r>
+          </a:p>
+          <a:p>
+            <a:pPr>
+              <a:spcAft>
+                <a:spcPts val="1200"/>
+              </a:spcAft>
+            </a:pPr>
+            <a:r>
+              <a:rPr sz="1700" b="0" i="0">
+                <a:solidFill>
+                  <a:srgbClr val="CADCFC"/>
+                </a:solidFill>
+                <a:latin typeface="Calibri"/>
+              </a:rPr>
+              <a:t>· </a:t>
+            </a:r>
+            <a:r>
+              <a:rPr sz="1700" b="0" i="0">
+                <a:solidFill>
+                  <a:srgbClr val="1A1A1A"/>
+                </a:solidFill>
+                <a:latin typeface="Calibri"/>
+              </a:rPr>
+              <a:t>兩者皆為 5/5 種子改善</a:t>
+            </a:r>
+          </a:p>
+        </p:txBody>
+      </p:sp>
+    </p:spTree>
+  </p:cSld>
+  <p:clrMapOvr>
+    <a:masterClrMapping/>
+  </p:clrMapOvr>
+</p:sld>
+</file>
+
+<file path=ppt/slides/slide15.xml><?xml version="1.0" encoding="utf-8"?>
+<p:sld xmlns:a="http://schemas.openxmlformats.org/drawingml/2006/main" xmlns:p="http://schemas.openxmlformats.org/presentationml/2006/main" xmlns:r="http://schemas.openxmlformats.org/officeDocument/2006/relationships">
+  <p:cSld>
+    <p:spTree>
+      <p:nvGrpSpPr>
+        <p:cNvPr id="1" name=""/>
+        <p:cNvGrpSpPr/>
+        <p:nvPr/>
+      </p:nvGrpSpPr>
+      <p:grpSpPr/>
+      <p:sp>
+        <p:nvSpPr>
+          <p:cNvPr id="2" name="TextBox 1"/>
+          <p:cNvSpPr txBox="1"/>
+          <p:nvPr/>
+        </p:nvSpPr>
+        <p:spPr>
+          <a:xfrm>
+            <a:off x="685800" y="502920"/>
+            <a:ext cx="10820095" cy="822960"/>
+          </a:xfrm>
+          <a:prstGeom prst="rect">
+            <a:avLst/>
+          </a:prstGeom>
+          <a:noFill/>
+        </p:spPr>
+        <p:txBody>
+          <a:bodyPr wrap="square" lIns="0" rIns="0" tIns="0" bIns="0" anchor="t">
+            <a:spAutoFit/>
+          </a:bodyPr>
+          <a:lstStyle/>
+          <a:p>
+            <a:pPr algn="l"/>
+            <a:r>
+              <a:rPr sz="3400" b="1" i="0">
+                <a:solidFill>
+                  <a:srgbClr val="1E2761"/>
+                </a:solidFill>
+                <a:latin typeface="Cambria"/>
+              </a:rPr>
+              <a:t>進步從哪裡來</a:t>
+            </a:r>
+          </a:p>
+        </p:txBody>
+      </p:sp>
+      <p:graphicFrame>
+        <p:nvGraphicFramePr>
+          <p:cNvPr id="3" name="Table 2"/>
+          <p:cNvGraphicFramePr>
+            <a:graphicFrameLocks noGrp="1"/>
+          </p:cNvGraphicFramePr>
+          <p:nvPr/>
+        </p:nvGraphicFramePr>
+        <p:xfrm>
+          <a:off x="685800" y="1783080"/>
+          <a:ext cx="10820095" cy="3456432"/>
+        </p:xfrm>
+        <a:graphic>
+          <a:graphicData uri="http://schemas.openxmlformats.org/drawingml/2006/table">
+            <a:tbl>
+              <a:tblPr firstRow="1" bandRow="1">
+                <a:tableStyleId>{5C22544A-7EE6-4342-B048-85BDC9FD1C3A}</a:tableStyleId>
+              </a:tblPr>
+              <a:tblGrid>
+                <a:gridCol w="6492057"/>
+                <a:gridCol w="4328038"/>
+              </a:tblGrid>
+              <a:tr h="384048">
+                <a:tc>
+                  <a:txBody>
+                    <a:bodyPr/>
+                    <a:lstStyle/>
+                    <a:p>
+                      <a:pPr algn="l"/>
+                      <a:r>
+                        <a:rPr sz="1300" b="1">
+                          <a:solidFill>
+                            <a:srgbClr val="FFFFFF"/>
+                          </a:solidFill>
+                          <a:latin typeface="Calibri"/>
+                        </a:rPr>
+                        <a:t>模型</a:t>
+                      </a:r>
+                    </a:p>
+                  </a:txBody>
+                  <a:tcPr>
+                    <a:solidFill>
+                      <a:srgbClr val="1E2761"/>
+                    </a:solidFill>
+                  </a:tcPr>
+                </a:tc>
+                <a:tc>
+                  <a:txBody>
+                    <a:bodyPr/>
+                    <a:lstStyle/>
+                    <a:p>
+                      <a:pPr algn="r"/>
+                      <a:r>
+                        <a:rPr sz="1300" b="1">
+                          <a:solidFill>
+                            <a:srgbClr val="FFFFFF"/>
+                          </a:solidFill>
+                          <a:latin typeface="Calibri"/>
+                        </a:rPr>
+                        <a:t>Target mean</a:t>
+                      </a:r>
+                    </a:p>
+                  </a:txBody>
+                  <a:tcPr>
+                    <a:solidFill>
+                      <a:srgbClr val="1E2761"/>
+                    </a:solidFill>
+                  </a:tcPr>
+                </a:tc>
+              </a:tr>
+              <a:tr h="384048">
+                <a:tc>
+                  <a:txBody>
+                    <a:bodyPr/>
+                    <a:lstStyle/>
+                    <a:p>
+                      <a:pPr algn="l"/>
+                      <a:r>
+                        <a:rPr sz="1300" b="0">
+                          <a:solidFill>
+                            <a:srgbClr val="1A1A1A"/>
+                          </a:solidFill>
+                          <a:latin typeface="Calibri"/>
+                        </a:rPr>
+                        <a:t>A1 增強</a:t>
+                      </a:r>
+                    </a:p>
+                  </a:txBody>
+                  <a:tcPr>
+                    <a:solidFill>
+                      <a:srgbClr val="F2F5FC"/>
+                    </a:solidFill>
+                  </a:tcPr>
+                </a:tc>
+                <a:tc>
+                  <a:txBody>
+                    <a:bodyPr/>
+                    <a:lstStyle/>
+                    <a:p>
+                      <a:pPr algn="r"/>
+                      <a:r>
+                        <a:rPr sz="1300" b="0">
+                          <a:solidFill>
+                            <a:srgbClr val="1A1A1A"/>
+                          </a:solidFill>
+                          <a:latin typeface="Calibri"/>
+                        </a:rPr>
+                        <a:t>0.372</a:t>
+                      </a:r>
+                    </a:p>
+                  </a:txBody>
+                  <a:tcPr>
+                    <a:solidFill>
+                      <a:srgbClr val="F2F5FC"/>
+                    </a:solidFill>
+                  </a:tcPr>
+                </a:tc>
+              </a:tr>
+              <a:tr h="384048">
+                <a:tc>
+                  <a:txBody>
+                    <a:bodyPr/>
+                    <a:lstStyle/>
+                    <a:p>
+                      <a:pPr algn="l"/>
+                      <a:r>
+                        <a:rPr sz="1300" b="0">
+                          <a:solidFill>
+                            <a:srgbClr val="1A1A1A"/>
+                          </a:solidFill>
+                          <a:latin typeface="Calibri"/>
+                        </a:rPr>
+                        <a:t>A2 特徵生成</a:t>
+                      </a:r>
+                    </a:p>
+                  </a:txBody>
+                  <a:tcPr>
+                    <a:solidFill>
+                      <a:srgbClr val="FFFFFF"/>
+                    </a:solidFill>
+                  </a:tcPr>
+                </a:tc>
+                <a:tc>
+                  <a:txBody>
+                    <a:bodyPr/>
+                    <a:lstStyle/>
+                    <a:p>
+                      <a:pPr algn="r"/>
+                      <a:r>
+                        <a:rPr sz="1300" b="0">
+                          <a:solidFill>
+                            <a:srgbClr val="1A1A1A"/>
+                          </a:solidFill>
+                          <a:latin typeface="Calibri"/>
+                        </a:rPr>
+                        <a:t>0.397</a:t>
+                      </a:r>
+                    </a:p>
+                  </a:txBody>
+                  <a:tcPr>
+                    <a:solidFill>
+                      <a:srgbClr val="FFFFFF"/>
+                    </a:solidFill>
+                  </a:tcPr>
+                </a:tc>
+              </a:tr>
+              <a:tr h="384048">
+                <a:tc>
+                  <a:txBody>
+                    <a:bodyPr/>
+                    <a:lstStyle/>
+                    <a:p>
+                      <a:pPr algn="l"/>
+                      <a:r>
+                        <a:rPr sz="1300" b="0">
+                          <a:solidFill>
+                            <a:srgbClr val="1A1A1A"/>
+                          </a:solidFill>
+                          <a:latin typeface="Calibri"/>
+                        </a:rPr>
+                        <a:t>B0 基線</a:t>
+                      </a:r>
+                    </a:p>
+                  </a:txBody>
+                  <a:tcPr>
+                    <a:solidFill>
+                      <a:srgbClr val="F2F5FC"/>
+                    </a:solidFill>
+                  </a:tcPr>
+                </a:tc>
+                <a:tc>
+                  <a:txBody>
+                    <a:bodyPr/>
+                    <a:lstStyle/>
+                    <a:p>
+                      <a:pPr algn="r"/>
+                      <a:r>
+                        <a:rPr sz="1300" b="0">
+                          <a:solidFill>
+                            <a:srgbClr val="1A1A1A"/>
+                          </a:solidFill>
+                          <a:latin typeface="Calibri"/>
+                        </a:rPr>
+                        <a:t>0.410</a:t>
+                      </a:r>
+                    </a:p>
+                  </a:txBody>
+                  <a:tcPr>
+                    <a:solidFill>
+                      <a:srgbClr val="F2F5FC"/>
+                    </a:solidFill>
+                  </a:tcPr>
+                </a:tc>
+              </a:tr>
+              <a:tr h="384048">
+                <a:tc>
+                  <a:txBody>
+                    <a:bodyPr/>
+                    <a:lstStyle/>
+                    <a:p>
+                      <a:pPr algn="l"/>
+                      <a:r>
+                        <a:rPr sz="1300" b="1">
+                          <a:solidFill>
+                            <a:srgbClr val="C0392B"/>
+                          </a:solidFill>
+                          <a:latin typeface="Calibri"/>
+                        </a:rPr>
+                        <a:t>A3 完整 CDCNN（v6.3）</a:t>
+                      </a:r>
+                    </a:p>
+                  </a:txBody>
+                  <a:tcPr>
+                    <a:solidFill>
+                      <a:srgbClr val="FFFFFF"/>
+                    </a:solidFill>
+                  </a:tcPr>
+                </a:tc>
+                <a:tc>
+                  <a:txBody>
+                    <a:bodyPr/>
+                    <a:lstStyle/>
+                    <a:p>
+                      <a:pPr algn="r"/>
+                      <a:r>
+                        <a:rPr sz="1300" b="1">
+                          <a:solidFill>
+                            <a:srgbClr val="C0392B"/>
+                          </a:solidFill>
+                          <a:latin typeface="Calibri"/>
+                        </a:rPr>
+                        <a:t>0.460</a:t>
+                      </a:r>
+                    </a:p>
+                  </a:txBody>
+                  <a:tcPr>
+                    <a:solidFill>
+                      <a:srgbClr val="FFFFFF"/>
+                    </a:solidFill>
+                  </a:tcPr>
+                </a:tc>
+              </a:tr>
+              <a:tr h="384048">
+                <a:tc>
+                  <a:txBody>
+                    <a:bodyPr/>
+                    <a:lstStyle/>
+                    <a:p>
+                      <a:pPr algn="l"/>
+                      <a:r>
+                        <a:rPr sz="1300" b="0">
+                          <a:solidFill>
+                            <a:srgbClr val="1A1A1A"/>
+                          </a:solidFill>
+                          <a:latin typeface="Calibri"/>
+                        </a:rPr>
+                        <a:t>+ LayerNorm</a:t>
+                      </a:r>
+                    </a:p>
+                  </a:txBody>
+                  <a:tcPr>
+                    <a:solidFill>
+                      <a:srgbClr val="F2F5FC"/>
+                    </a:solidFill>
+                  </a:tcPr>
+                </a:tc>
+                <a:tc>
+                  <a:txBody>
+                    <a:bodyPr/>
+                    <a:lstStyle/>
+                    <a:p>
+                      <a:pPr algn="r"/>
+                      <a:r>
+                        <a:rPr sz="1300" b="0">
+                          <a:solidFill>
+                            <a:srgbClr val="1A1A1A"/>
+                          </a:solidFill>
+                          <a:latin typeface="Calibri"/>
+                        </a:rPr>
+                        <a:t>0.492</a:t>
+                      </a:r>
+                    </a:p>
+                  </a:txBody>
+                  <a:tcPr>
+                    <a:solidFill>
+                      <a:srgbClr val="F2F5FC"/>
+                    </a:solidFill>
+                  </a:tcPr>
+                </a:tc>
+              </a:tr>
+              <a:tr h="384048">
+                <a:tc>
+                  <a:txBody>
+                    <a:bodyPr/>
+                    <a:lstStyle/>
+                    <a:p>
+                      <a:pPr algn="l"/>
+                      <a:r>
+                        <a:rPr sz="1300" b="0">
+                          <a:solidFill>
+                            <a:srgbClr val="1A1A1A"/>
+                          </a:solidFill>
+                          <a:latin typeface="Calibri"/>
+                        </a:rPr>
+                        <a:t>+ 逐樣本輸入</a:t>
+                      </a:r>
+                    </a:p>
+                  </a:txBody>
+                  <a:tcPr>
+                    <a:solidFill>
+                      <a:srgbClr val="FFFFFF"/>
+                    </a:solidFill>
+                  </a:tcPr>
+                </a:tc>
+                <a:tc>
+                  <a:txBody>
+                    <a:bodyPr/>
+                    <a:lstStyle/>
+                    <a:p>
+                      <a:pPr algn="r"/>
+                      <a:r>
+                        <a:rPr sz="1300" b="0">
+                          <a:solidFill>
+                            <a:srgbClr val="1A1A1A"/>
+                          </a:solidFill>
+                          <a:latin typeface="Calibri"/>
+                        </a:rPr>
+                        <a:t>0.557</a:t>
+                      </a:r>
+                    </a:p>
+                  </a:txBody>
+                  <a:tcPr>
+                    <a:solidFill>
+                      <a:srgbClr val="FFFFFF"/>
+                    </a:solidFill>
+                  </a:tcPr>
+                </a:tc>
+              </a:tr>
+              <a:tr h="384048">
+                <a:tc>
+                  <a:txBody>
+                    <a:bodyPr/>
+                    <a:lstStyle/>
+                    <a:p>
+                      <a:pPr algn="l"/>
+                      <a:r>
+                        <a:rPr sz="1300" b="1">
+                          <a:solidFill>
+                            <a:srgbClr val="C0392B"/>
+                          </a:solidFill>
+                          <a:latin typeface="Calibri"/>
+                        </a:rPr>
+                        <a:t>+ 界限（目前最佳）</a:t>
+                      </a:r>
+                    </a:p>
+                  </a:txBody>
+                  <a:tcPr>
+                    <a:solidFill>
+                      <a:srgbClr val="F2F5FC"/>
+                    </a:solidFill>
+                  </a:tcPr>
+                </a:tc>
+                <a:tc>
+                  <a:txBody>
+                    <a:bodyPr/>
+                    <a:lstStyle/>
+                    <a:p>
+                      <a:pPr algn="r"/>
+                      <a:r>
+                        <a:rPr sz="1300" b="1">
+                          <a:solidFill>
+                            <a:srgbClr val="C0392B"/>
+                          </a:solidFill>
+                          <a:latin typeface="Calibri"/>
+                        </a:rPr>
+                        <a:t>0.561</a:t>
+                      </a:r>
+                    </a:p>
+                  </a:txBody>
+                  <a:tcPr>
+                    <a:solidFill>
+                      <a:srgbClr val="F2F5FC"/>
+                    </a:solidFill>
+                  </a:tcPr>
+                </a:tc>
+              </a:tr>
+              <a:tr h="384048">
+                <a:tc>
+                  <a:txBody>
+                    <a:bodyPr/>
+                    <a:lstStyle/>
+                    <a:p>
+                      <a:pPr algn="l"/>
+                      <a:r>
+                        <a:rPr sz="1300" b="0">
+                          <a:solidFill>
+                            <a:srgbClr val="1A1A1A"/>
+                          </a:solidFill>
+                          <a:latin typeface="Calibri"/>
+                        </a:rPr>
+                        <a:t>論文 ResNet / CDWC / CDCNN</a:t>
+                      </a:r>
+                    </a:p>
+                  </a:txBody>
+                  <a:tcPr>
+                    <a:solidFill>
+                      <a:srgbClr val="FFFFFF"/>
+                    </a:solidFill>
+                  </a:tcPr>
+                </a:tc>
+                <a:tc>
+                  <a:txBody>
+                    <a:bodyPr/>
+                    <a:lstStyle/>
+                    <a:p>
+                      <a:pPr algn="r"/>
+                      <a:r>
+                        <a:rPr sz="1300" b="0">
+                          <a:solidFill>
+                            <a:srgbClr val="1A1A1A"/>
+                          </a:solidFill>
+                          <a:latin typeface="Calibri"/>
+                        </a:rPr>
+                        <a:t>0.634 / 0.670 / 0.723</a:t>
+                      </a:r>
+                    </a:p>
+                  </a:txBody>
+                  <a:tcPr>
+                    <a:solidFill>
+                      <a:srgbClr val="FFFFFF"/>
+                    </a:solidFill>
+                  </a:tcPr>
+                </a:tc>
+              </a:tr>
+            </a:tbl>
+          </a:graphicData>
+        </a:graphic>
+      </p:graphicFrame>
+      <p:sp>
+        <p:nvSpPr>
+          <p:cNvPr id="4" name="TextBox 3"/>
+          <p:cNvSpPr txBox="1"/>
+          <p:nvPr/>
+        </p:nvSpPr>
+        <p:spPr>
+          <a:xfrm>
+            <a:off x="685800" y="5495544"/>
+            <a:ext cx="10820095" cy="914400"/>
+          </a:xfrm>
+          <a:prstGeom prst="rect">
+            <a:avLst/>
+          </a:prstGeom>
+          <a:noFill/>
+        </p:spPr>
+        <p:txBody>
+          <a:bodyPr wrap="square" lIns="0" rIns="0" tIns="0" bIns="0" anchor="t">
+            <a:spAutoFit/>
+          </a:bodyPr>
+          <a:lstStyle/>
+          <a:p>
+            <a:pPr algn="l"/>
+            <a:r>
+              <a:rPr sz="1300" b="0" i="0">
+                <a:solidFill>
+                  <a:srgbClr val="5A5A66"/>
+                </a:solidFill>
+                <a:latin typeface="Calibri"/>
+              </a:rPr>
+              <a:t>0.460 → 0.561，全部來自正規化，不是來自 CDCNN 的任何一個元件。</a:t>
+            </a:r>
+          </a:p>
+        </p:txBody>
+      </p:sp>
+    </p:spTree>
+  </p:cSld>
+  <p:clrMapOvr>
+    <a:masterClrMapping/>
+  </p:clrMapOvr>
+</p:sld>
+</file>
+
+<file path=ppt/slides/slide16.xml><?xml version="1.0" encoding="utf-8"?>
+<p:sld xmlns:a="http://schemas.openxmlformats.org/drawingml/2006/main" xmlns:p="http://schemas.openxmlformats.org/presentationml/2006/main" xmlns:r="http://schemas.openxmlformats.org/officeDocument/2006/relationships">
+  <p:cSld>
+    <p:spTree>
+      <p:nvGrpSpPr>
+        <p:cNvPr id="1" name=""/>
+        <p:cNvGrpSpPr/>
+        <p:nvPr/>
+      </p:nvGrpSpPr>
+      <p:grpSpPr/>
+      <p:sp>
+        <p:nvSpPr>
+          <p:cNvPr id="2" name="TextBox 1"/>
+          <p:cNvSpPr txBox="1"/>
+          <p:nvPr/>
+        </p:nvSpPr>
+        <p:spPr>
+          <a:xfrm>
+            <a:off x="685800" y="502920"/>
+            <a:ext cx="10820095" cy="822960"/>
+          </a:xfrm>
+          <a:prstGeom prst="rect">
+            <a:avLst/>
+          </a:prstGeom>
+          <a:noFill/>
+        </p:spPr>
+        <p:txBody>
+          <a:bodyPr wrap="square" lIns="0" rIns="0" tIns="0" bIns="0" anchor="t">
+            <a:spAutoFit/>
+          </a:bodyPr>
+          <a:lstStyle/>
+          <a:p>
+            <a:pPr algn="l"/>
+            <a:r>
+              <a:rPr sz="3400" b="1" i="0">
+                <a:solidFill>
+                  <a:srgbClr val="1E2761"/>
+                </a:solidFill>
+                <a:latin typeface="Cambria"/>
+              </a:rPr>
+              <a:t>輸入修好後，CDCNN 元件仍然無效</a:t>
+            </a:r>
+          </a:p>
+        </p:txBody>
+      </p:sp>
+      <p:graphicFrame>
+        <p:nvGraphicFramePr>
+          <p:cNvPr id="3" name="Table 2"/>
+          <p:cNvGraphicFramePr>
+            <a:graphicFrameLocks noGrp="1"/>
+          </p:cNvGraphicFramePr>
+          <p:nvPr/>
+        </p:nvGraphicFramePr>
+        <p:xfrm>
+          <a:off x="685800" y="1783080"/>
+          <a:ext cx="10820094" cy="1536192"/>
+        </p:xfrm>
+        <a:graphic>
+          <a:graphicData uri="http://schemas.openxmlformats.org/drawingml/2006/table">
+            <a:tbl>
+              <a:tblPr firstRow="1" bandRow="1">
+                <a:tableStyleId>{5C22544A-7EE6-4342-B048-85BDC9FD1C3A}</a:tableStyleId>
+              </a:tblPr>
+              <a:tblGrid>
+                <a:gridCol w="4328038"/>
+                <a:gridCol w="3246028"/>
+                <a:gridCol w="3246028"/>
+              </a:tblGrid>
+              <a:tr h="384048">
+                <a:tc>
+                  <a:txBody>
+                    <a:bodyPr/>
+                    <a:lstStyle/>
+                    <a:p>
+                      <a:pPr algn="l"/>
+                      <a:r>
+                        <a:rPr sz="1300" b="1">
+                          <a:solidFill>
+                            <a:srgbClr val="FFFFFF"/>
+                          </a:solidFill>
+                          <a:latin typeface="Calibri"/>
+                        </a:rPr>
+                        <a:t>消融步驟</a:t>
+                      </a:r>
+                    </a:p>
+                  </a:txBody>
+                  <a:tcPr>
+                    <a:solidFill>
+                      <a:srgbClr val="1E2761"/>
+                    </a:solidFill>
+                  </a:tcPr>
+                </a:tc>
+                <a:tc>
+                  <a:txBody>
+                    <a:bodyPr/>
+                    <a:lstStyle/>
+                    <a:p>
+                      <a:pPr algn="r"/>
+                      <a:r>
+                        <a:rPr sz="1300" b="1">
+                          <a:solidFill>
+                            <a:srgbClr val="FFFFFF"/>
+                          </a:solidFill>
+                          <a:latin typeface="Calibri"/>
+                        </a:rPr>
+                        <a:t>未正規化輸入</a:t>
+                      </a:r>
+                    </a:p>
+                  </a:txBody>
+                  <a:tcPr>
+                    <a:solidFill>
+                      <a:srgbClr val="1E2761"/>
+                    </a:solidFill>
+                  </a:tcPr>
+                </a:tc>
+                <a:tc>
+                  <a:txBody>
+                    <a:bodyPr/>
+                    <a:lstStyle/>
+                    <a:p>
+                      <a:pPr algn="r"/>
+                      <a:r>
+                        <a:rPr sz="1300" b="1">
+                          <a:solidFill>
+                            <a:srgbClr val="FFFFFF"/>
+                          </a:solidFill>
+                          <a:latin typeface="Calibri"/>
+                        </a:rPr>
+                        <a:t>逐樣本正規化輸入</a:t>
+                      </a:r>
+                    </a:p>
+                  </a:txBody>
+                  <a:tcPr>
+                    <a:solidFill>
+                      <a:srgbClr val="1E2761"/>
+                    </a:solidFill>
+                  </a:tcPr>
+                </a:tc>
+              </a:tr>
+              <a:tr h="384048">
+                <a:tc>
+                  <a:txBody>
+                    <a:bodyPr/>
+                    <a:lstStyle/>
+                    <a:p>
+                      <a:pPr algn="l"/>
+                      <a:r>
+                        <a:rPr sz="1300" b="0">
+                          <a:solidFill>
+                            <a:srgbClr val="1A1A1A"/>
+                          </a:solidFill>
+                          <a:latin typeface="Calibri"/>
+                        </a:rPr>
+                        <a:t>界限 + 梯度裁剪</a:t>
+                      </a:r>
+                    </a:p>
+                  </a:txBody>
+                  <a:tcPr>
+                    <a:solidFill>
+                      <a:srgbClr val="F2F5FC"/>
+                    </a:solidFill>
+                  </a:tcPr>
+                </a:tc>
+                <a:tc>
+                  <a:txBody>
+                    <a:bodyPr/>
+                    <a:lstStyle/>
+                    <a:p>
+                      <a:pPr algn="r"/>
+                      <a:r>
+                        <a:rPr sz="1300" b="0">
+                          <a:solidFill>
+                            <a:srgbClr val="1A1A1A"/>
+                          </a:solidFill>
+                          <a:latin typeface="Calibri"/>
+                        </a:rPr>
+                        <a:t>−0.0022</a:t>
+                      </a:r>
+                    </a:p>
+                  </a:txBody>
+                  <a:tcPr>
+                    <a:solidFill>
+                      <a:srgbClr val="F2F5FC"/>
+                    </a:solidFill>
+                  </a:tcPr>
+                </a:tc>
+                <a:tc>
+                  <a:txBody>
+                    <a:bodyPr/>
+                    <a:lstStyle/>
+                    <a:p>
+                      <a:pPr algn="r"/>
+                      <a:r>
+                        <a:rPr sz="1300" b="0">
+                          <a:solidFill>
+                            <a:srgbClr val="1A1A1A"/>
+                          </a:solidFill>
+                          <a:latin typeface="Calibri"/>
+                        </a:rPr>
+                        <a:t>+0.0044</a:t>
+                      </a:r>
+                    </a:p>
+                  </a:txBody>
+                  <a:tcPr>
+                    <a:solidFill>
+                      <a:srgbClr val="F2F5FC"/>
+                    </a:solidFill>
+                  </a:tcPr>
+                </a:tc>
+              </a:tr>
+              <a:tr h="384048">
+                <a:tc>
+                  <a:txBody>
+                    <a:bodyPr/>
+                    <a:lstStyle/>
+                    <a:p>
+                      <a:pPr algn="l"/>
+                      <a:r>
+                        <a:rPr sz="1300" b="0">
+                          <a:solidFill>
+                            <a:srgbClr val="1A1A1A"/>
+                          </a:solidFill>
+                          <a:latin typeface="Calibri"/>
+                        </a:rPr>
+                        <a:t>增強 + 特徵生成</a:t>
+                      </a:r>
+                    </a:p>
+                  </a:txBody>
+                  <a:tcPr>
+                    <a:solidFill>
+                      <a:srgbClr val="FFFFFF"/>
+                    </a:solidFill>
+                  </a:tcPr>
+                </a:tc>
+                <a:tc>
+                  <a:txBody>
+                    <a:bodyPr/>
+                    <a:lstStyle/>
+                    <a:p>
+                      <a:pPr algn="r"/>
+                      <a:r>
+                        <a:rPr sz="1300" b="0">
+                          <a:solidFill>
+                            <a:srgbClr val="1A1A1A"/>
+                          </a:solidFill>
+                          <a:latin typeface="Calibri"/>
+                        </a:rPr>
+                        <a:t>−0.0328</a:t>
+                      </a:r>
+                    </a:p>
+                  </a:txBody>
+                  <a:tcPr>
+                    <a:solidFill>
+                      <a:srgbClr val="FFFFFF"/>
+                    </a:solidFill>
+                  </a:tcPr>
+                </a:tc>
+                <a:tc>
+                  <a:txBody>
+                    <a:bodyPr/>
+                    <a:lstStyle/>
+                    <a:p>
+                      <a:pPr algn="r"/>
+                      <a:r>
+                        <a:rPr sz="1300" b="0">
+                          <a:solidFill>
+                            <a:srgbClr val="1A1A1A"/>
+                          </a:solidFill>
+                          <a:latin typeface="Calibri"/>
+                        </a:rPr>
+                        <a:t>−0.0224</a:t>
+                      </a:r>
+                    </a:p>
+                  </a:txBody>
+                  <a:tcPr>
+                    <a:solidFill>
+                      <a:srgbClr val="FFFFFF"/>
+                    </a:solidFill>
+                  </a:tcPr>
+                </a:tc>
+              </a:tr>
+              <a:tr h="384048">
+                <a:tc>
+                  <a:txBody>
+                    <a:bodyPr/>
+                    <a:lstStyle/>
+                    <a:p>
+                      <a:pPr algn="l"/>
+                      <a:r>
+                        <a:rPr sz="1300" b="0">
+                          <a:solidFill>
+                            <a:srgbClr val="1A1A1A"/>
+                          </a:solidFill>
+                          <a:latin typeface="Calibri"/>
+                        </a:rPr>
+                        <a:t>對比損失</a:t>
+                      </a:r>
+                    </a:p>
+                  </a:txBody>
+                  <a:tcPr>
+                    <a:solidFill>
+                      <a:srgbClr val="F2F5FC"/>
+                    </a:solidFill>
+                  </a:tcPr>
+                </a:tc>
+                <a:tc>
+                  <a:txBody>
+                    <a:bodyPr/>
+                    <a:lstStyle/>
+                    <a:p>
+                      <a:pPr algn="r"/>
+                      <a:r>
+                        <a:rPr sz="1300" b="0">
+                          <a:solidFill>
+                            <a:srgbClr val="1A1A1A"/>
+                          </a:solidFill>
+                          <a:latin typeface="Calibri"/>
+                        </a:rPr>
+                        <a:t>+0.0029</a:t>
+                      </a:r>
+                    </a:p>
+                  </a:txBody>
+                  <a:tcPr>
+                    <a:solidFill>
+                      <a:srgbClr val="F2F5FC"/>
+                    </a:solidFill>
+                  </a:tcPr>
+                </a:tc>
+                <a:tc>
+                  <a:txBody>
+                    <a:bodyPr/>
+                    <a:lstStyle/>
+                    <a:p>
+                      <a:pPr algn="r"/>
+                      <a:r>
+                        <a:rPr sz="1300" b="0">
+                          <a:solidFill>
+                            <a:srgbClr val="1A1A1A"/>
+                          </a:solidFill>
+                          <a:latin typeface="Calibri"/>
+                        </a:rPr>
+                        <a:t>−0.0049</a:t>
+                      </a:r>
+                    </a:p>
+                  </a:txBody>
+                  <a:tcPr>
+                    <a:solidFill>
+                      <a:srgbClr val="F2F5FC"/>
+                    </a:solidFill>
+                  </a:tcPr>
+                </a:tc>
+              </a:tr>
+            </a:tbl>
+          </a:graphicData>
+        </a:graphic>
+      </p:graphicFrame>
+      <p:sp>
+        <p:nvSpPr>
+          <p:cNvPr id="4" name="TextBox 3"/>
+          <p:cNvSpPr txBox="1"/>
+          <p:nvPr/>
+        </p:nvSpPr>
+        <p:spPr>
+          <a:xfrm>
+            <a:off x="685800" y="3575304"/>
+            <a:ext cx="10820095" cy="914400"/>
+          </a:xfrm>
+          <a:prstGeom prst="rect">
+            <a:avLst/>
+          </a:prstGeom>
+          <a:noFill/>
+        </p:spPr>
+        <p:txBody>
+          <a:bodyPr wrap="square" lIns="0" rIns="0" tIns="0" bIns="0" anchor="t">
+            <a:spAutoFit/>
+          </a:bodyPr>
+          <a:lstStyle/>
+          <a:p>
+            <a:pPr algn="l"/>
+            <a:r>
+              <a:rPr sz="1300" b="0" i="0">
+                <a:solidFill>
+                  <a:srgbClr val="5A5A66"/>
+                </a:solidFill>
+                <a:latin typeface="Calibri"/>
+              </a:rPr>
+              <a:t>輸入條件不是阻礙它們的原因。同時，逐樣本正規化讓完整 CDCNN 也提升 +0.0738（A3 0.460 → 0.534）。</a:t>
+            </a:r>
+          </a:p>
+        </p:txBody>
+      </p:sp>
+    </p:spTree>
+  </p:cSld>
+  <p:clrMapOvr>
+    <a:masterClrMapping/>
+  </p:clrMapOvr>
+</p:sld>
+</file>
+
+<file path=ppt/slides/slide17.xml><?xml version="1.0" encoding="utf-8"?>
+<p:sld xmlns:a="http://schemas.openxmlformats.org/drawingml/2006/main" xmlns:p="http://schemas.openxmlformats.org/presentationml/2006/main" xmlns:r="http://schemas.openxmlformats.org/officeDocument/2006/relationships">
+  <p:cSld>
+    <p:spTree>
+      <p:nvGrpSpPr>
+        <p:cNvPr id="1" name=""/>
+        <p:cNvGrpSpPr/>
+        <p:nvPr/>
+      </p:nvGrpSpPr>
+      <p:grpSpPr/>
+      <p:sp>
+        <p:nvSpPr>
+          <p:cNvPr id="2" name="TextBox 1"/>
+          <p:cNvSpPr txBox="1"/>
+          <p:nvPr/>
+        </p:nvSpPr>
+        <p:spPr>
+          <a:xfrm>
+            <a:off x="685800" y="502920"/>
+            <a:ext cx="10820095" cy="822960"/>
+          </a:xfrm>
+          <a:prstGeom prst="rect">
+            <a:avLst/>
+          </a:prstGeom>
+          <a:noFill/>
+        </p:spPr>
+        <p:txBody>
+          <a:bodyPr wrap="square" lIns="0" rIns="0" tIns="0" bIns="0" anchor="t">
+            <a:spAutoFit/>
+          </a:bodyPr>
+          <a:lstStyle/>
+          <a:p>
+            <a:pPr algn="l"/>
+            <a:r>
+              <a:rPr sz="3400" b="1" i="0">
+                <a:solidFill>
+                  <a:srgbClr val="1E2761"/>
+                </a:solidFill>
+                <a:latin typeface="Cambria"/>
+              </a:rPr>
+              <a:t>增強為什麼扣分：不是雜訊，是排程</a:t>
+            </a:r>
+          </a:p>
+        </p:txBody>
+      </p:sp>
+      <p:sp>
+        <p:nvSpPr>
+          <p:cNvPr id="3" name="TextBox 2"/>
+          <p:cNvSpPr txBox="1"/>
+          <p:nvPr/>
+        </p:nvSpPr>
+        <p:spPr>
+          <a:xfrm>
+            <a:off x="685800" y="1737360"/>
+            <a:ext cx="10820095" cy="4480560"/>
+          </a:xfrm>
+          <a:prstGeom prst="rect">
+            <a:avLst/>
+          </a:prstGeom>
+          <a:noFill/>
+        </p:spPr>
+        <p:txBody>
+          <a:bodyPr wrap="square" lIns="0" rIns="0" tIns="0" bIns="0" anchor="t">
+            <a:spAutoFit/>
+          </a:bodyPr>
+          <a:lstStyle/>
+          <a:p>
+            <a:pPr algn="l">
+              <a:spcAft>
+                <a:spcPts val="1200"/>
+              </a:spcAft>
+            </a:pPr>
+            <a:r>
+              <a:rPr sz="1700" b="0" i="0">
+                <a:solidFill>
+                  <a:srgbClr val="CADCFC"/>
+                </a:solidFill>
+                <a:latin typeface="Calibri"/>
+              </a:rPr>
+              <a:t>· </a:t>
+            </a:r>
+            <a:r>
+              <a:rPr sz="1700" b="0" i="0">
+                <a:solidFill>
+                  <a:srgbClr val="1A1A1A"/>
+                </a:solidFill>
+                <a:latin typeface="Calibri"/>
+              </a:rPr>
+              <a:t>雜訊縮小 20 倍（1.0 → 0.05），target mean 只變 +0.0026</a:t>
+            </a:r>
+          </a:p>
+          <a:p>
+            <a:pPr>
+              <a:spcAft>
+                <a:spcPts val="1200"/>
+              </a:spcAft>
+            </a:pPr>
+            <a:r>
+              <a:rPr sz="1700" b="1" i="0">
+                <a:solidFill>
+                  <a:srgbClr val="C0392B"/>
+                </a:solidFill>
+                <a:latin typeface="Calibri"/>
+              </a:rPr>
+              <a:t>▍ </a:t>
+            </a:r>
+            <a:r>
+              <a:rPr sz="1700" b="1" i="0">
+                <a:solidFill>
+                  <a:srgbClr val="1A1A1A"/>
+                </a:solidFill>
+                <a:latin typeface="Calibri"/>
+              </a:rPr>
+              <a:t>零雜訊的純複製對照仍然扣 −0.0114（真實增強 −0.0131）</a:t>
+            </a:r>
+          </a:p>
+          <a:p>
+            <a:pPr>
+              <a:spcAft>
+                <a:spcPts val="1200"/>
+              </a:spcAft>
+            </a:pPr>
+            <a:r>
+              <a:rPr sz="1700" b="1" i="0">
+                <a:solidFill>
+                  <a:srgbClr val="C0392B"/>
+                </a:solidFill>
+                <a:latin typeface="Calibri"/>
+              </a:rPr>
+              <a:t>▍ </a:t>
+            </a:r>
+            <a:r>
+              <a:rPr sz="1700" b="1" i="0">
+                <a:solidFill>
+                  <a:srgbClr val="1A1A1A"/>
+                </a:solidFill>
+                <a:latin typeface="Calibri"/>
+              </a:rPr>
+              <a:t>真正原因：增強 stage 有 890 筆而非 445 筆，在固定 100 epoch 下多了一倍的優化步數</a:t>
+            </a:r>
+          </a:p>
+          <a:p>
+            <a:pPr>
+              <a:spcAft>
+                <a:spcPts val="1200"/>
+              </a:spcAft>
+            </a:pPr>
+            <a:r>
+              <a:rPr sz="1700" b="0" i="0">
+                <a:solidFill>
+                  <a:srgbClr val="CADCFC"/>
+                </a:solidFill>
+                <a:latin typeface="Calibri"/>
+              </a:rPr>
+              <a:t>· </a:t>
+            </a:r>
+            <a:r>
+              <a:rPr sz="1700" b="0" i="0">
+                <a:solidFill>
+                  <a:srgbClr val="1A1A1A"/>
+                </a:solidFill>
+                <a:latin typeface="Calibri"/>
+              </a:rPr>
+              <a:t>本專案（與原本 v6.3）所有「A1 對 B0」的比較都被排程長度混淆</a:t>
+            </a:r>
+          </a:p>
+          <a:p>
+            <a:pPr>
+              <a:spcAft>
+                <a:spcPts val="1200"/>
+              </a:spcAft>
+            </a:pPr>
+            <a:r>
+              <a:rPr sz="1700" b="0" i="0">
+                <a:solidFill>
+                  <a:srgbClr val="CADCFC"/>
+                </a:solidFill>
+                <a:latin typeface="Calibri"/>
+              </a:rPr>
+              <a:t>· </a:t>
+            </a:r>
+            <a:r>
+              <a:rPr sz="1700" b="0" i="0">
+                <a:solidFill>
+                  <a:srgbClr val="1A1A1A"/>
+                </a:solidFill>
+                <a:latin typeface="Calibri"/>
+              </a:rPr>
+              <a:t>修正：每個 epoch 從增強池抽一份來源大小的子集，使步數對齊</a:t>
+            </a:r>
+          </a:p>
+          <a:p>
+            <a:pPr>
+              <a:spcAft>
+                <a:spcPts val="1200"/>
+              </a:spcAft>
+            </a:pPr>
+            <a:r>
+              <a:rPr sz="1700" b="0" i="0">
+                <a:solidFill>
+                  <a:srgbClr val="CADCFC"/>
+                </a:solidFill>
+                <a:latin typeface="Calibri"/>
+              </a:rPr>
+              <a:t>· </a:t>
+            </a:r>
+            <a:r>
+              <a:rPr sz="1700" b="0" i="0">
+                <a:solidFill>
+                  <a:srgbClr val="1A1A1A"/>
+                </a:solidFill>
+                <a:latin typeface="Calibri"/>
+              </a:rPr>
+              <a:t>對齊本身 +0.0043；種子標準差從 0.0364 降到 0.0136（最穩定的一組）</a:t>
+            </a:r>
+          </a:p>
+        </p:txBody>
+      </p:sp>
+    </p:spTree>
+  </p:cSld>
+  <p:clrMapOvr>
+    <a:masterClrMapping/>
+  </p:clrMapOvr>
+</p:sld>
+</file>
+
+<file path=ppt/slides/slide18.xml><?xml version="1.0" encoding="utf-8"?>
+<p:sld xmlns:a="http://schemas.openxmlformats.org/drawingml/2006/main" xmlns:p="http://schemas.openxmlformats.org/presentationml/2006/main" xmlns:r="http://schemas.openxmlformats.org/officeDocument/2006/relationships">
+  <p:cSld>
+    <p:spTree>
+      <p:nvGrpSpPr>
+        <p:cNvPr id="1" name=""/>
+        <p:cNvGrpSpPr/>
+        <p:nvPr/>
+      </p:nvGrpSpPr>
+      <p:grpSpPr/>
+      <p:sp>
+        <p:nvSpPr>
+          <p:cNvPr id="2" name="TextBox 1"/>
+          <p:cNvSpPr txBox="1"/>
+          <p:nvPr/>
+        </p:nvSpPr>
+        <p:spPr>
+          <a:xfrm>
+            <a:off x="685800" y="502920"/>
+            <a:ext cx="10820095" cy="822960"/>
+          </a:xfrm>
+          <a:prstGeom prst="rect">
+            <a:avLst/>
+          </a:prstGeom>
+          <a:noFill/>
+        </p:spPr>
+        <p:txBody>
+          <a:bodyPr wrap="square" lIns="0" rIns="0" tIns="0" bIns="0" anchor="t">
+            <a:spAutoFit/>
+          </a:bodyPr>
+          <a:lstStyle/>
+          <a:p>
+            <a:pPr algn="l"/>
+            <a:r>
+              <a:rPr sz="3400" b="1" i="0">
+                <a:solidFill>
+                  <a:srgbClr val="1E2761"/>
+                </a:solidFill>
+                <a:latin typeface="Cambria"/>
+              </a:rPr>
               <a:t>對比損失換到論文的位置：仍然是零</a:t>
             </a:r>
           </a:p>
@@ -4726,7 +7356,7 @@
 </p:sld>
 </file>
 
-<file path=ppt/slides/slide14.xml><?xml version="1.0" encoding="utf-8"?>
+<file path=ppt/slides/slide19.xml><?xml version="1.0" encoding="utf-8"?>
 <p:sld xmlns:a="http://schemas.openxmlformats.org/drawingml/2006/main" xmlns:p="http://schemas.openxmlformats.org/presentationml/2006/main" xmlns:r="http://schemas.openxmlformats.org/officeDocument/2006/relationships">
   <p:cSld>
     <p:spTree>
@@ -4951,7 +7581,256 @@
 </p:sld>
 </file>
 
-<file path=ppt/slides/slide15.xml><?xml version="1.0" encoding="utf-8"?>
+<file path=ppt/slides/slide2.xml><?xml version="1.0" encoding="utf-8"?>
+<p:sld xmlns:a="http://schemas.openxmlformats.org/drawingml/2006/main" xmlns:p="http://schemas.openxmlformats.org/presentationml/2006/main" xmlns:r="http://schemas.openxmlformats.org/officeDocument/2006/relationships">
+  <p:cSld>
+    <p:spTree>
+      <p:nvGrpSpPr>
+        <p:cNvPr id="1" name=""/>
+        <p:cNvGrpSpPr/>
+        <p:nvPr/>
+      </p:nvGrpSpPr>
+      <p:grpSpPr/>
+      <p:sp>
+        <p:nvSpPr>
+          <p:cNvPr id="2" name="TextBox 1"/>
+          <p:cNvSpPr txBox="1"/>
+          <p:nvPr/>
+        </p:nvSpPr>
+        <p:spPr>
+          <a:xfrm>
+            <a:off x="685800" y="502920"/>
+            <a:ext cx="10820095" cy="822960"/>
+          </a:xfrm>
+          <a:prstGeom prst="rect">
+            <a:avLst/>
+          </a:prstGeom>
+          <a:noFill/>
+        </p:spPr>
+        <p:txBody>
+          <a:bodyPr wrap="square" lIns="0" rIns="0" tIns="0" bIns="0" anchor="t">
+            <a:spAutoFit/>
+          </a:bodyPr>
+          <a:lstStyle/>
+          <a:p>
+            <a:pPr algn="l"/>
+            <a:r>
+              <a:rPr sz="3400" b="1" i="0">
+                <a:solidFill>
+                  <a:srgbClr val="1E2761"/>
+                </a:solidFill>
+                <a:latin typeface="Cambria"/>
+              </a:rPr>
+              <a:t>文獻回顧：問題與既有方法</a:t>
+            </a:r>
+          </a:p>
+          <a:p>
+            <a:pPr>
+              <a:spcBef>
+                <a:spcPts val="600"/>
+              </a:spcBef>
+            </a:pPr>
+            <a:r>
+              <a:rPr sz="1500" b="0" i="1">
+                <a:solidFill>
+                  <a:srgbClr val="5A5A66"/>
+                </a:solidFill>
+                <a:latin typeface="Calibri"/>
+              </a:rPr>
+              <a:t>Sensors and Actuators A 372 (2024) 115314</a:t>
+            </a:r>
+          </a:p>
+        </p:txBody>
+      </p:sp>
+      <p:sp>
+        <p:nvSpPr>
+          <p:cNvPr id="3" name="TextBox 2"/>
+          <p:cNvSpPr txBox="1"/>
+          <p:nvPr/>
+        </p:nvSpPr>
+        <p:spPr>
+          <a:xfrm>
+            <a:off x="685800" y="1737360"/>
+            <a:ext cx="10820095" cy="4480560"/>
+          </a:xfrm>
+          <a:prstGeom prst="rect">
+            <a:avLst/>
+          </a:prstGeom>
+          <a:noFill/>
+        </p:spPr>
+        <p:txBody>
+          <a:bodyPr wrap="square" lIns="0" rIns="0" tIns="0" bIns="0" anchor="t">
+            <a:spAutoFit/>
+          </a:bodyPr>
+          <a:lstStyle/>
+          <a:p>
+            <a:pPr algn="l">
+              <a:spcAft>
+                <a:spcPts val="1200"/>
+              </a:spcAft>
+            </a:pPr>
+            <a:r>
+              <a:rPr sz="1900" b="1" i="0">
+                <a:solidFill>
+                  <a:srgbClr val="1E2761"/>
+                </a:solidFill>
+                <a:latin typeface="Cambria"/>
+              </a:rPr>
+              <a:t>感測器漂移</a:t>
+            </a:r>
+          </a:p>
+          <a:p>
+            <a:pPr>
+              <a:spcAft>
+                <a:spcPts val="1200"/>
+              </a:spcAft>
+            </a:pPr>
+            <a:r>
+              <a:rPr sz="1700" b="0" i="0">
+                <a:solidFill>
+                  <a:srgbClr val="CADCFC"/>
+                </a:solidFill>
+                <a:latin typeface="Calibri"/>
+              </a:rPr>
+              <a:t>· </a:t>
+            </a:r>
+            <a:r>
+              <a:rPr sz="1700" b="0" i="0">
+                <a:solidFill>
+                  <a:srgbClr val="1A1A1A"/>
+                </a:solidFill>
+                <a:latin typeface="Calibri"/>
+              </a:rPr>
+              <a:t>MOS 氣體感測器因老化、中毒與環境波動，對同一氣體的響應隨時間偏移</a:t>
+            </a:r>
+          </a:p>
+          <a:p>
+            <a:pPr>
+              <a:spcAft>
+                <a:spcPts val="1200"/>
+              </a:spcAft>
+            </a:pPr>
+            <a:r>
+              <a:rPr sz="1700" b="0" i="0">
+                <a:solidFill>
+                  <a:srgbClr val="CADCFC"/>
+                </a:solidFill>
+                <a:latin typeface="Calibri"/>
+              </a:rPr>
+              <a:t>· </a:t>
+            </a:r>
+            <a:r>
+              <a:rPr sz="1700" b="0" i="0">
+                <a:solidFill>
+                  <a:srgbClr val="1A1A1A"/>
+                </a:solidFill>
+                <a:latin typeface="Calibri"/>
+              </a:rPr>
+              <a:t>電子鼻的長期辨識準確率與壽命因此大幅下降</a:t>
+            </a:r>
+          </a:p>
+          <a:p>
+            <a:pPr>
+              <a:spcAft>
+                <a:spcPts val="1200"/>
+              </a:spcAft>
+            </a:pPr>
+            <a:r>
+              <a:rPr sz="1900" b="1" i="0">
+                <a:solidFill>
+                  <a:srgbClr val="1E2761"/>
+                </a:solidFill>
+                <a:latin typeface="Cambria"/>
+              </a:rPr>
+              <a:t>既有方法的共同限制</a:t>
+            </a:r>
+          </a:p>
+          <a:p>
+            <a:pPr>
+              <a:spcAft>
+                <a:spcPts val="1200"/>
+              </a:spcAft>
+            </a:pPr>
+            <a:r>
+              <a:rPr sz="1700" b="0" i="0">
+                <a:solidFill>
+                  <a:srgbClr val="CADCFC"/>
+                </a:solidFill>
+                <a:latin typeface="Calibri"/>
+              </a:rPr>
+              <a:t>· </a:t>
+            </a:r>
+            <a:r>
+              <a:rPr sz="1700" b="0" i="0">
+                <a:solidFill>
+                  <a:srgbClr val="1A1A1A"/>
+                </a:solidFill>
+                <a:latin typeface="Calibri"/>
+              </a:rPr>
+              <a:t>PCA-SVM、LDA-SVM：手工特徵與線性／核轉換，無法擬合非線性長期漂移</a:t>
+            </a:r>
+          </a:p>
+          <a:p>
+            <a:pPr>
+              <a:spcAft>
+                <a:spcPts val="1200"/>
+              </a:spcAft>
+            </a:pPr>
+            <a:r>
+              <a:rPr sz="1700" b="0" i="0">
+                <a:solidFill>
+                  <a:srgbClr val="CADCFC"/>
+                </a:solidFill>
+                <a:latin typeface="Calibri"/>
+              </a:rPr>
+              <a:t>· </a:t>
+            </a:r>
+            <a:r>
+              <a:rPr sz="1700" b="0" i="0">
+                <a:solidFill>
+                  <a:srgbClr val="1A1A1A"/>
+                </a:solidFill>
+                <a:latin typeface="Calibri"/>
+              </a:rPr>
+              <a:t>SVM-GFK 等流形學習：仍需依賴目標域資料</a:t>
+            </a:r>
+          </a:p>
+          <a:p>
+            <a:pPr>
+              <a:spcAft>
+                <a:spcPts val="1200"/>
+              </a:spcAft>
+            </a:pPr>
+            <a:r>
+              <a:rPr sz="1700" b="0" i="0">
+                <a:solidFill>
+                  <a:srgbClr val="CADCFC"/>
+                </a:solidFill>
+                <a:latin typeface="Calibri"/>
+              </a:rPr>
+              <a:t>· </a:t>
+            </a:r>
+            <a:r>
+              <a:rPr sz="1700" b="0" i="0">
+                <a:solidFill>
+                  <a:srgbClr val="1A1A1A"/>
+                </a:solidFill>
+                <a:latin typeface="Calibri"/>
+              </a:rPr>
+              <a:t>TDACNN：4 個分類器的集成，54 K 參數，測試時仍需存取源域</a:t>
+            </a:r>
+          </a:p>
+        </p:txBody>
+      </p:sp>
+    </p:spTree>
+  </p:cSld>
+  <p:clrMapOvr>
+    <a:masterClrMapping/>
+  </p:clrMapOvr>
+</p:sld>
+</file>
+
+<file path=ppt/slides/slide20.xml><?xml version="1.0" encoding="utf-8"?>
 <p:sld xmlns:a="http://schemas.openxmlformats.org/drawingml/2006/main" xmlns:p="http://schemas.openxmlformats.org/presentationml/2006/main" xmlns:r="http://schemas.openxmlformats.org/officeDocument/2006/relationships">
   <p:cSld>
     <p:spTree>
@@ -5167,7 +8046,7 @@
 </p:sld>
 </file>
 
-<file path=ppt/slides/slide16.xml><?xml version="1.0" encoding="utf-8"?>
+<file path=ppt/slides/slide21.xml><?xml version="1.0" encoding="utf-8"?>
 <p:sld xmlns:a="http://schemas.openxmlformats.org/drawingml/2006/main" xmlns:p="http://schemas.openxmlformats.org/presentationml/2006/main" xmlns:r="http://schemas.openxmlformats.org/officeDocument/2006/relationships">
   <p:cSld>
     <p:spTree>
@@ -5392,7 +8271,7 @@
 </p:sld>
 </file>
 
-<file path=ppt/slides/slide17.xml><?xml version="1.0" encoding="utf-8"?>
+<file path=ppt/slides/slide22.xml><?xml version="1.0" encoding="utf-8"?>
 <p:sld xmlns:a="http://schemas.openxmlformats.org/drawingml/2006/main" xmlns:p="http://schemas.openxmlformats.org/presentationml/2006/main" xmlns:r="http://schemas.openxmlformats.org/officeDocument/2006/relationships">
   <p:cSld>
     <p:spTree>
@@ -5900,7 +8779,7 @@
 </p:sld>
 </file>
 
-<file path=ppt/slides/slide18.xml><?xml version="1.0" encoding="utf-8"?>
+<file path=ppt/slides/slide23.xml><?xml version="1.0" encoding="utf-8"?>
 <p:sld xmlns:a="http://schemas.openxmlformats.org/drawingml/2006/main" xmlns:p="http://schemas.openxmlformats.org/presentationml/2006/main" xmlns:r="http://schemas.openxmlformats.org/officeDocument/2006/relationships">
   <p:cSld>
     <p:spTree>
@@ -6150,7 +9029,7 @@
 </p:sld>
 </file>
 
-<file path=ppt/slides/slide19.xml><?xml version="1.0" encoding="utf-8"?>
+<file path=ppt/slides/slide24.xml><?xml version="1.0" encoding="utf-8"?>
 <p:sld xmlns:a="http://schemas.openxmlformats.org/drawingml/2006/main" xmlns:p="http://schemas.openxmlformats.org/presentationml/2006/main" xmlns:r="http://schemas.openxmlformats.org/officeDocument/2006/relationships">
   <p:cSld>
     <p:spTree>
@@ -6434,7 +9313,7 @@
 </p:sld>
 </file>
 
-<file path=ppt/slides/slide2.xml><?xml version="1.0" encoding="utf-8"?>
+<file path=ppt/slides/slide25.xml><?xml version="1.0" encoding="utf-8"?>
 <p:sld xmlns:a="http://schemas.openxmlformats.org/drawingml/2006/main" xmlns:p="http://schemas.openxmlformats.org/presentationml/2006/main" xmlns:r="http://schemas.openxmlformats.org/officeDocument/2006/relationships">
   <p:cSld>
     <p:spTree>
@@ -6474,255 +9353,6 @@
                 </a:solidFill>
                 <a:latin typeface="Cambria"/>
               </a:rPr>
-              <a:t>文獻回顧：問題與既有方法</a:t>
-            </a:r>
-          </a:p>
-          <a:p>
-            <a:pPr>
-              <a:spcBef>
-                <a:spcPts val="600"/>
-              </a:spcBef>
-            </a:pPr>
-            <a:r>
-              <a:rPr sz="1500" b="0" i="1">
-                <a:solidFill>
-                  <a:srgbClr val="5A5A66"/>
-                </a:solidFill>
-                <a:latin typeface="Calibri"/>
-              </a:rPr>
-              <a:t>Sensors and Actuators A 372 (2024) 115314</a:t>
-            </a:r>
-          </a:p>
-        </p:txBody>
-      </p:sp>
-      <p:sp>
-        <p:nvSpPr>
-          <p:cNvPr id="3" name="TextBox 2"/>
-          <p:cNvSpPr txBox="1"/>
-          <p:nvPr/>
-        </p:nvSpPr>
-        <p:spPr>
-          <a:xfrm>
-            <a:off x="685800" y="1737360"/>
-            <a:ext cx="10820095" cy="4480560"/>
-          </a:xfrm>
-          <a:prstGeom prst="rect">
-            <a:avLst/>
-          </a:prstGeom>
-          <a:noFill/>
-        </p:spPr>
-        <p:txBody>
-          <a:bodyPr wrap="square" lIns="0" rIns="0" tIns="0" bIns="0" anchor="t">
-            <a:spAutoFit/>
-          </a:bodyPr>
-          <a:lstStyle/>
-          <a:p>
-            <a:pPr algn="l">
-              <a:spcAft>
-                <a:spcPts val="1200"/>
-              </a:spcAft>
-            </a:pPr>
-            <a:r>
-              <a:rPr sz="1900" b="1" i="0">
-                <a:solidFill>
-                  <a:srgbClr val="1E2761"/>
-                </a:solidFill>
-                <a:latin typeface="Cambria"/>
-              </a:rPr>
-              <a:t>感測器漂移</a:t>
-            </a:r>
-          </a:p>
-          <a:p>
-            <a:pPr>
-              <a:spcAft>
-                <a:spcPts val="1200"/>
-              </a:spcAft>
-            </a:pPr>
-            <a:r>
-              <a:rPr sz="1700" b="0" i="0">
-                <a:solidFill>
-                  <a:srgbClr val="CADCFC"/>
-                </a:solidFill>
-                <a:latin typeface="Calibri"/>
-              </a:rPr>
-              <a:t>· </a:t>
-            </a:r>
-            <a:r>
-              <a:rPr sz="1700" b="0" i="0">
-                <a:solidFill>
-                  <a:srgbClr val="1A1A1A"/>
-                </a:solidFill>
-                <a:latin typeface="Calibri"/>
-              </a:rPr>
-              <a:t>MOS 氣體感測器因老化、中毒與環境波動，對同一氣體的響應隨時間偏移</a:t>
-            </a:r>
-          </a:p>
-          <a:p>
-            <a:pPr>
-              <a:spcAft>
-                <a:spcPts val="1200"/>
-              </a:spcAft>
-            </a:pPr>
-            <a:r>
-              <a:rPr sz="1700" b="0" i="0">
-                <a:solidFill>
-                  <a:srgbClr val="CADCFC"/>
-                </a:solidFill>
-                <a:latin typeface="Calibri"/>
-              </a:rPr>
-              <a:t>· </a:t>
-            </a:r>
-            <a:r>
-              <a:rPr sz="1700" b="0" i="0">
-                <a:solidFill>
-                  <a:srgbClr val="1A1A1A"/>
-                </a:solidFill>
-                <a:latin typeface="Calibri"/>
-              </a:rPr>
-              <a:t>電子鼻的長期辨識準確率與壽命因此大幅下降</a:t>
-            </a:r>
-          </a:p>
-          <a:p>
-            <a:pPr>
-              <a:spcAft>
-                <a:spcPts val="1200"/>
-              </a:spcAft>
-            </a:pPr>
-            <a:r>
-              <a:rPr sz="1900" b="1" i="0">
-                <a:solidFill>
-                  <a:srgbClr val="1E2761"/>
-                </a:solidFill>
-                <a:latin typeface="Cambria"/>
-              </a:rPr>
-              <a:t>既有方法的共同限制</a:t>
-            </a:r>
-          </a:p>
-          <a:p>
-            <a:pPr>
-              <a:spcAft>
-                <a:spcPts val="1200"/>
-              </a:spcAft>
-            </a:pPr>
-            <a:r>
-              <a:rPr sz="1700" b="0" i="0">
-                <a:solidFill>
-                  <a:srgbClr val="CADCFC"/>
-                </a:solidFill>
-                <a:latin typeface="Calibri"/>
-              </a:rPr>
-              <a:t>· </a:t>
-            </a:r>
-            <a:r>
-              <a:rPr sz="1700" b="0" i="0">
-                <a:solidFill>
-                  <a:srgbClr val="1A1A1A"/>
-                </a:solidFill>
-                <a:latin typeface="Calibri"/>
-              </a:rPr>
-              <a:t>PCA-SVM、LDA-SVM：手工特徵與線性／核轉換，無法擬合非線性長期漂移</a:t>
-            </a:r>
-          </a:p>
-          <a:p>
-            <a:pPr>
-              <a:spcAft>
-                <a:spcPts val="1200"/>
-              </a:spcAft>
-            </a:pPr>
-            <a:r>
-              <a:rPr sz="1700" b="0" i="0">
-                <a:solidFill>
-                  <a:srgbClr val="CADCFC"/>
-                </a:solidFill>
-                <a:latin typeface="Calibri"/>
-              </a:rPr>
-              <a:t>· </a:t>
-            </a:r>
-            <a:r>
-              <a:rPr sz="1700" b="0" i="0">
-                <a:solidFill>
-                  <a:srgbClr val="1A1A1A"/>
-                </a:solidFill>
-                <a:latin typeface="Calibri"/>
-              </a:rPr>
-              <a:t>SVM-GFK 等流形學習：仍需依賴目標域資料</a:t>
-            </a:r>
-          </a:p>
-          <a:p>
-            <a:pPr>
-              <a:spcAft>
-                <a:spcPts val="1200"/>
-              </a:spcAft>
-            </a:pPr>
-            <a:r>
-              <a:rPr sz="1700" b="0" i="0">
-                <a:solidFill>
-                  <a:srgbClr val="CADCFC"/>
-                </a:solidFill>
-                <a:latin typeface="Calibri"/>
-              </a:rPr>
-              <a:t>· </a:t>
-            </a:r>
-            <a:r>
-              <a:rPr sz="1700" b="0" i="0">
-                <a:solidFill>
-                  <a:srgbClr val="1A1A1A"/>
-                </a:solidFill>
-                <a:latin typeface="Calibri"/>
-              </a:rPr>
-              <a:t>TDACNN：4 個分類器的集成，54 K 參數，測試時仍需存取源域</a:t>
-            </a:r>
-          </a:p>
-        </p:txBody>
-      </p:sp>
-    </p:spTree>
-  </p:cSld>
-  <p:clrMapOvr>
-    <a:masterClrMapping/>
-  </p:clrMapOvr>
-</p:sld>
-</file>
-
-<file path=ppt/slides/slide20.xml><?xml version="1.0" encoding="utf-8"?>
-<p:sld xmlns:a="http://schemas.openxmlformats.org/drawingml/2006/main" xmlns:p="http://schemas.openxmlformats.org/presentationml/2006/main" xmlns:r="http://schemas.openxmlformats.org/officeDocument/2006/relationships">
-  <p:cSld>
-    <p:spTree>
-      <p:nvGrpSpPr>
-        <p:cNvPr id="1" name=""/>
-        <p:cNvGrpSpPr/>
-        <p:nvPr/>
-      </p:nvGrpSpPr>
-      <p:grpSpPr/>
-      <p:sp>
-        <p:nvSpPr>
-          <p:cNvPr id="2" name="TextBox 1"/>
-          <p:cNvSpPr txBox="1"/>
-          <p:nvPr/>
-        </p:nvSpPr>
-        <p:spPr>
-          <a:xfrm>
-            <a:off x="685800" y="502920"/>
-            <a:ext cx="10820095" cy="822960"/>
-          </a:xfrm>
-          <a:prstGeom prst="rect">
-            <a:avLst/>
-          </a:prstGeom>
-          <a:noFill/>
-        </p:spPr>
-        <p:txBody>
-          <a:bodyPr wrap="square" lIns="0" rIns="0" tIns="0" bIns="0" anchor="t">
-            <a:spAutoFit/>
-          </a:bodyPr>
-          <a:lstStyle/>
-          <a:p>
-            <a:pPr algn="l"/>
-            <a:r>
-              <a:rPr sz="3400" b="1" i="0">
-                <a:solidFill>
-                  <a:srgbClr val="1E2761"/>
-                </a:solidFill>
-                <a:latin typeface="Cambria"/>
-              </a:rPr>
               <a:t>後續方向</a:t>
             </a:r>
           </a:p>
@@ -7118,7 +9748,7 @@
 </p:sld>
 </file>
 
-<file path=ppt/slides/slide21.xml><?xml version="1.0" encoding="utf-8"?>
+<file path=ppt/slides/slide26.xml><?xml version="1.0" encoding="utf-8"?>
 <p:sld xmlns:a="http://schemas.openxmlformats.org/drawingml/2006/main" xmlns:p="http://schemas.openxmlformats.org/presentationml/2006/main" xmlns:r="http://schemas.openxmlformats.org/officeDocument/2006/relationships">
   <p:cSld>
     <p:spTree>
@@ -7400,21 +10030,61 @@
                 </a:solidFill>
                 <a:latin typeface="Cambria"/>
               </a:rPr>
-              <a:t>文獻回顧：CDCNN 的三個機制</a:t>
+              <a:t>文獻回顧：域泛化與對比學習的概念</a:t>
+            </a:r>
+          </a:p>
+          <a:p>
+            <a:pPr>
+              <a:spcBef>
+                <a:spcPts val="600"/>
+              </a:spcBef>
+            </a:pPr>
+            <a:r>
+              <a:rPr sz="1500" b="0" i="1">
+                <a:solidFill>
+                  <a:srgbClr val="5A5A66"/>
+                </a:solidFill>
+                <a:latin typeface="Calibri"/>
+              </a:rPr>
+              <a:t>論文 Fig. 1</a:t>
             </a:r>
           </a:p>
         </p:txBody>
       </p:sp>
+      <p:pic>
+        <p:nvPicPr>
+          <p:cNvPr id="3" name="Picture 2" descr="paper_fig1_concept.png"/>
+          <p:cNvPicPr>
+            <a:picLocks noChangeAspect="1"/>
+          </p:cNvPicPr>
+          <p:nvPr/>
+        </p:nvPicPr>
+        <p:blipFill>
+          <a:blip r:embed="rId2"/>
+          <a:stretch>
+            <a:fillRect/>
+          </a:stretch>
+        </p:blipFill>
+        <p:spPr>
+          <a:xfrm>
+            <a:off x="685800" y="1828800"/>
+            <a:ext cx="6567596" cy="4480560"/>
+          </a:xfrm>
+          <a:prstGeom prst="rect">
+            <a:avLst/>
+          </a:prstGeom>
+        </p:spPr>
+      </p:pic>
       <p:sp>
         <p:nvSpPr>
-          <p:cNvPr id="3" name="TextBox 2"/>
+          <p:cNvPr id="4" name="TextBox 3"/>
           <p:cNvSpPr txBox="1"/>
           <p:nvPr/>
         </p:nvSpPr>
         <p:spPr>
           <a:xfrm>
-            <a:off x="685800" y="1737360"/>
-            <a:ext cx="10820095" cy="4480560"/>
+            <a:off x="7619156" y="1874519"/>
+            <a:ext cx="3886739" cy="4343401"/>
           </a:xfrm>
           <a:prstGeom prst="rect">
             <a:avLst/>
@@ -7433,13 +10103,22 @@
               </a:spcAft>
             </a:pPr>
             <a:r>
-              <a:rPr sz="1900" b="1" i="0">
-                <a:solidFill>
-                  <a:srgbClr val="1E2761"/>
-                </a:solidFill>
-                <a:latin typeface="Cambria"/>
-              </a:rPr>
-              <a:t>① 資料擴充（VAE 式）</a:t>
+              <a:rPr sz="1500" b="1" i="0">
+                <a:solidFill>
+                  <a:srgbClr val="C0392B"/>
+                </a:solidFill>
+                <a:latin typeface="Calibri"/>
+              </a:rPr>
+              <a:t>▍ </a:t>
+            </a:r>
+            <a:r>
+              <a:rPr sz="1500" b="1" i="0">
+                <a:solidFill>
+                  <a:srgbClr val="1A1A1A"/>
+                </a:solidFill>
+                <a:latin typeface="Calibri"/>
+              </a:rPr>
+              <a:t>(a) 一般深度學習</a:t>
             </a:r>
           </a:p>
           <a:p>
@@ -7449,7 +10128,7 @@
               </a:spcAft>
             </a:pPr>
             <a:r>
-              <a:rPr sz="1700" b="0" i="0">
+              <a:rPr sz="1500" b="0" i="0">
                 <a:solidFill>
                   <a:srgbClr val="CADCFC"/>
                 </a:solidFill>
@@ -7458,13 +10137,13 @@
               <a:t>· </a:t>
             </a:r>
             <a:r>
-              <a:rPr sz="1700" b="0" i="0">
+              <a:rPr sz="1500" b="0" i="0">
                 <a:solidFill>
                   <a:srgbClr val="1A1A1A"/>
                 </a:solidFill>
                 <a:latin typeface="Calibri"/>
               </a:rPr>
-              <a:t>混合兩樣本的均值與變異數生成新高斯分布，抽樣雜訊疊加到原訊號</a:t>
+              <a:t>訓練與測試來自同一分布 P</a:t>
             </a:r>
           </a:p>
           <a:p>
@@ -7474,13 +10153,22 @@
               </a:spcAft>
             </a:pPr>
             <a:r>
-              <a:rPr sz="1900" b="1" i="0">
-                <a:solidFill>
-                  <a:srgbClr val="1E2761"/>
-                </a:solidFill>
-                <a:latin typeface="Cambria"/>
-              </a:rPr>
-              <a:t>② 特徵生成（頻率分離 + 風格轉換）</a:t>
+              <a:rPr sz="1500" b="1" i="0">
+                <a:solidFill>
+                  <a:srgbClr val="C0392B"/>
+                </a:solidFill>
+                <a:latin typeface="Calibri"/>
+              </a:rPr>
+              <a:t>▍ </a:t>
+            </a:r>
+            <a:r>
+              <a:rPr sz="1500" b="1" i="0">
+                <a:solidFill>
+                  <a:srgbClr val="1A1A1A"/>
+                </a:solidFill>
+                <a:latin typeface="Calibri"/>
+              </a:rPr>
+              <a:t>(b) 域泛化</a:t>
             </a:r>
           </a:p>
           <a:p>
@@ -7490,7 +10178,7 @@
               </a:spcAft>
             </a:pPr>
             <a:r>
-              <a:rPr sz="1700" b="0" i="0">
+              <a:rPr sz="1500" b="0" i="0">
                 <a:solidFill>
                   <a:srgbClr val="CADCFC"/>
                 </a:solidFill>
@@ -7499,13 +10187,13 @@
               <a:t>· </a:t>
             </a:r>
             <a:r>
-              <a:rPr sz="1700" b="0" i="0">
+              <a:rPr sz="1500" b="0" i="0">
                 <a:solidFill>
                   <a:srgbClr val="1A1A1A"/>
                 </a:solidFill>
                 <a:latin typeface="Calibri"/>
               </a:rPr>
-              <a:t>最大池化與最近鄰上採樣把隱特徵拆成高頻（氣體類別）與低頻（漂移風格）</a:t>
+              <a:t>多個訓練域 P1…Pn，測試域從未被看過</a:t>
             </a:r>
           </a:p>
           <a:p>
@@ -7515,22 +10203,22 @@
               </a:spcAft>
             </a:pPr>
             <a:r>
-              <a:rPr sz="1700" b="0" i="0">
-                <a:solidFill>
-                  <a:srgbClr val="CADCFC"/>
-                </a:solidFill>
-                <a:latin typeface="Calibri"/>
-              </a:rPr>
-              <a:t>· </a:t>
-            </a:r>
-            <a:r>
-              <a:rPr sz="1700" b="0" i="0">
+              <a:rPr sz="1500" b="1" i="0">
+                <a:solidFill>
+                  <a:srgbClr val="C0392B"/>
+                </a:solidFill>
+                <a:latin typeface="Calibri"/>
+              </a:rPr>
+              <a:t>▍ </a:t>
+            </a:r>
+            <a:r>
+              <a:rPr sz="1500" b="1" i="0">
                 <a:solidFill>
                   <a:srgbClr val="1A1A1A"/>
                 </a:solidFill>
                 <a:latin typeface="Calibri"/>
               </a:rPr>
-              <a:t>抽樣未見域的風格參數，在隱空間合成未來可能的漂移特徵</a:t>
+              <a:t>(c) 對比學習</a:t>
             </a:r>
           </a:p>
           <a:p>
@@ -7540,23 +10228,7 @@
               </a:spcAft>
             </a:pPr>
             <a:r>
-              <a:rPr sz="1900" b="1" i="0">
-                <a:solidFill>
-                  <a:srgbClr val="1E2761"/>
-                </a:solidFill>
-                <a:latin typeface="Cambria"/>
-              </a:rPr>
-              <a:t>③ 監督式對比學習</a:t>
-            </a:r>
-          </a:p>
-          <a:p>
-            <a:pPr>
-              <a:spcAft>
-                <a:spcPts val="1200"/>
-              </a:spcAft>
-            </a:pPr>
-            <a:r>
-              <a:rPr sz="1700" b="0" i="0">
+              <a:rPr sz="1500" b="0" i="0">
                 <a:solidFill>
                   <a:srgbClr val="CADCFC"/>
                 </a:solidFill>
@@ -7565,13 +10237,13 @@
               <a:t>· </a:t>
             </a:r>
             <a:r>
-              <a:rPr sz="1700" b="0" i="0">
+              <a:rPr sz="1500" b="0" i="0">
                 <a:solidFill>
                   <a:srgbClr val="1A1A1A"/>
                 </a:solidFill>
                 <a:latin typeface="Calibri"/>
               </a:rPr>
-              <a:t>拉近同標籤特徵、推開異標籤特徵，L = L_ce + λ_MSE·L_MSE + λ_con·L_con</a:t>
+              <a:t>同標籤樣本在單位球上被拉近，異標籤被推開</a:t>
             </a:r>
           </a:p>
         </p:txBody>
@@ -7624,7 +10296,7 @@
                 </a:solidFill>
                 <a:latin typeface="Cambria"/>
               </a:rPr>
-              <a:t>文獻回顧：論文宣稱的表現</a:t>
+              <a:t>文獻回顧：CDCNN 架構</a:t>
             </a:r>
           </a:p>
           <a:p>
@@ -7640,606 +10312,35 @@
                 </a:solidFill>
                 <a:latin typeface="Calibri"/>
               </a:rPr>
-              <a:t>Batch 1 訓練、Batch 2–10 測試</a:t>
+              <a:t>論文 Fig. 2 — 我們的實作差異見後續</a:t>
             </a:r>
           </a:p>
         </p:txBody>
       </p:sp>
-      <p:graphicFrame>
-        <p:nvGraphicFramePr>
-          <p:cNvPr id="3" name="Table 2"/>
-          <p:cNvGraphicFramePr>
-            <a:graphicFrameLocks noGrp="1"/>
-          </p:cNvGraphicFramePr>
+      <p:pic>
+        <p:nvPicPr>
+          <p:cNvPr id="3" name="Picture 2" descr="paper_fig2_framework.png"/>
+          <p:cNvPicPr>
+            <a:picLocks noChangeAspect="1"/>
+          </p:cNvPicPr>
           <p:nvPr/>
-        </p:nvGraphicFramePr>
-        <p:xfrm>
-          <a:off x="685800" y="1783080"/>
-          <a:ext cx="10820093" cy="3072384"/>
-        </p:xfrm>
-        <a:graphic>
-          <a:graphicData uri="http://schemas.openxmlformats.org/drawingml/2006/table">
-            <a:tbl>
-              <a:tblPr firstRow="1" bandRow="1">
-                <a:tableStyleId>{5C22544A-7EE6-4342-B048-85BDC9FD1C3A}</a:tableStyleId>
-              </a:tblPr>
-              <a:tblGrid>
-                <a:gridCol w="4544439"/>
-                <a:gridCol w="2380420"/>
-                <a:gridCol w="3895234"/>
-              </a:tblGrid>
-              <a:tr h="384048">
-                <a:tc>
-                  <a:txBody>
-                    <a:bodyPr/>
-                    <a:lstStyle/>
-                    <a:p>
-                      <a:pPr algn="l"/>
-                      <a:r>
-                        <a:rPr sz="1300" b="1">
-                          <a:solidFill>
-                            <a:srgbClr val="FFFFFF"/>
-                          </a:solidFill>
-                          <a:latin typeface="Calibri"/>
-                        </a:rPr>
-                        <a:t>方法</a:t>
-                      </a:r>
-                    </a:p>
-                  </a:txBody>
-                  <a:tcPr>
-                    <a:solidFill>
-                      <a:srgbClr val="1E2761"/>
-                    </a:solidFill>
-                  </a:tcPr>
-                </a:tc>
-                <a:tc>
-                  <a:txBody>
-                    <a:bodyPr/>
-                    <a:lstStyle/>
-                    <a:p>
-                      <a:pPr algn="r"/>
-                      <a:r>
-                        <a:rPr sz="1300" b="1">
-                          <a:solidFill>
-                            <a:srgbClr val="FFFFFF"/>
-                          </a:solidFill>
-                          <a:latin typeface="Calibri"/>
-                        </a:rPr>
-                        <a:t>平均準確率</a:t>
-                      </a:r>
-                    </a:p>
-                  </a:txBody>
-                  <a:tcPr>
-                    <a:solidFill>
-                      <a:srgbClr val="1E2761"/>
-                    </a:solidFill>
-                  </a:tcPr>
-                </a:tc>
-                <a:tc>
-                  <a:txBody>
-                    <a:bodyPr/>
-                    <a:lstStyle/>
-                    <a:p>
-                      <a:pPr algn="r"/>
-                      <a:r>
-                        <a:rPr sz="1300" b="1">
-                          <a:solidFill>
-                            <a:srgbClr val="FFFFFF"/>
-                          </a:solidFill>
-                          <a:latin typeface="Calibri"/>
-                        </a:rPr>
-                        <a:t>備註</a:t>
-                      </a:r>
-                    </a:p>
-                  </a:txBody>
-                  <a:tcPr>
-                    <a:solidFill>
-                      <a:srgbClr val="1E2761"/>
-                    </a:solidFill>
-                  </a:tcPr>
-                </a:tc>
-              </a:tr>
-              <a:tr h="384048">
-                <a:tc>
-                  <a:txBody>
-                    <a:bodyPr/>
-                    <a:lstStyle/>
-                    <a:p>
-                      <a:pPr algn="l"/>
-                      <a:r>
-                        <a:rPr sz="1300" b="1">
-                          <a:solidFill>
-                            <a:srgbClr val="C0392B"/>
-                          </a:solidFill>
-                          <a:latin typeface="Calibri"/>
-                        </a:rPr>
-                        <a:t>CDCNN（本論文）</a:t>
-                      </a:r>
-                    </a:p>
-                  </a:txBody>
-                  <a:tcPr>
-                    <a:solidFill>
-                      <a:srgbClr val="F2F5FC"/>
-                    </a:solidFill>
-                  </a:tcPr>
-                </a:tc>
-                <a:tc>
-                  <a:txBody>
-                    <a:bodyPr/>
-                    <a:lstStyle/>
-                    <a:p>
-                      <a:pPr algn="r"/>
-                      <a:r>
-                        <a:rPr sz="1300" b="1">
-                          <a:solidFill>
-                            <a:srgbClr val="C0392B"/>
-                          </a:solidFill>
-                          <a:latin typeface="Calibri"/>
-                        </a:rPr>
-                        <a:t>0.7230</a:t>
-                      </a:r>
-                    </a:p>
-                  </a:txBody>
-                  <a:tcPr>
-                    <a:solidFill>
-                      <a:srgbClr val="F2F5FC"/>
-                    </a:solidFill>
-                  </a:tcPr>
-                </a:tc>
-                <a:tc>
-                  <a:txBody>
-                    <a:bodyPr/>
-                    <a:lstStyle/>
-                    <a:p>
-                      <a:pPr algn="r"/>
-                      <a:r>
-                        <a:rPr sz="1300" b="1">
-                          <a:solidFill>
-                            <a:srgbClr val="C0392B"/>
-                          </a:solidFill>
-                          <a:latin typeface="Calibri"/>
-                        </a:rPr>
-                        <a:t>Target-free，0.77 K 參數</a:t>
-                      </a:r>
-                    </a:p>
-                  </a:txBody>
-                  <a:tcPr>
-                    <a:solidFill>
-                      <a:srgbClr val="F2F5FC"/>
-                    </a:solidFill>
-                  </a:tcPr>
-                </a:tc>
-              </a:tr>
-              <a:tr h="384048">
-                <a:tc>
-                  <a:txBody>
-                    <a:bodyPr/>
-                    <a:lstStyle/>
-                    <a:p>
-                      <a:pPr algn="l"/>
-                      <a:r>
-                        <a:rPr sz="1300" b="0">
-                          <a:solidFill>
-                            <a:srgbClr val="1A1A1A"/>
-                          </a:solidFill>
-                          <a:latin typeface="Calibri"/>
-                        </a:rPr>
-                        <a:t>TDACNN</a:t>
-                      </a:r>
-                    </a:p>
-                  </a:txBody>
-                  <a:tcPr>
-                    <a:solidFill>
-                      <a:srgbClr val="FFFFFF"/>
-                    </a:solidFill>
-                  </a:tcPr>
-                </a:tc>
-                <a:tc>
-                  <a:txBody>
-                    <a:bodyPr/>
-                    <a:lstStyle/>
-                    <a:p>
-                      <a:pPr algn="r"/>
-                      <a:r>
-                        <a:rPr sz="1300" b="0">
-                          <a:solidFill>
-                            <a:srgbClr val="1A1A1A"/>
-                          </a:solidFill>
-                          <a:latin typeface="Calibri"/>
-                        </a:rPr>
-                        <a:t>0.7221</a:t>
-                      </a:r>
-                    </a:p>
-                  </a:txBody>
-                  <a:tcPr>
-                    <a:solidFill>
-                      <a:srgbClr val="FFFFFF"/>
-                    </a:solidFill>
-                  </a:tcPr>
-                </a:tc>
-                <a:tc>
-                  <a:txBody>
-                    <a:bodyPr/>
-                    <a:lstStyle/>
-                    <a:p>
-                      <a:pPr algn="r"/>
-                      <a:r>
-                        <a:rPr sz="1300" b="0">
-                          <a:solidFill>
-                            <a:srgbClr val="1A1A1A"/>
-                          </a:solidFill>
-                          <a:latin typeface="Calibri"/>
-                        </a:rPr>
-                        <a:t>集成 4 分類器，54 K 參數</a:t>
-                      </a:r>
-                    </a:p>
-                  </a:txBody>
-                  <a:tcPr>
-                    <a:solidFill>
-                      <a:srgbClr val="FFFFFF"/>
-                    </a:solidFill>
-                  </a:tcPr>
-                </a:tc>
-              </a:tr>
-              <a:tr h="384048">
-                <a:tc>
-                  <a:txBody>
-                    <a:bodyPr/>
-                    <a:lstStyle/>
-                    <a:p>
-                      <a:pPr algn="l"/>
-                      <a:r>
-                        <a:rPr sz="1300" b="0">
-                          <a:solidFill>
-                            <a:srgbClr val="1A1A1A"/>
-                          </a:solidFill>
-                          <a:latin typeface="Calibri"/>
-                        </a:rPr>
-                        <a:t>PCA-SVM</a:t>
-                      </a:r>
-                    </a:p>
-                  </a:txBody>
-                  <a:tcPr>
-                    <a:solidFill>
-                      <a:srgbClr val="F2F5FC"/>
-                    </a:solidFill>
-                  </a:tcPr>
-                </a:tc>
-                <a:tc>
-                  <a:txBody>
-                    <a:bodyPr/>
-                    <a:lstStyle/>
-                    <a:p>
-                      <a:pPr algn="r"/>
-                      <a:r>
-                        <a:rPr sz="1300" b="0">
-                          <a:solidFill>
-                            <a:srgbClr val="1A1A1A"/>
-                          </a:solidFill>
-                          <a:latin typeface="Calibri"/>
-                        </a:rPr>
-                        <a:t>0.6860</a:t>
-                      </a:r>
-                    </a:p>
-                  </a:txBody>
-                  <a:tcPr>
-                    <a:solidFill>
-                      <a:srgbClr val="F2F5FC"/>
-                    </a:solidFill>
-                  </a:tcPr>
-                </a:tc>
-                <a:tc>
-                  <a:txBody>
-                    <a:bodyPr/>
-                    <a:lstStyle/>
-                    <a:p>
-                      <a:pPr algn="r"/>
-                      <a:r>
-                        <a:rPr sz="1300" b="0">
-                          <a:solidFill>
-                            <a:srgbClr val="1A1A1A"/>
-                          </a:solidFill>
-                          <a:latin typeface="Calibri"/>
-                        </a:rPr>
-                        <a:t> </a:t>
-                      </a:r>
-                    </a:p>
-                  </a:txBody>
-                  <a:tcPr>
-                    <a:solidFill>
-                      <a:srgbClr val="F2F5FC"/>
-                    </a:solidFill>
-                  </a:tcPr>
-                </a:tc>
-              </a:tr>
-              <a:tr h="384048">
-                <a:tc>
-                  <a:txBody>
-                    <a:bodyPr/>
-                    <a:lstStyle/>
-                    <a:p>
-                      <a:pPr algn="l"/>
-                      <a:r>
-                        <a:rPr sz="1300" b="0">
-                          <a:solidFill>
-                            <a:srgbClr val="1A1A1A"/>
-                          </a:solidFill>
-                          <a:latin typeface="Calibri"/>
-                        </a:rPr>
-                        <a:t>DBNs</a:t>
-                      </a:r>
-                    </a:p>
-                  </a:txBody>
-                  <a:tcPr>
-                    <a:solidFill>
-                      <a:srgbClr val="FFFFFF"/>
-                    </a:solidFill>
-                  </a:tcPr>
-                </a:tc>
-                <a:tc>
-                  <a:txBody>
-                    <a:bodyPr/>
-                    <a:lstStyle/>
-                    <a:p>
-                      <a:pPr algn="r"/>
-                      <a:r>
-                        <a:rPr sz="1300" b="0">
-                          <a:solidFill>
-                            <a:srgbClr val="1A1A1A"/>
-                          </a:solidFill>
-                          <a:latin typeface="Calibri"/>
-                        </a:rPr>
-                        <a:t>0.6665</a:t>
-                      </a:r>
-                    </a:p>
-                  </a:txBody>
-                  <a:tcPr>
-                    <a:solidFill>
-                      <a:srgbClr val="FFFFFF"/>
-                    </a:solidFill>
-                  </a:tcPr>
-                </a:tc>
-                <a:tc>
-                  <a:txBody>
-                    <a:bodyPr/>
-                    <a:lstStyle/>
-                    <a:p>
-                      <a:pPr algn="r"/>
-                      <a:r>
-                        <a:rPr sz="1300" b="0">
-                          <a:solidFill>
-                            <a:srgbClr val="1A1A1A"/>
-                          </a:solidFill>
-                          <a:latin typeface="Calibri"/>
-                        </a:rPr>
-                        <a:t> </a:t>
-                      </a:r>
-                    </a:p>
-                  </a:txBody>
-                  <a:tcPr>
-                    <a:solidFill>
-                      <a:srgbClr val="FFFFFF"/>
-                    </a:solidFill>
-                  </a:tcPr>
-                </a:tc>
-              </a:tr>
-              <a:tr h="384048">
-                <a:tc>
-                  <a:txBody>
-                    <a:bodyPr/>
-                    <a:lstStyle/>
-                    <a:p>
-                      <a:pPr algn="l"/>
-                      <a:r>
-                        <a:rPr sz="1300" b="0">
-                          <a:solidFill>
-                            <a:srgbClr val="1A1A1A"/>
-                          </a:solidFill>
-                          <a:latin typeface="Calibri"/>
-                        </a:rPr>
-                        <a:t>SVM-GFK</a:t>
-                      </a:r>
-                    </a:p>
-                  </a:txBody>
-                  <a:tcPr>
-                    <a:solidFill>
-                      <a:srgbClr val="F2F5FC"/>
-                    </a:solidFill>
-                  </a:tcPr>
-                </a:tc>
-                <a:tc>
-                  <a:txBody>
-                    <a:bodyPr/>
-                    <a:lstStyle/>
-                    <a:p>
-                      <a:pPr algn="r"/>
-                      <a:r>
-                        <a:rPr sz="1300" b="0">
-                          <a:solidFill>
-                            <a:srgbClr val="1A1A1A"/>
-                          </a:solidFill>
-                          <a:latin typeface="Calibri"/>
-                        </a:rPr>
-                        <a:t>0.6400</a:t>
-                      </a:r>
-                    </a:p>
-                  </a:txBody>
-                  <a:tcPr>
-                    <a:solidFill>
-                      <a:srgbClr val="F2F5FC"/>
-                    </a:solidFill>
-                  </a:tcPr>
-                </a:tc>
-                <a:tc>
-                  <a:txBody>
-                    <a:bodyPr/>
-                    <a:lstStyle/>
-                    <a:p>
-                      <a:pPr algn="r"/>
-                      <a:r>
-                        <a:rPr sz="1300" b="0">
-                          <a:solidFill>
-                            <a:srgbClr val="1A1A1A"/>
-                          </a:solidFill>
-                          <a:latin typeface="Calibri"/>
-                        </a:rPr>
-                        <a:t> </a:t>
-                      </a:r>
-                    </a:p>
-                  </a:txBody>
-                  <a:tcPr>
-                    <a:solidFill>
-                      <a:srgbClr val="F2F5FC"/>
-                    </a:solidFill>
-                  </a:tcPr>
-                </a:tc>
-              </a:tr>
-              <a:tr h="384048">
-                <a:tc>
-                  <a:txBody>
-                    <a:bodyPr/>
-                    <a:lstStyle/>
-                    <a:p>
-                      <a:pPr algn="l"/>
-                      <a:r>
-                        <a:rPr sz="1300" b="0">
-                          <a:solidFill>
-                            <a:srgbClr val="1A1A1A"/>
-                          </a:solidFill>
-                          <a:latin typeface="Calibri"/>
-                        </a:rPr>
-                        <a:t>ResNet（骨幹）</a:t>
-                      </a:r>
-                    </a:p>
-                  </a:txBody>
-                  <a:tcPr>
-                    <a:solidFill>
-                      <a:srgbClr val="FFFFFF"/>
-                    </a:solidFill>
-                  </a:tcPr>
-                </a:tc>
-                <a:tc>
-                  <a:txBody>
-                    <a:bodyPr/>
-                    <a:lstStyle/>
-                    <a:p>
-                      <a:pPr algn="r"/>
-                      <a:r>
-                        <a:rPr sz="1300" b="0">
-                          <a:solidFill>
-                            <a:srgbClr val="1A1A1A"/>
-                          </a:solidFill>
-                          <a:latin typeface="Calibri"/>
-                        </a:rPr>
-                        <a:t>0.6344</a:t>
-                      </a:r>
-                    </a:p>
-                  </a:txBody>
-                  <a:tcPr>
-                    <a:solidFill>
-                      <a:srgbClr val="FFFFFF"/>
-                    </a:solidFill>
-                  </a:tcPr>
-                </a:tc>
-                <a:tc>
-                  <a:txBody>
-                    <a:bodyPr/>
-                    <a:lstStyle/>
-                    <a:p>
-                      <a:pPr algn="r"/>
-                      <a:r>
-                        <a:rPr sz="1300" b="0">
-                          <a:solidFill>
-                            <a:srgbClr val="1A1A1A"/>
-                          </a:solidFill>
-                          <a:latin typeface="Calibri"/>
-                        </a:rPr>
-                        <a:t> </a:t>
-                      </a:r>
-                    </a:p>
-                  </a:txBody>
-                  <a:tcPr>
-                    <a:solidFill>
-                      <a:srgbClr val="FFFFFF"/>
-                    </a:solidFill>
-                  </a:tcPr>
-                </a:tc>
-              </a:tr>
-              <a:tr h="384048">
-                <a:tc>
-                  <a:txBody>
-                    <a:bodyPr/>
-                    <a:lstStyle/>
-                    <a:p>
-                      <a:pPr algn="l"/>
-                      <a:r>
-                        <a:rPr sz="1300" b="1">
-                          <a:solidFill>
-                            <a:srgbClr val="C0392B"/>
-                          </a:solidFill>
-                          <a:latin typeface="Calibri"/>
-                        </a:rPr>
-                        <a:t>CDWC（移除對比學習）</a:t>
-                      </a:r>
-                    </a:p>
-                  </a:txBody>
-                  <a:tcPr>
-                    <a:solidFill>
-                      <a:srgbClr val="F2F5FC"/>
-                    </a:solidFill>
-                  </a:tcPr>
-                </a:tc>
-                <a:tc>
-                  <a:txBody>
-                    <a:bodyPr/>
-                    <a:lstStyle/>
-                    <a:p>
-                      <a:pPr algn="r"/>
-                      <a:r>
-                        <a:rPr sz="1300" b="1">
-                          <a:solidFill>
-                            <a:srgbClr val="C0392B"/>
-                          </a:solidFill>
-                          <a:latin typeface="Calibri"/>
-                        </a:rPr>
-                        <a:t>0.6705</a:t>
-                      </a:r>
-                    </a:p>
-                  </a:txBody>
-                  <a:tcPr>
-                    <a:solidFill>
-                      <a:srgbClr val="F2F5FC"/>
-                    </a:solidFill>
-                  </a:tcPr>
-                </a:tc>
-                <a:tc>
-                  <a:txBody>
-                    <a:bodyPr/>
-                    <a:lstStyle/>
-                    <a:p>
-                      <a:pPr algn="r"/>
-                      <a:r>
-                        <a:rPr sz="1300" b="1">
-                          <a:solidFill>
-                            <a:srgbClr val="C0392B"/>
-                          </a:solidFill>
-                          <a:latin typeface="Calibri"/>
-                        </a:rPr>
-                        <a:t>對比學習貢獻 +5.25%</a:t>
-                      </a:r>
-                    </a:p>
-                  </a:txBody>
-                  <a:tcPr>
-                    <a:solidFill>
-                      <a:srgbClr val="F2F5FC"/>
-                    </a:solidFill>
-                  </a:tcPr>
-                </a:tc>
-              </a:tr>
-            </a:tbl>
-          </a:graphicData>
-        </a:graphic>
-      </p:graphicFrame>
+        </p:nvPicPr>
+        <p:blipFill>
+          <a:blip r:embed="rId2"/>
+          <a:stretch>
+            <a:fillRect/>
+          </a:stretch>
+        </p:blipFill>
+        <p:spPr>
+          <a:xfrm>
+            <a:off x="685800" y="1828800"/>
+            <a:ext cx="7315200" cy="4297523"/>
+          </a:xfrm>
+          <a:prstGeom prst="rect">
+            <a:avLst/>
+          </a:prstGeom>
+        </p:spPr>
+      </p:pic>
       <p:sp>
         <p:nvSpPr>
           <p:cNvPr id="4" name="TextBox 3"/>
@@ -8248,8 +10349,8 @@
         </p:nvSpPr>
         <p:spPr>
           <a:xfrm>
-            <a:off x="685800" y="5111496"/>
-            <a:ext cx="10820095" cy="914400"/>
+            <a:off x="8366760" y="1874519"/>
+            <a:ext cx="3139135" cy="4343401"/>
           </a:xfrm>
           <a:prstGeom prst="rect">
             <a:avLst/>
@@ -8262,15 +10363,128 @@
           </a:bodyPr>
           <a:lstStyle/>
           <a:p>
-            <a:pPr algn="l"/>
-            <a:r>
-              <a:rPr sz="1300" b="0" i="0">
-                <a:solidFill>
-                  <a:srgbClr val="5A5A66"/>
-                </a:solidFill>
-                <a:latin typeface="Calibri"/>
-              </a:rPr>
-              <a:t>關鍵：論文自己的消融把 +5.25% 歸因於對比學習，並指出 Toluene 從 0.27 提升到 0.92。</a:t>
+            <a:pPr algn="l">
+              <a:spcAft>
+                <a:spcPts val="1200"/>
+              </a:spcAft>
+            </a:pPr>
+            <a:r>
+              <a:rPr sz="1500" b="1" i="0">
+                <a:solidFill>
+                  <a:srgbClr val="C0392B"/>
+                </a:solidFill>
+                <a:latin typeface="Calibri"/>
+              </a:rPr>
+              <a:t>▍ </a:t>
+            </a:r>
+            <a:r>
+              <a:rPr sz="1500" b="1" i="0">
+                <a:solidFill>
+                  <a:srgbClr val="1A1A1A"/>
+                </a:solidFill>
+                <a:latin typeface="Calibri"/>
+              </a:rPr>
+              <a:t>五個 ResNet 區塊，Conv1d</a:t>
+            </a:r>
+          </a:p>
+          <a:p>
+            <a:pPr>
+              <a:spcAft>
+                <a:spcPts val="1200"/>
+              </a:spcAft>
+            </a:pPr>
+            <a:r>
+              <a:rPr sz="1500" b="0" i="0">
+                <a:solidFill>
+                  <a:srgbClr val="CADCFC"/>
+                </a:solidFill>
+                <a:latin typeface="Calibri"/>
+              </a:rPr>
+              <a:t>· </a:t>
+            </a:r>
+            <a:r>
+              <a:rPr sz="1500" b="0" i="0">
+                <a:solidFill>
+                  <a:srgbClr val="1A1A1A"/>
+                </a:solidFill>
+                <a:latin typeface="Calibri"/>
+              </a:rPr>
+              <a:t>特徵生成插在第 3 與第 4 區塊之間</a:t>
+            </a:r>
+          </a:p>
+          <a:p>
+            <a:pPr>
+              <a:spcAft>
+                <a:spcPts val="1200"/>
+              </a:spcAft>
+            </a:pPr>
+            <a:r>
+              <a:rPr sz="1500" b="1" i="0">
+                <a:solidFill>
+                  <a:srgbClr val="C0392B"/>
+                </a:solidFill>
+                <a:latin typeface="Calibri"/>
+              </a:rPr>
+              <a:t>▍ </a:t>
+            </a:r>
+            <a:r>
+              <a:rPr sz="1500" b="1" i="0">
+                <a:solidFill>
+                  <a:srgbClr val="1A1A1A"/>
+                </a:solidFill>
+                <a:latin typeface="Calibri"/>
+              </a:rPr>
+              <a:t>對比損失接在 FC128 之前的 z_f</a:t>
+            </a:r>
+          </a:p>
+          <a:p>
+            <a:pPr>
+              <a:spcAft>
+                <a:spcPts val="1200"/>
+              </a:spcAft>
+            </a:pPr>
+            <a:r>
+              <a:rPr sz="1500" b="0" i="0">
+                <a:solidFill>
+                  <a:srgbClr val="CADCFC"/>
+                </a:solidFill>
+                <a:latin typeface="Calibri"/>
+              </a:rPr>
+              <a:t>· </a:t>
+            </a:r>
+            <a:r>
+              <a:rPr sz="1500" b="0" i="0">
+                <a:solidFill>
+                  <a:srgbClr val="1A1A1A"/>
+                </a:solidFill>
+                <a:latin typeface="Calibri"/>
+              </a:rPr>
+              <a:t>分類頭僅 0.77 K 參數</a:t>
+            </a:r>
+          </a:p>
+          <a:p>
+            <a:pPr>
+              <a:spcAft>
+                <a:spcPts val="1200"/>
+              </a:spcAft>
+            </a:pPr>
+            <a:r>
+              <a:rPr sz="1500" b="0" i="0">
+                <a:solidFill>
+                  <a:srgbClr val="CADCFC"/>
+                </a:solidFill>
+                <a:latin typeface="Calibri"/>
+              </a:rPr>
+              <a:t>· </a:t>
+            </a:r>
+            <a:r>
+              <a:rPr sz="1500" b="0" i="0">
+                <a:solidFill>
+                  <a:srgbClr val="1A1A1A"/>
+                </a:solidFill>
+                <a:latin typeface="Calibri"/>
+              </a:rPr>
+              <a:t>L2 loss 約束兩分支輸出一致</a:t>
             </a:r>
           </a:p>
         </p:txBody>
@@ -8323,7 +10537,7 @@
                 </a:solidFill>
                 <a:latin typeface="Cambria"/>
               </a:rPr>
-              <a:t>我們的實驗協定</a:t>
+              <a:t>文獻回顧：機制① 資料擴充</a:t>
             </a:r>
           </a:p>
           <a:p>
@@ -8339,21 +10553,69 @@
                 </a:solidFill>
                 <a:latin typeface="Calibri"/>
               </a:rPr>
-              <a:t>比論文更嚴格，且全程可稽核</a:t>
+              <a:t>論文 Fig. S5 與 Fig. 4</a:t>
             </a:r>
           </a:p>
         </p:txBody>
       </p:sp>
+      <p:pic>
+        <p:nvPicPr>
+          <p:cNvPr id="3" name="Picture 2" descr="paper_figS5_augment.png"/>
+          <p:cNvPicPr>
+            <a:picLocks noChangeAspect="1"/>
+          </p:cNvPicPr>
+          <p:nvPr/>
+        </p:nvPicPr>
+        <p:blipFill>
+          <a:blip r:embed="rId2"/>
+          <a:stretch>
+            <a:fillRect/>
+          </a:stretch>
+        </p:blipFill>
+        <p:spPr>
+          <a:xfrm>
+            <a:off x="685800" y="1783080"/>
+            <a:ext cx="5120640" cy="2285875"/>
+          </a:xfrm>
+          <a:prstGeom prst="rect">
+            <a:avLst/>
+          </a:prstGeom>
+        </p:spPr>
+      </p:pic>
+      <p:pic>
+        <p:nvPicPr>
+          <p:cNvPr id="4" name="Picture 3" descr="paper_fig4_aug_pca.png"/>
+          <p:cNvPicPr>
+            <a:picLocks noChangeAspect="1"/>
+          </p:cNvPicPr>
+          <p:nvPr/>
+        </p:nvPicPr>
+        <p:blipFill>
+          <a:blip r:embed="rId3"/>
+          <a:stretch>
+            <a:fillRect/>
+          </a:stretch>
+        </p:blipFill>
+        <p:spPr>
+          <a:xfrm>
+            <a:off x="6400800" y="1600200"/>
+            <a:ext cx="4329712" cy="3931920"/>
+          </a:xfrm>
+          <a:prstGeom prst="rect">
+            <a:avLst/>
+          </a:prstGeom>
+        </p:spPr>
+      </p:pic>
       <p:sp>
         <p:nvSpPr>
-          <p:cNvPr id="3" name="TextBox 2"/>
+          <p:cNvPr id="5" name="TextBox 4"/>
           <p:cNvSpPr txBox="1"/>
           <p:nvPr/>
         </p:nvSpPr>
         <p:spPr>
           <a:xfrm>
-            <a:off x="685800" y="1737360"/>
-            <a:ext cx="10820095" cy="4480560"/>
+            <a:off x="685800" y="4114800"/>
+            <a:ext cx="5120640" cy="2011680"/>
           </a:xfrm>
           <a:prstGeom prst="rect">
             <a:avLst/>
@@ -8366,128 +10628,31 @@
           </a:bodyPr>
           <a:lstStyle/>
           <a:p>
-            <a:pPr algn="l">
-              <a:spcAft>
-                <a:spcPts val="1200"/>
-              </a:spcAft>
+            <a:pPr algn="l"/>
+            <a:r>
+              <a:rPr sz="1500" b="0" i="0">
+                <a:solidFill>
+                  <a:srgbClr val="1A1A1A"/>
+                </a:solidFill>
+                <a:latin typeface="Calibri"/>
+              </a:rPr>
+              <a:t>混合兩個樣本的均值與變異數，生成新的高斯分布後抽樣雜訊疊加到原訊號。</a:t>
+            </a:r>
+          </a:p>
+          <a:p>
+            <a:pPr>
+              <a:spcBef>
+                <a:spcPts val="1000"/>
+              </a:spcBef>
             </a:pPr>
             <a:r>
-              <a:rPr sz="1700" b="1" i="0">
-                <a:solidFill>
-                  <a:srgbClr val="C0392B"/>
-                </a:solidFill>
-                <a:latin typeface="Calibri"/>
-              </a:rPr>
-              <a:t>▍ </a:t>
-            </a:r>
-            <a:r>
-              <a:rPr sz="1700" b="1" i="0">
-                <a:solidFill>
-                  <a:srgbClr val="1A1A1A"/>
-                </a:solidFill>
-                <a:latin typeface="Calibri"/>
-              </a:rPr>
-              <a:t>只用 Batch 1（445 筆）做訓練、正規化擬合、交叉驗證與所有選擇</a:t>
-            </a:r>
-          </a:p>
-          <a:p>
-            <a:pPr>
-              <a:spcAft>
-                <a:spcPts val="1200"/>
-              </a:spcAft>
-            </a:pPr>
-            <a:r>
-              <a:rPr sz="1700" b="1" i="0">
-                <a:solidFill>
-                  <a:srgbClr val="C0392B"/>
-                </a:solidFill>
-                <a:latin typeface="Calibri"/>
-              </a:rPr>
-              <a:t>▍ </a:t>
-            </a:r>
-            <a:r>
-              <a:rPr sz="1700" b="1" i="0">
-                <a:solidFill>
-                  <a:srgbClr val="1A1A1A"/>
-                </a:solidFill>
-                <a:latin typeface="Calibri"/>
-              </a:rPr>
-              <a:t>所有檢查點凍結並雜湊後，目標批次才各載入一次</a:t>
-            </a:r>
-          </a:p>
-          <a:p>
-            <a:pPr>
-              <a:spcAft>
-                <a:spcPts val="1200"/>
-              </a:spcAft>
-            </a:pPr>
-            <a:r>
-              <a:rPr sz="1700" b="0" i="0">
-                <a:solidFill>
-                  <a:srgbClr val="CADCFC"/>
-                </a:solidFill>
-                <a:latin typeface="Calibri"/>
-              </a:rPr>
-              <a:t>· </a:t>
-            </a:r>
-            <a:r>
-              <a:rPr sz="1700" b="0" i="0">
-                <a:solidFill>
-                  <a:srgbClr val="1A1A1A"/>
-                </a:solidFill>
-                <a:latin typeface="Calibri"/>
-              </a:rPr>
-              <a:t>五個固定種子、100 epochs、SGD、StepLR、batch 64</a:t>
-            </a:r>
-          </a:p>
-          <a:p>
-            <a:pPr>
-              <a:spcAft>
-                <a:spcPts val="1200"/>
-              </a:spcAft>
-            </a:pPr>
-            <a:r>
-              <a:rPr sz="1700" b="0" i="0">
-                <a:solidFill>
-                  <a:srgbClr val="CADCFC"/>
-                </a:solidFill>
-                <a:latin typeface="Calibri"/>
-              </a:rPr>
-              <a:t>· </a:t>
-            </a:r>
-            <a:r>
-              <a:rPr sz="1700" b="0" i="0">
-                <a:solidFill>
-                  <a:srgbClr val="1A1A1A"/>
-                </a:solidFill>
-                <a:latin typeface="Calibri"/>
-              </a:rPr>
-              <a:t>每次執行寫入獨立目錄，附洩漏稽核；違規即失敗</a:t>
-            </a:r>
-          </a:p>
-          <a:p>
-            <a:pPr>
-              <a:spcAft>
-                <a:spcPts val="1200"/>
-              </a:spcAft>
-            </a:pPr>
-            <a:r>
-              <a:rPr sz="1700" b="0" i="0">
-                <a:solidFill>
-                  <a:srgbClr val="CADCFC"/>
-                </a:solidFill>
-                <a:latin typeface="Calibri"/>
-              </a:rPr>
-              <a:t>· </a:t>
-            </a:r>
-            <a:r>
-              <a:rPr sz="1700" b="0" i="0">
-                <a:solidFill>
-                  <a:srgbClr val="1A1A1A"/>
-                </a:solidFill>
-                <a:latin typeface="Calibri"/>
-              </a:rPr>
-              <a:t>指標：target mean＝九個目標批次準確率的未加權平均（與論文相同）</a:t>
+              <a:rPr sz="1500" b="0" i="0">
+                <a:solidFill>
+                  <a:srgbClr val="5A5A66"/>
+                </a:solidFill>
+                <a:latin typeface="Calibri"/>
+              </a:rPr>
+              <a:t>右圖：相較白高斯雜訊與常數雜訊，CDCNN 的擴充在 PCA 空間產生明顯更大的分散。</a:t>
             </a:r>
           </a:p>
         </p:txBody>
@@ -8540,1099 +10705,85 @@
                 </a:solidFill>
                 <a:latin typeface="Cambria"/>
               </a:rPr>
-              <a:t>正式的四階段結果</a:t>
+              <a:t>文獻回顧：機制② 特徵生成</a:t>
+            </a:r>
+          </a:p>
+          <a:p>
+            <a:pPr>
+              <a:spcBef>
+                <a:spcPts val="600"/>
+              </a:spcBef>
+            </a:pPr>
+            <a:r>
+              <a:rPr sz="1500" b="0" i="1">
+                <a:solidFill>
+                  <a:srgbClr val="5A5A66"/>
+                </a:solidFill>
+                <a:latin typeface="Calibri"/>
+              </a:rPr>
+              <a:t>論文 Fig. S4(b) 與 Fig. 5</a:t>
             </a:r>
           </a:p>
         </p:txBody>
       </p:sp>
-      <p:graphicFrame>
-        <p:nvGraphicFramePr>
-          <p:cNvPr id="3" name="Table 2"/>
-          <p:cNvGraphicFramePr>
-            <a:graphicFrameLocks noGrp="1"/>
-          </p:cNvGraphicFramePr>
+      <p:pic>
+        <p:nvPicPr>
+          <p:cNvPr id="3" name="Picture 2" descr="paper_figS4_blocks.png"/>
+          <p:cNvPicPr>
+            <a:picLocks noChangeAspect="1"/>
+          </p:cNvPicPr>
           <p:nvPr/>
-        </p:nvGraphicFramePr>
-        <p:xfrm>
-          <a:off x="685800" y="1783080"/>
-          <a:ext cx="10820090" cy="1920240"/>
-        </p:xfrm>
-        <a:graphic>
-          <a:graphicData uri="http://schemas.openxmlformats.org/drawingml/2006/table">
-            <a:tbl>
-              <a:tblPr firstRow="1" bandRow="1">
-                <a:tableStyleId>{5C22544A-7EE6-4342-B048-85BDC9FD1C3A}</a:tableStyleId>
-              </a:tblPr>
-              <a:tblGrid>
-                <a:gridCol w="2380420"/>
-                <a:gridCol w="1082009"/>
-                <a:gridCol w="1190210"/>
-                <a:gridCol w="973808"/>
-                <a:gridCol w="973808"/>
-                <a:gridCol w="973808"/>
-                <a:gridCol w="973808"/>
-                <a:gridCol w="973808"/>
-                <a:gridCol w="1298411"/>
-              </a:tblGrid>
-              <a:tr h="384048">
-                <a:tc>
-                  <a:txBody>
-                    <a:bodyPr/>
-                    <a:lstStyle/>
-                    <a:p>
-                      <a:pPr algn="l"/>
-                      <a:r>
-                        <a:rPr sz="1300" b="1">
-                          <a:solidFill>
-                            <a:srgbClr val="FFFFFF"/>
-                          </a:solidFill>
-                          <a:latin typeface="Calibri"/>
-                        </a:rPr>
-                        <a:t>Stage</a:t>
-                      </a:r>
-                    </a:p>
-                  </a:txBody>
-                  <a:tcPr>
-                    <a:solidFill>
-                      <a:srgbClr val="1E2761"/>
-                    </a:solidFill>
-                  </a:tcPr>
-                </a:tc>
-                <a:tc>
-                  <a:txBody>
-                    <a:bodyPr/>
-                    <a:lstStyle/>
-                    <a:p>
-                      <a:pPr algn="r"/>
-                      <a:r>
-                        <a:rPr sz="1300" b="1">
-                          <a:solidFill>
-                            <a:srgbClr val="FFFFFF"/>
-                          </a:solidFill>
-                          <a:latin typeface="Calibri"/>
-                        </a:rPr>
-                        <a:t>CV</a:t>
-                      </a:r>
-                    </a:p>
-                  </a:txBody>
-                  <a:tcPr>
-                    <a:solidFill>
-                      <a:srgbClr val="1E2761"/>
-                    </a:solidFill>
-                  </a:tcPr>
-                </a:tc>
-                <a:tc>
-                  <a:txBody>
-                    <a:bodyPr/>
-                    <a:lstStyle/>
-                    <a:p>
-                      <a:pPr algn="r"/>
-                      <a:r>
-                        <a:rPr sz="1300" b="1">
-                          <a:solidFill>
-                            <a:srgbClr val="FFFFFF"/>
-                          </a:solidFill>
-                          <a:latin typeface="Calibri"/>
-                        </a:rPr>
-                        <a:t>Target</a:t>
-                      </a:r>
-                    </a:p>
-                  </a:txBody>
-                  <a:tcPr>
-                    <a:solidFill>
-                      <a:srgbClr val="1E2761"/>
-                    </a:solidFill>
-                  </a:tcPr>
-                </a:tc>
-                <a:tc>
-                  <a:txBody>
-                    <a:bodyPr/>
-                    <a:lstStyle/>
-                    <a:p>
-                      <a:pPr algn="r"/>
-                      <a:r>
-                        <a:rPr sz="1300" b="1">
-                          <a:solidFill>
-                            <a:srgbClr val="FFFFFF"/>
-                          </a:solidFill>
-                          <a:latin typeface="Calibri"/>
-                        </a:rPr>
-                        <a:t>B2</a:t>
-                      </a:r>
-                    </a:p>
-                  </a:txBody>
-                  <a:tcPr>
-                    <a:solidFill>
-                      <a:srgbClr val="1E2761"/>
-                    </a:solidFill>
-                  </a:tcPr>
-                </a:tc>
-                <a:tc>
-                  <a:txBody>
-                    <a:bodyPr/>
-                    <a:lstStyle/>
-                    <a:p>
-                      <a:pPr algn="r"/>
-                      <a:r>
-                        <a:rPr sz="1300" b="1">
-                          <a:solidFill>
-                            <a:srgbClr val="FFFFFF"/>
-                          </a:solidFill>
-                          <a:latin typeface="Calibri"/>
-                        </a:rPr>
-                        <a:t>B4</a:t>
-                      </a:r>
-                    </a:p>
-                  </a:txBody>
-                  <a:tcPr>
-                    <a:solidFill>
-                      <a:srgbClr val="1E2761"/>
-                    </a:solidFill>
-                  </a:tcPr>
-                </a:tc>
-                <a:tc>
-                  <a:txBody>
-                    <a:bodyPr/>
-                    <a:lstStyle/>
-                    <a:p>
-                      <a:pPr algn="r"/>
-                      <a:r>
-                        <a:rPr sz="1300" b="1">
-                          <a:solidFill>
-                            <a:srgbClr val="FFFFFF"/>
-                          </a:solidFill>
-                          <a:latin typeface="Calibri"/>
-                        </a:rPr>
-                        <a:t>B6</a:t>
-                      </a:r>
-                    </a:p>
-                  </a:txBody>
-                  <a:tcPr>
-                    <a:solidFill>
-                      <a:srgbClr val="1E2761"/>
-                    </a:solidFill>
-                  </a:tcPr>
-                </a:tc>
-                <a:tc>
-                  <a:txBody>
-                    <a:bodyPr/>
-                    <a:lstStyle/>
-                    <a:p>
-                      <a:pPr algn="r"/>
-                      <a:r>
-                        <a:rPr sz="1300" b="1">
-                          <a:solidFill>
-                            <a:srgbClr val="FFFFFF"/>
-                          </a:solidFill>
-                          <a:latin typeface="Calibri"/>
-                        </a:rPr>
-                        <a:t>B8</a:t>
-                      </a:r>
-                    </a:p>
-                  </a:txBody>
-                  <a:tcPr>
-                    <a:solidFill>
-                      <a:srgbClr val="1E2761"/>
-                    </a:solidFill>
-                  </a:tcPr>
-                </a:tc>
-                <a:tc>
-                  <a:txBody>
-                    <a:bodyPr/>
-                    <a:lstStyle/>
-                    <a:p>
-                      <a:pPr algn="r"/>
-                      <a:r>
-                        <a:rPr sz="1300" b="1">
-                          <a:solidFill>
-                            <a:srgbClr val="FFFFFF"/>
-                          </a:solidFill>
-                          <a:latin typeface="Calibri"/>
-                        </a:rPr>
-                        <a:t>B10</a:t>
-                      </a:r>
-                    </a:p>
-                  </a:txBody>
-                  <a:tcPr>
-                    <a:solidFill>
-                      <a:srgbClr val="1E2761"/>
-                    </a:solidFill>
-                  </a:tcPr>
-                </a:tc>
-                <a:tc>
-                  <a:txBody>
-                    <a:bodyPr/>
-                    <a:lstStyle/>
-                    <a:p>
-                      <a:pPr algn="r"/>
-                      <a:r>
-                        <a:rPr sz="1300" b="1">
-                          <a:solidFill>
-                            <a:srgbClr val="FFFFFF"/>
-                          </a:solidFill>
-                          <a:latin typeface="Calibri"/>
-                        </a:rPr>
-                        <a:t>論文</a:t>
-                      </a:r>
-                    </a:p>
-                  </a:txBody>
-                  <a:tcPr>
-                    <a:solidFill>
-                      <a:srgbClr val="1E2761"/>
-                    </a:solidFill>
-                  </a:tcPr>
-                </a:tc>
-              </a:tr>
-              <a:tr h="384048">
-                <a:tc>
-                  <a:txBody>
-                    <a:bodyPr/>
-                    <a:lstStyle/>
-                    <a:p>
-                      <a:pPr algn="l"/>
-                      <a:r>
-                        <a:rPr sz="1300" b="0">
-                          <a:solidFill>
-                            <a:srgbClr val="1A1A1A"/>
-                          </a:solidFill>
-                          <a:latin typeface="Calibri"/>
-                        </a:rPr>
-                        <a:t>B0 基線</a:t>
-                      </a:r>
-                    </a:p>
-                  </a:txBody>
-                  <a:tcPr>
-                    <a:solidFill>
-                      <a:srgbClr val="F2F5FC"/>
-                    </a:solidFill>
-                  </a:tcPr>
-                </a:tc>
-                <a:tc>
-                  <a:txBody>
-                    <a:bodyPr/>
-                    <a:lstStyle/>
-                    <a:p>
-                      <a:pPr algn="r"/>
-                      <a:r>
-                        <a:rPr sz="1300" b="0">
-                          <a:solidFill>
-                            <a:srgbClr val="1A1A1A"/>
-                          </a:solidFill>
-                          <a:latin typeface="Calibri"/>
-                        </a:rPr>
-                        <a:t>0.978</a:t>
-                      </a:r>
-                    </a:p>
-                  </a:txBody>
-                  <a:tcPr>
-                    <a:solidFill>
-                      <a:srgbClr val="F2F5FC"/>
-                    </a:solidFill>
-                  </a:tcPr>
-                </a:tc>
-                <a:tc>
-                  <a:txBody>
-                    <a:bodyPr/>
-                    <a:lstStyle/>
-                    <a:p>
-                      <a:pPr algn="r"/>
-                      <a:r>
-                        <a:rPr sz="1300" b="0">
-                          <a:solidFill>
-                            <a:srgbClr val="1A1A1A"/>
-                          </a:solidFill>
-                          <a:latin typeface="Calibri"/>
-                        </a:rPr>
-                        <a:t>0.410</a:t>
-                      </a:r>
-                    </a:p>
-                  </a:txBody>
-                  <a:tcPr>
-                    <a:solidFill>
-                      <a:srgbClr val="F2F5FC"/>
-                    </a:solidFill>
-                  </a:tcPr>
-                </a:tc>
-                <a:tc>
-                  <a:txBody>
-                    <a:bodyPr/>
-                    <a:lstStyle/>
-                    <a:p>
-                      <a:pPr algn="r"/>
-                      <a:r>
-                        <a:rPr sz="1300" b="0">
-                          <a:solidFill>
-                            <a:srgbClr val="1A1A1A"/>
-                          </a:solidFill>
-                          <a:latin typeface="Calibri"/>
-                        </a:rPr>
-                        <a:t>0.74</a:t>
-                      </a:r>
-                    </a:p>
-                  </a:txBody>
-                  <a:tcPr>
-                    <a:solidFill>
-                      <a:srgbClr val="F2F5FC"/>
-                    </a:solidFill>
-                  </a:tcPr>
-                </a:tc>
-                <a:tc>
-                  <a:txBody>
-                    <a:bodyPr/>
-                    <a:lstStyle/>
-                    <a:p>
-                      <a:pPr algn="r"/>
-                      <a:r>
-                        <a:rPr sz="1300" b="0">
-                          <a:solidFill>
-                            <a:srgbClr val="1A1A1A"/>
-                          </a:solidFill>
-                          <a:latin typeface="Calibri"/>
-                        </a:rPr>
-                        <a:t>0.50</a:t>
-                      </a:r>
-                    </a:p>
-                  </a:txBody>
-                  <a:tcPr>
-                    <a:solidFill>
-                      <a:srgbClr val="F2F5FC"/>
-                    </a:solidFill>
-                  </a:tcPr>
-                </a:tc>
-                <a:tc>
-                  <a:txBody>
-                    <a:bodyPr/>
-                    <a:lstStyle/>
-                    <a:p>
-                      <a:pPr algn="r"/>
-                      <a:r>
-                        <a:rPr sz="1300" b="0">
-                          <a:solidFill>
-                            <a:srgbClr val="1A1A1A"/>
-                          </a:solidFill>
-                          <a:latin typeface="Calibri"/>
-                        </a:rPr>
-                        <a:t>0.48</a:t>
-                      </a:r>
-                    </a:p>
-                  </a:txBody>
-                  <a:tcPr>
-                    <a:solidFill>
-                      <a:srgbClr val="F2F5FC"/>
-                    </a:solidFill>
-                  </a:tcPr>
-                </a:tc>
-                <a:tc>
-                  <a:txBody>
-                    <a:bodyPr/>
-                    <a:lstStyle/>
-                    <a:p>
-                      <a:pPr algn="r"/>
-                      <a:r>
-                        <a:rPr sz="1300" b="0">
-                          <a:solidFill>
-                            <a:srgbClr val="1A1A1A"/>
-                          </a:solidFill>
-                          <a:latin typeface="Calibri"/>
-                        </a:rPr>
-                        <a:t>0.20</a:t>
-                      </a:r>
-                    </a:p>
-                  </a:txBody>
-                  <a:tcPr>
-                    <a:solidFill>
-                      <a:srgbClr val="F2F5FC"/>
-                    </a:solidFill>
-                  </a:tcPr>
-                </a:tc>
-                <a:tc>
-                  <a:txBody>
-                    <a:bodyPr/>
-                    <a:lstStyle/>
-                    <a:p>
-                      <a:pPr algn="r"/>
-                      <a:r>
-                        <a:rPr sz="1300" b="0">
-                          <a:solidFill>
-                            <a:srgbClr val="1A1A1A"/>
-                          </a:solidFill>
-                          <a:latin typeface="Calibri"/>
-                        </a:rPr>
-                        <a:t>0.29</a:t>
-                      </a:r>
-                    </a:p>
-                  </a:txBody>
-                  <a:tcPr>
-                    <a:solidFill>
-                      <a:srgbClr val="F2F5FC"/>
-                    </a:solidFill>
-                  </a:tcPr>
-                </a:tc>
-                <a:tc>
-                  <a:txBody>
-                    <a:bodyPr/>
-                    <a:lstStyle/>
-                    <a:p>
-                      <a:pPr algn="r"/>
-                      <a:r>
-                        <a:rPr sz="1300" b="0">
-                          <a:solidFill>
-                            <a:srgbClr val="1A1A1A"/>
-                          </a:solidFill>
-                          <a:latin typeface="Calibri"/>
-                        </a:rPr>
-                        <a:t>0.634</a:t>
-                      </a:r>
-                    </a:p>
-                  </a:txBody>
-                  <a:tcPr>
-                    <a:solidFill>
-                      <a:srgbClr val="F2F5FC"/>
-                    </a:solidFill>
-                  </a:tcPr>
-                </a:tc>
-              </a:tr>
-              <a:tr h="384048">
-                <a:tc>
-                  <a:txBody>
-                    <a:bodyPr/>
-                    <a:lstStyle/>
-                    <a:p>
-                      <a:pPr algn="l"/>
-                      <a:r>
-                        <a:rPr sz="1300" b="0">
-                          <a:solidFill>
-                            <a:srgbClr val="1A1A1A"/>
-                          </a:solidFill>
-                          <a:latin typeface="Calibri"/>
-                        </a:rPr>
-                        <a:t>A1 +增強</a:t>
-                      </a:r>
-                    </a:p>
-                  </a:txBody>
-                  <a:tcPr>
-                    <a:solidFill>
-                      <a:srgbClr val="FFFFFF"/>
-                    </a:solidFill>
-                  </a:tcPr>
-                </a:tc>
-                <a:tc>
-                  <a:txBody>
-                    <a:bodyPr/>
-                    <a:lstStyle/>
-                    <a:p>
-                      <a:pPr algn="r"/>
-                      <a:r>
-                        <a:rPr sz="1300" b="0">
-                          <a:solidFill>
-                            <a:srgbClr val="1A1A1A"/>
-                          </a:solidFill>
-                          <a:latin typeface="Calibri"/>
-                        </a:rPr>
-                        <a:t>0.980</a:t>
-                      </a:r>
-                    </a:p>
-                  </a:txBody>
-                  <a:tcPr>
-                    <a:solidFill>
-                      <a:srgbClr val="FFFFFF"/>
-                    </a:solidFill>
-                  </a:tcPr>
-                </a:tc>
-                <a:tc>
-                  <a:txBody>
-                    <a:bodyPr/>
-                    <a:lstStyle/>
-                    <a:p>
-                      <a:pPr algn="r"/>
-                      <a:r>
-                        <a:rPr sz="1300" b="0">
-                          <a:solidFill>
-                            <a:srgbClr val="1A1A1A"/>
-                          </a:solidFill>
-                          <a:latin typeface="Calibri"/>
-                        </a:rPr>
-                        <a:t>0.372</a:t>
-                      </a:r>
-                    </a:p>
-                  </a:txBody>
-                  <a:tcPr>
-                    <a:solidFill>
-                      <a:srgbClr val="FFFFFF"/>
-                    </a:solidFill>
-                  </a:tcPr>
-                </a:tc>
-                <a:tc>
-                  <a:txBody>
-                    <a:bodyPr/>
-                    <a:lstStyle/>
-                    <a:p>
-                      <a:pPr algn="r"/>
-                      <a:r>
-                        <a:rPr sz="1300" b="0">
-                          <a:solidFill>
-                            <a:srgbClr val="1A1A1A"/>
-                          </a:solidFill>
-                          <a:latin typeface="Calibri"/>
-                        </a:rPr>
-                        <a:t>0.73</a:t>
-                      </a:r>
-                    </a:p>
-                  </a:txBody>
-                  <a:tcPr>
-                    <a:solidFill>
-                      <a:srgbClr val="FFFFFF"/>
-                    </a:solidFill>
-                  </a:tcPr>
-                </a:tc>
-                <a:tc>
-                  <a:txBody>
-                    <a:bodyPr/>
-                    <a:lstStyle/>
-                    <a:p>
-                      <a:pPr algn="r"/>
-                      <a:r>
-                        <a:rPr sz="1300" b="0">
-                          <a:solidFill>
-                            <a:srgbClr val="1A1A1A"/>
-                          </a:solidFill>
-                          <a:latin typeface="Calibri"/>
-                        </a:rPr>
-                        <a:t>0.49</a:t>
-                      </a:r>
-                    </a:p>
-                  </a:txBody>
-                  <a:tcPr>
-                    <a:solidFill>
-                      <a:srgbClr val="FFFFFF"/>
-                    </a:solidFill>
-                  </a:tcPr>
-                </a:tc>
-                <a:tc>
-                  <a:txBody>
-                    <a:bodyPr/>
-                    <a:lstStyle/>
-                    <a:p>
-                      <a:pPr algn="r"/>
-                      <a:r>
-                        <a:rPr sz="1300" b="0">
-                          <a:solidFill>
-                            <a:srgbClr val="1A1A1A"/>
-                          </a:solidFill>
-                          <a:latin typeface="Calibri"/>
-                        </a:rPr>
-                        <a:t>0.42</a:t>
-                      </a:r>
-                    </a:p>
-                  </a:txBody>
-                  <a:tcPr>
-                    <a:solidFill>
-                      <a:srgbClr val="FFFFFF"/>
-                    </a:solidFill>
-                  </a:tcPr>
-                </a:tc>
-                <a:tc>
-                  <a:txBody>
-                    <a:bodyPr/>
-                    <a:lstStyle/>
-                    <a:p>
-                      <a:pPr algn="r"/>
-                      <a:r>
-                        <a:rPr sz="1300" b="0">
-                          <a:solidFill>
-                            <a:srgbClr val="1A1A1A"/>
-                          </a:solidFill>
-                          <a:latin typeface="Calibri"/>
-                        </a:rPr>
-                        <a:t>0.13</a:t>
-                      </a:r>
-                    </a:p>
-                  </a:txBody>
-                  <a:tcPr>
-                    <a:solidFill>
-                      <a:srgbClr val="FFFFFF"/>
-                    </a:solidFill>
-                  </a:tcPr>
-                </a:tc>
-                <a:tc>
-                  <a:txBody>
-                    <a:bodyPr/>
-                    <a:lstStyle/>
-                    <a:p>
-                      <a:pPr algn="r"/>
-                      <a:r>
-                        <a:rPr sz="1300" b="0">
-                          <a:solidFill>
-                            <a:srgbClr val="1A1A1A"/>
-                          </a:solidFill>
-                          <a:latin typeface="Calibri"/>
-                        </a:rPr>
-                        <a:t>0.30</a:t>
-                      </a:r>
-                    </a:p>
-                  </a:txBody>
-                  <a:tcPr>
-                    <a:solidFill>
-                      <a:srgbClr val="FFFFFF"/>
-                    </a:solidFill>
-                  </a:tcPr>
-                </a:tc>
-                <a:tc>
-                  <a:txBody>
-                    <a:bodyPr/>
-                    <a:lstStyle/>
-                    <a:p>
-                      <a:pPr algn="r"/>
-                      <a:r>
-                        <a:rPr sz="1300" b="0">
-                          <a:solidFill>
-                            <a:srgbClr val="1A1A1A"/>
-                          </a:solidFill>
-                          <a:latin typeface="Calibri"/>
-                        </a:rPr>
-                        <a:t>—</a:t>
-                      </a:r>
-                    </a:p>
-                  </a:txBody>
-                  <a:tcPr>
-                    <a:solidFill>
-                      <a:srgbClr val="FFFFFF"/>
-                    </a:solidFill>
-                  </a:tcPr>
-                </a:tc>
-              </a:tr>
-              <a:tr h="384048">
-                <a:tc>
-                  <a:txBody>
-                    <a:bodyPr/>
-                    <a:lstStyle/>
-                    <a:p>
-                      <a:pPr algn="l"/>
-                      <a:r>
-                        <a:rPr sz="1300" b="0">
-                          <a:solidFill>
-                            <a:srgbClr val="1A1A1A"/>
-                          </a:solidFill>
-                          <a:latin typeface="Calibri"/>
-                        </a:rPr>
-                        <a:t>A2 +特徵生成</a:t>
-                      </a:r>
-                    </a:p>
-                  </a:txBody>
-                  <a:tcPr>
-                    <a:solidFill>
-                      <a:srgbClr val="F2F5FC"/>
-                    </a:solidFill>
-                  </a:tcPr>
-                </a:tc>
-                <a:tc>
-                  <a:txBody>
-                    <a:bodyPr/>
-                    <a:lstStyle/>
-                    <a:p>
-                      <a:pPr algn="r"/>
-                      <a:r>
-                        <a:rPr sz="1300" b="0">
-                          <a:solidFill>
-                            <a:srgbClr val="1A1A1A"/>
-                          </a:solidFill>
-                          <a:latin typeface="Calibri"/>
-                        </a:rPr>
-                        <a:t>0.982</a:t>
-                      </a:r>
-                    </a:p>
-                  </a:txBody>
-                  <a:tcPr>
-                    <a:solidFill>
-                      <a:srgbClr val="F2F5FC"/>
-                    </a:solidFill>
-                  </a:tcPr>
-                </a:tc>
-                <a:tc>
-                  <a:txBody>
-                    <a:bodyPr/>
-                    <a:lstStyle/>
-                    <a:p>
-                      <a:pPr algn="r"/>
-                      <a:r>
-                        <a:rPr sz="1300" b="0">
-                          <a:solidFill>
-                            <a:srgbClr val="1A1A1A"/>
-                          </a:solidFill>
-                          <a:latin typeface="Calibri"/>
-                        </a:rPr>
-                        <a:t>0.397</a:t>
-                      </a:r>
-                    </a:p>
-                  </a:txBody>
-                  <a:tcPr>
-                    <a:solidFill>
-                      <a:srgbClr val="F2F5FC"/>
-                    </a:solidFill>
-                  </a:tcPr>
-                </a:tc>
-                <a:tc>
-                  <a:txBody>
-                    <a:bodyPr/>
-                    <a:lstStyle/>
-                    <a:p>
-                      <a:pPr algn="r"/>
-                      <a:r>
-                        <a:rPr sz="1300" b="0">
-                          <a:solidFill>
-                            <a:srgbClr val="1A1A1A"/>
-                          </a:solidFill>
-                          <a:latin typeface="Calibri"/>
-                        </a:rPr>
-                        <a:t>0.77</a:t>
-                      </a:r>
-                    </a:p>
-                  </a:txBody>
-                  <a:tcPr>
-                    <a:solidFill>
-                      <a:srgbClr val="F2F5FC"/>
-                    </a:solidFill>
-                  </a:tcPr>
-                </a:tc>
-                <a:tc>
-                  <a:txBody>
-                    <a:bodyPr/>
-                    <a:lstStyle/>
-                    <a:p>
-                      <a:pPr algn="r"/>
-                      <a:r>
-                        <a:rPr sz="1300" b="0">
-                          <a:solidFill>
-                            <a:srgbClr val="1A1A1A"/>
-                          </a:solidFill>
-                          <a:latin typeface="Calibri"/>
-                        </a:rPr>
-                        <a:t>0.49</a:t>
-                      </a:r>
-                    </a:p>
-                  </a:txBody>
-                  <a:tcPr>
-                    <a:solidFill>
-                      <a:srgbClr val="F2F5FC"/>
-                    </a:solidFill>
-                  </a:tcPr>
-                </a:tc>
-                <a:tc>
-                  <a:txBody>
-                    <a:bodyPr/>
-                    <a:lstStyle/>
-                    <a:p>
-                      <a:pPr algn="r"/>
-                      <a:r>
-                        <a:rPr sz="1300" b="0">
-                          <a:solidFill>
-                            <a:srgbClr val="1A1A1A"/>
-                          </a:solidFill>
-                          <a:latin typeface="Calibri"/>
-                        </a:rPr>
-                        <a:t>0.42</a:t>
-                      </a:r>
-                    </a:p>
-                  </a:txBody>
-                  <a:tcPr>
-                    <a:solidFill>
-                      <a:srgbClr val="F2F5FC"/>
-                    </a:solidFill>
-                  </a:tcPr>
-                </a:tc>
-                <a:tc>
-                  <a:txBody>
-                    <a:bodyPr/>
-                    <a:lstStyle/>
-                    <a:p>
-                      <a:pPr algn="r"/>
-                      <a:r>
-                        <a:rPr sz="1300" b="0">
-                          <a:solidFill>
-                            <a:srgbClr val="1A1A1A"/>
-                          </a:solidFill>
-                          <a:latin typeface="Calibri"/>
-                        </a:rPr>
-                        <a:t>0.17</a:t>
-                      </a:r>
-                    </a:p>
-                  </a:txBody>
-                  <a:tcPr>
-                    <a:solidFill>
-                      <a:srgbClr val="F2F5FC"/>
-                    </a:solidFill>
-                  </a:tcPr>
-                </a:tc>
-                <a:tc>
-                  <a:txBody>
-                    <a:bodyPr/>
-                    <a:lstStyle/>
-                    <a:p>
-                      <a:pPr algn="r"/>
-                      <a:r>
-                        <a:rPr sz="1300" b="0">
-                          <a:solidFill>
-                            <a:srgbClr val="1A1A1A"/>
-                          </a:solidFill>
-                          <a:latin typeface="Calibri"/>
-                        </a:rPr>
-                        <a:t>0.31</a:t>
-                      </a:r>
-                    </a:p>
-                  </a:txBody>
-                  <a:tcPr>
-                    <a:solidFill>
-                      <a:srgbClr val="F2F5FC"/>
-                    </a:solidFill>
-                  </a:tcPr>
-                </a:tc>
-                <a:tc>
-                  <a:txBody>
-                    <a:bodyPr/>
-                    <a:lstStyle/>
-                    <a:p>
-                      <a:pPr algn="r"/>
-                      <a:r>
-                        <a:rPr sz="1300" b="0">
-                          <a:solidFill>
-                            <a:srgbClr val="1A1A1A"/>
-                          </a:solidFill>
-                          <a:latin typeface="Calibri"/>
-                        </a:rPr>
-                        <a:t>0.670</a:t>
-                      </a:r>
-                    </a:p>
-                  </a:txBody>
-                  <a:tcPr>
-                    <a:solidFill>
-                      <a:srgbClr val="F2F5FC"/>
-                    </a:solidFill>
-                  </a:tcPr>
-                </a:tc>
-              </a:tr>
-              <a:tr h="384048">
-                <a:tc>
-                  <a:txBody>
-                    <a:bodyPr/>
-                    <a:lstStyle/>
-                    <a:p>
-                      <a:pPr algn="l"/>
-                      <a:r>
-                        <a:rPr sz="1300" b="1">
-                          <a:solidFill>
-                            <a:srgbClr val="C0392B"/>
-                          </a:solidFill>
-                          <a:latin typeface="Calibri"/>
-                        </a:rPr>
-                        <a:t>A3 +對比學習</a:t>
-                      </a:r>
-                    </a:p>
-                  </a:txBody>
-                  <a:tcPr>
-                    <a:solidFill>
-                      <a:srgbClr val="FFFFFF"/>
-                    </a:solidFill>
-                  </a:tcPr>
-                </a:tc>
-                <a:tc>
-                  <a:txBody>
-                    <a:bodyPr/>
-                    <a:lstStyle/>
-                    <a:p>
-                      <a:pPr algn="r"/>
-                      <a:r>
-                        <a:rPr sz="1300" b="1">
-                          <a:solidFill>
-                            <a:srgbClr val="C0392B"/>
-                          </a:solidFill>
-                          <a:latin typeface="Calibri"/>
-                        </a:rPr>
-                        <a:t>0.968</a:t>
-                      </a:r>
-                    </a:p>
-                  </a:txBody>
-                  <a:tcPr>
-                    <a:solidFill>
-                      <a:srgbClr val="FFFFFF"/>
-                    </a:solidFill>
-                  </a:tcPr>
-                </a:tc>
-                <a:tc>
-                  <a:txBody>
-                    <a:bodyPr/>
-                    <a:lstStyle/>
-                    <a:p>
-                      <a:pPr algn="r"/>
-                      <a:r>
-                        <a:rPr sz="1300" b="1">
-                          <a:solidFill>
-                            <a:srgbClr val="C0392B"/>
-                          </a:solidFill>
-                          <a:latin typeface="Calibri"/>
-                        </a:rPr>
-                        <a:t>0.460</a:t>
-                      </a:r>
-                    </a:p>
-                  </a:txBody>
-                  <a:tcPr>
-                    <a:solidFill>
-                      <a:srgbClr val="FFFFFF"/>
-                    </a:solidFill>
-                  </a:tcPr>
-                </a:tc>
-                <a:tc>
-                  <a:txBody>
-                    <a:bodyPr/>
-                    <a:lstStyle/>
-                    <a:p>
-                      <a:pPr algn="r"/>
-                      <a:r>
-                        <a:rPr sz="1300" b="1">
-                          <a:solidFill>
-                            <a:srgbClr val="C0392B"/>
-                          </a:solidFill>
-                          <a:latin typeface="Calibri"/>
-                        </a:rPr>
-                        <a:t>0.89</a:t>
-                      </a:r>
-                    </a:p>
-                  </a:txBody>
-                  <a:tcPr>
-                    <a:solidFill>
-                      <a:srgbClr val="FFFFFF"/>
-                    </a:solidFill>
-                  </a:tcPr>
-                </a:tc>
-                <a:tc>
-                  <a:txBody>
-                    <a:bodyPr/>
-                    <a:lstStyle/>
-                    <a:p>
-                      <a:pPr algn="r"/>
-                      <a:r>
-                        <a:rPr sz="1300" b="1">
-                          <a:solidFill>
-                            <a:srgbClr val="C0392B"/>
-                          </a:solidFill>
-                          <a:latin typeface="Calibri"/>
-                        </a:rPr>
-                        <a:t>0.58</a:t>
-                      </a:r>
-                    </a:p>
-                  </a:txBody>
-                  <a:tcPr>
-                    <a:solidFill>
-                      <a:srgbClr val="FFFFFF"/>
-                    </a:solidFill>
-                  </a:tcPr>
-                </a:tc>
-                <a:tc>
-                  <a:txBody>
-                    <a:bodyPr/>
-                    <a:lstStyle/>
-                    <a:p>
-                      <a:pPr algn="r"/>
-                      <a:r>
-                        <a:rPr sz="1300" b="1">
-                          <a:solidFill>
-                            <a:srgbClr val="C0392B"/>
-                          </a:solidFill>
-                          <a:latin typeface="Calibri"/>
-                        </a:rPr>
-                        <a:t>0.41</a:t>
-                      </a:r>
-                    </a:p>
-                  </a:txBody>
-                  <a:tcPr>
-                    <a:solidFill>
-                      <a:srgbClr val="FFFFFF"/>
-                    </a:solidFill>
-                  </a:tcPr>
-                </a:tc>
-                <a:tc>
-                  <a:txBody>
-                    <a:bodyPr/>
-                    <a:lstStyle/>
-                    <a:p>
-                      <a:pPr algn="r"/>
-                      <a:r>
-                        <a:rPr sz="1300" b="1">
-                          <a:solidFill>
-                            <a:srgbClr val="C0392B"/>
-                          </a:solidFill>
-                          <a:latin typeface="Calibri"/>
-                        </a:rPr>
-                        <a:t>0.17</a:t>
-                      </a:r>
-                    </a:p>
-                  </a:txBody>
-                  <a:tcPr>
-                    <a:solidFill>
-                      <a:srgbClr val="FFFFFF"/>
-                    </a:solidFill>
-                  </a:tcPr>
-                </a:tc>
-                <a:tc>
-                  <a:txBody>
-                    <a:bodyPr/>
-                    <a:lstStyle/>
-                    <a:p>
-                      <a:pPr algn="r"/>
-                      <a:r>
-                        <a:rPr sz="1300" b="1">
-                          <a:solidFill>
-                            <a:srgbClr val="C0392B"/>
-                          </a:solidFill>
-                          <a:latin typeface="Calibri"/>
-                        </a:rPr>
-                        <a:t>0.42</a:t>
-                      </a:r>
-                    </a:p>
-                  </a:txBody>
-                  <a:tcPr>
-                    <a:solidFill>
-                      <a:srgbClr val="FFFFFF"/>
-                    </a:solidFill>
-                  </a:tcPr>
-                </a:tc>
-                <a:tc>
-                  <a:txBody>
-                    <a:bodyPr/>
-                    <a:lstStyle/>
-                    <a:p>
-                      <a:pPr algn="r"/>
-                      <a:r>
-                        <a:rPr sz="1300" b="1">
-                          <a:solidFill>
-                            <a:srgbClr val="C0392B"/>
-                          </a:solidFill>
-                          <a:latin typeface="Calibri"/>
-                        </a:rPr>
-                        <a:t>0.723</a:t>
-                      </a:r>
-                    </a:p>
-                  </a:txBody>
-                  <a:tcPr>
-                    <a:solidFill>
-                      <a:srgbClr val="FFFFFF"/>
-                    </a:solidFill>
-                  </a:tcPr>
-                </a:tc>
-              </a:tr>
-            </a:tbl>
-          </a:graphicData>
-        </a:graphic>
-      </p:graphicFrame>
+        </p:nvPicPr>
+        <p:blipFill>
+          <a:blip r:embed="rId2"/>
+          <a:stretch>
+            <a:fillRect/>
+          </a:stretch>
+        </p:blipFill>
+        <p:spPr>
+          <a:xfrm>
+            <a:off x="685800" y="1828800"/>
+            <a:ext cx="5394960" cy="2180071"/>
+          </a:xfrm>
+          <a:prstGeom prst="rect">
+            <a:avLst/>
+          </a:prstGeom>
+        </p:spPr>
+      </p:pic>
+      <p:pic>
+        <p:nvPicPr>
+          <p:cNvPr id="4" name="Picture 3" descr="paper_fig5_featgen.png"/>
+          <p:cNvPicPr>
+            <a:picLocks noChangeAspect="1"/>
+          </p:cNvPicPr>
+          <p:nvPr/>
+        </p:nvPicPr>
+        <p:blipFill>
+          <a:blip r:embed="rId3"/>
+          <a:stretch>
+            <a:fillRect/>
+          </a:stretch>
+        </p:blipFill>
+        <p:spPr>
+          <a:xfrm>
+            <a:off x="6492240" y="1828800"/>
+            <a:ext cx="5029200" cy="2778034"/>
+          </a:xfrm>
+          <a:prstGeom prst="rect">
+            <a:avLst/>
+          </a:prstGeom>
+        </p:spPr>
+      </p:pic>
       <p:sp>
         <p:nvSpPr>
-          <p:cNvPr id="4" name="TextBox 3"/>
+          <p:cNvPr id="5" name="TextBox 4"/>
           <p:cNvSpPr txBox="1"/>
           <p:nvPr/>
         </p:nvSpPr>
         <p:spPr>
           <a:xfrm>
-            <a:off x="685800" y="3959352"/>
-            <a:ext cx="10820095" cy="914400"/>
+            <a:off x="685800" y="4297680"/>
+            <a:ext cx="5394960" cy="1828800"/>
           </a:xfrm>
           <a:prstGeom prst="rect">
             <a:avLst/>
@@ -9647,13 +10798,29 @@
           <a:p>
             <a:pPr algn="l"/>
             <a:r>
-              <a:rPr sz="1300" b="0" i="0">
+              <a:rPr sz="1500" b="0" i="0">
+                <a:solidFill>
+                  <a:srgbClr val="1A1A1A"/>
+                </a:solidFill>
+                <a:latin typeface="Calibri"/>
+              </a:rPr>
+              <a:t>最大池化與最近鄰上採樣把隱特徵拆成高頻與低頻，替換低頻的風格統計量後重組。</a:t>
+            </a:r>
+          </a:p>
+          <a:p>
+            <a:pPr>
+              <a:spcBef>
+                <a:spcPts val="1000"/>
+              </a:spcBef>
+            </a:pPr>
+            <a:r>
+              <a:rPr sz="1500" b="0" i="0">
                 <a:solidFill>
                   <a:srgbClr val="5A5A66"/>
                 </a:solidFill>
                 <a:latin typeface="Calibri"/>
               </a:rPr>
-              <a:t>四個 stage 的 Batch 1 CV 都在 0.97–0.98：問題不在擬合，在泛化。A1 與 A2 比基線還差，順序沒有重現論文。</a:t>
+              <a:t>右圖：橘色為生成特徵，覆蓋範圍遠大於原始特徵——這是他們宣稱能模擬未見漂移的依據。</a:t>
             </a:r>
           </a:p>
         </p:txBody>
@@ -9706,419 +10873,21 @@
                 </a:solidFill>
                 <a:latin typeface="Cambria"/>
               </a:rPr>
-              <a:t>第一個發現：A3 的增益不是對比學習</a:t>
-            </a:r>
-          </a:p>
-          <a:p>
-            <a:pPr>
-              <a:spcBef>
-                <a:spcPts val="600"/>
-              </a:spcBef>
-            </a:pPr>
-            <a:r>
-              <a:rPr sz="1500" b="0" i="1">
-                <a:solidFill>
-                  <a:srgbClr val="5A5A66"/>
-                </a:solidFill>
-                <a:latin typeface="Calibri"/>
-              </a:rPr>
-              <a:t>v6.3 一次給了 A3 四樣東西，把它們拆開量</a:t>
+              <a:t>文獻回顧：機制③ 監督式對比學習</a:t>
             </a:r>
           </a:p>
         </p:txBody>
       </p:sp>
-      <p:graphicFrame>
-        <p:nvGraphicFramePr>
-          <p:cNvPr id="3" name="Table 2"/>
-          <p:cNvGraphicFramePr>
-            <a:graphicFrameLocks noGrp="1"/>
-          </p:cNvGraphicFramePr>
-          <p:nvPr/>
-        </p:nvGraphicFramePr>
-        <p:xfrm>
-          <a:off x="685800" y="1783080"/>
-          <a:ext cx="10820093" cy="1920240"/>
-        </p:xfrm>
-        <a:graphic>
-          <a:graphicData uri="http://schemas.openxmlformats.org/drawingml/2006/table">
-            <a:tbl>
-              <a:tblPr firstRow="1" bandRow="1">
-                <a:tableStyleId>{5C22544A-7EE6-4342-B048-85BDC9FD1C3A}</a:tableStyleId>
-              </a:tblPr>
-              <a:tblGrid>
-                <a:gridCol w="5410047"/>
-                <a:gridCol w="2705023"/>
-                <a:gridCol w="2705023"/>
-              </a:tblGrid>
-              <a:tr h="384048">
-                <a:tc>
-                  <a:txBody>
-                    <a:bodyPr/>
-                    <a:lstStyle/>
-                    <a:p>
-                      <a:pPr algn="l"/>
-                      <a:r>
-                        <a:rPr sz="1300" b="1">
-                          <a:solidFill>
-                            <a:srgbClr val="FFFFFF"/>
-                          </a:solidFill>
-                          <a:latin typeface="Calibri"/>
-                        </a:rPr>
-                        <a:t>拆解出的成分</a:t>
-                      </a:r>
-                    </a:p>
-                  </a:txBody>
-                  <a:tcPr>
-                    <a:solidFill>
-                      <a:srgbClr val="1E2761"/>
-                    </a:solidFill>
-                  </a:tcPr>
-                </a:tc>
-                <a:tc>
-                  <a:txBody>
-                    <a:bodyPr/>
-                    <a:lstStyle/>
-                    <a:p>
-                      <a:pPr algn="r"/>
-                      <a:r>
-                        <a:rPr sz="1300" b="1">
-                          <a:solidFill>
-                            <a:srgbClr val="FFFFFF"/>
-                          </a:solidFill>
-                          <a:latin typeface="Calibri"/>
-                        </a:rPr>
-                        <a:t>效果</a:t>
-                      </a:r>
-                    </a:p>
-                  </a:txBody>
-                  <a:tcPr>
-                    <a:solidFill>
-                      <a:srgbClr val="1E2761"/>
-                    </a:solidFill>
-                  </a:tcPr>
-                </a:tc>
-                <a:tc>
-                  <a:txBody>
-                    <a:bodyPr/>
-                    <a:lstStyle/>
-                    <a:p>
-                      <a:pPr algn="r"/>
-                      <a:r>
-                        <a:rPr sz="1300" b="1">
-                          <a:solidFill>
-                            <a:srgbClr val="FFFFFF"/>
-                          </a:solidFill>
-                          <a:latin typeface="Calibri"/>
-                        </a:rPr>
-                        <a:t>改善的種子</a:t>
-                      </a:r>
-                    </a:p>
-                  </a:txBody>
-                  <a:tcPr>
-                    <a:solidFill>
-                      <a:srgbClr val="1E2761"/>
-                    </a:solidFill>
-                  </a:tcPr>
-                </a:tc>
-              </a:tr>
-              <a:tr h="384048">
-                <a:tc>
-                  <a:txBody>
-                    <a:bodyPr/>
-                    <a:lstStyle/>
-                    <a:p>
-                      <a:pPr algn="l"/>
-                      <a:r>
-                        <a:rPr sz="1300" b="1">
-                          <a:solidFill>
-                            <a:srgbClr val="C0392B"/>
-                          </a:solidFill>
-                          <a:latin typeface="Calibri"/>
-                        </a:rPr>
-                        <a:t>LayerNorm 取代 BatchNorm</a:t>
-                      </a:r>
-                    </a:p>
-                  </a:txBody>
-                  <a:tcPr>
-                    <a:solidFill>
-                      <a:srgbClr val="F2F5FC"/>
-                    </a:solidFill>
-                  </a:tcPr>
-                </a:tc>
-                <a:tc>
-                  <a:txBody>
-                    <a:bodyPr/>
-                    <a:lstStyle/>
-                    <a:p>
-                      <a:pPr algn="r"/>
-                      <a:r>
-                        <a:rPr sz="1300" b="1">
-                          <a:solidFill>
-                            <a:srgbClr val="C0392B"/>
-                          </a:solidFill>
-                          <a:latin typeface="Calibri"/>
-                        </a:rPr>
-                        <a:t>+0.0845</a:t>
-                      </a:r>
-                    </a:p>
-                  </a:txBody>
-                  <a:tcPr>
-                    <a:solidFill>
-                      <a:srgbClr val="F2F5FC"/>
-                    </a:solidFill>
-                  </a:tcPr>
-                </a:tc>
-                <a:tc>
-                  <a:txBody>
-                    <a:bodyPr/>
-                    <a:lstStyle/>
-                    <a:p>
-                      <a:pPr algn="r"/>
-                      <a:r>
-                        <a:rPr sz="1300" b="1">
-                          <a:solidFill>
-                            <a:srgbClr val="C0392B"/>
-                          </a:solidFill>
-                          <a:latin typeface="Calibri"/>
-                        </a:rPr>
-                        <a:t>5/5</a:t>
-                      </a:r>
-                    </a:p>
-                  </a:txBody>
-                  <a:tcPr>
-                    <a:solidFill>
-                      <a:srgbClr val="F2F5FC"/>
-                    </a:solidFill>
-                  </a:tcPr>
-                </a:tc>
-              </a:tr>
-              <a:tr h="384048">
-                <a:tc>
-                  <a:txBody>
-                    <a:bodyPr/>
-                    <a:lstStyle/>
-                    <a:p>
-                      <a:pPr algn="l"/>
-                      <a:r>
-                        <a:rPr sz="1300" b="0">
-                          <a:solidFill>
-                            <a:srgbClr val="1A1A1A"/>
-                          </a:solidFill>
-                          <a:latin typeface="Calibri"/>
-                        </a:rPr>
-                        <a:t>硬性界限 + 梯度裁剪</a:t>
-                      </a:r>
-                    </a:p>
-                  </a:txBody>
-                  <a:tcPr>
-                    <a:solidFill>
-                      <a:srgbClr val="FFFFFF"/>
-                    </a:solidFill>
-                  </a:tcPr>
-                </a:tc>
-                <a:tc>
-                  <a:txBody>
-                    <a:bodyPr/>
-                    <a:lstStyle/>
-                    <a:p>
-                      <a:pPr algn="r"/>
-                      <a:r>
-                        <a:rPr sz="1300" b="0">
-                          <a:solidFill>
-                            <a:srgbClr val="1A1A1A"/>
-                          </a:solidFill>
-                          <a:latin typeface="Calibri"/>
-                        </a:rPr>
-                        <a:t>−0.0022</a:t>
-                      </a:r>
-                    </a:p>
-                  </a:txBody>
-                  <a:tcPr>
-                    <a:solidFill>
-                      <a:srgbClr val="FFFFFF"/>
-                    </a:solidFill>
-                  </a:tcPr>
-                </a:tc>
-                <a:tc>
-                  <a:txBody>
-                    <a:bodyPr/>
-                    <a:lstStyle/>
-                    <a:p>
-                      <a:pPr algn="r"/>
-                      <a:r>
-                        <a:rPr sz="1300" b="0">
-                          <a:solidFill>
-                            <a:srgbClr val="1A1A1A"/>
-                          </a:solidFill>
-                          <a:latin typeface="Calibri"/>
-                        </a:rPr>
-                        <a:t>1/5</a:t>
-                      </a:r>
-                    </a:p>
-                  </a:txBody>
-                  <a:tcPr>
-                    <a:solidFill>
-                      <a:srgbClr val="FFFFFF"/>
-                    </a:solidFill>
-                  </a:tcPr>
-                </a:tc>
-              </a:tr>
-              <a:tr h="384048">
-                <a:tc>
-                  <a:txBody>
-                    <a:bodyPr/>
-                    <a:lstStyle/>
-                    <a:p>
-                      <a:pPr algn="l"/>
-                      <a:r>
-                        <a:rPr sz="1300" b="0">
-                          <a:solidFill>
-                            <a:srgbClr val="1A1A1A"/>
-                          </a:solidFill>
-                          <a:latin typeface="Calibri"/>
-                        </a:rPr>
-                        <a:t>增強 + 特徵生成</a:t>
-                      </a:r>
-                    </a:p>
-                  </a:txBody>
-                  <a:tcPr>
-                    <a:solidFill>
-                      <a:srgbClr val="F2F5FC"/>
-                    </a:solidFill>
-                  </a:tcPr>
-                </a:tc>
-                <a:tc>
-                  <a:txBody>
-                    <a:bodyPr/>
-                    <a:lstStyle/>
-                    <a:p>
-                      <a:pPr algn="r"/>
-                      <a:r>
-                        <a:rPr sz="1300" b="0">
-                          <a:solidFill>
-                            <a:srgbClr val="1A1A1A"/>
-                          </a:solidFill>
-                          <a:latin typeface="Calibri"/>
-                        </a:rPr>
-                        <a:t>−0.0328</a:t>
-                      </a:r>
-                    </a:p>
-                  </a:txBody>
-                  <a:tcPr>
-                    <a:solidFill>
-                      <a:srgbClr val="F2F5FC"/>
-                    </a:solidFill>
-                  </a:tcPr>
-                </a:tc>
-                <a:tc>
-                  <a:txBody>
-                    <a:bodyPr/>
-                    <a:lstStyle/>
-                    <a:p>
-                      <a:pPr algn="r"/>
-                      <a:r>
-                        <a:rPr sz="1300" b="0">
-                          <a:solidFill>
-                            <a:srgbClr val="1A1A1A"/>
-                          </a:solidFill>
-                          <a:latin typeface="Calibri"/>
-                        </a:rPr>
-                        <a:t>0/5</a:t>
-                      </a:r>
-                    </a:p>
-                  </a:txBody>
-                  <a:tcPr>
-                    <a:solidFill>
-                      <a:srgbClr val="F2F5FC"/>
-                    </a:solidFill>
-                  </a:tcPr>
-                </a:tc>
-              </a:tr>
-              <a:tr h="384048">
-                <a:tc>
-                  <a:txBody>
-                    <a:bodyPr/>
-                    <a:lstStyle/>
-                    <a:p>
-                      <a:pPr algn="l"/>
-                      <a:r>
-                        <a:rPr sz="1300" b="0">
-                          <a:solidFill>
-                            <a:srgbClr val="1A1A1A"/>
-                          </a:solidFill>
-                          <a:latin typeface="Calibri"/>
-                        </a:rPr>
-                        <a:t>對比損失</a:t>
-                      </a:r>
-                    </a:p>
-                  </a:txBody>
-                  <a:tcPr>
-                    <a:solidFill>
-                      <a:srgbClr val="FFFFFF"/>
-                    </a:solidFill>
-                  </a:tcPr>
-                </a:tc>
-                <a:tc>
-                  <a:txBody>
-                    <a:bodyPr/>
-                    <a:lstStyle/>
-                    <a:p>
-                      <a:pPr algn="r"/>
-                      <a:r>
-                        <a:rPr sz="1300" b="0">
-                          <a:solidFill>
-                            <a:srgbClr val="1A1A1A"/>
-                          </a:solidFill>
-                          <a:latin typeface="Calibri"/>
-                        </a:rPr>
-                        <a:t>+0.0029</a:t>
-                      </a:r>
-                    </a:p>
-                  </a:txBody>
-                  <a:tcPr>
-                    <a:solidFill>
-                      <a:srgbClr val="FFFFFF"/>
-                    </a:solidFill>
-                  </a:tcPr>
-                </a:tc>
-                <a:tc>
-                  <a:txBody>
-                    <a:bodyPr/>
-                    <a:lstStyle/>
-                    <a:p>
-                      <a:pPr algn="r"/>
-                      <a:r>
-                        <a:rPr sz="1300" b="0">
-                          <a:solidFill>
-                            <a:srgbClr val="1A1A1A"/>
-                          </a:solidFill>
-                          <a:latin typeface="Calibri"/>
-                        </a:rPr>
-                        <a:t>4/5</a:t>
-                      </a:r>
-                    </a:p>
-                  </a:txBody>
-                  <a:tcPr>
-                    <a:solidFill>
-                      <a:srgbClr val="FFFFFF"/>
-                    </a:solidFill>
-                  </a:tcPr>
-                </a:tc>
-              </a:tr>
-            </a:tbl>
-          </a:graphicData>
-        </a:graphic>
-      </p:graphicFrame>
       <p:sp>
         <p:nvSpPr>
-          <p:cNvPr id="4" name="TextBox 3"/>
+          <p:cNvPr id="3" name="TextBox 2"/>
           <p:cNvSpPr txBox="1"/>
           <p:nvPr/>
         </p:nvSpPr>
         <p:spPr>
           <a:xfrm>
-            <a:off x="685800" y="3959352"/>
-            <a:ext cx="10820095" cy="914400"/>
+            <a:off x="685800" y="1737360"/>
+            <a:ext cx="10820095" cy="4480560"/>
           </a:xfrm>
           <a:prstGeom prst="rect">
             <a:avLst/>
@@ -10131,15 +10900,151 @@
           </a:bodyPr>
           <a:lstStyle/>
           <a:p>
-            <a:pPr algn="l"/>
-            <a:r>
-              <a:rPr sz="1300" b="0" i="0">
+            <a:pPr algn="l">
+              <a:spcAft>
+                <a:spcPts val="1200"/>
+              </a:spcAft>
+            </a:pPr>
+            <a:r>
+              <a:rPr sz="1900" b="1" i="0">
+                <a:solidFill>
+                  <a:srgbClr val="1E2761"/>
+                </a:solidFill>
+                <a:latin typeface="Cambria"/>
+              </a:rPr>
+              <a:t>聯合損失</a:t>
+            </a:r>
+          </a:p>
+          <a:p>
+            <a:pPr>
+              <a:spcAft>
+                <a:spcPts val="1200"/>
+              </a:spcAft>
+            </a:pPr>
+            <a:r>
+              <a:rPr sz="1700" b="0" i="0">
+                <a:solidFill>
+                  <a:srgbClr val="CADCFC"/>
+                </a:solidFill>
+                <a:latin typeface="Calibri"/>
+              </a:rPr>
+              <a:t>· </a:t>
+            </a:r>
+            <a:r>
+              <a:rPr sz="1700" b="0" i="0">
+                <a:solidFill>
+                  <a:srgbClr val="1A1A1A"/>
+                </a:solidFill>
+                <a:latin typeface="Calibri"/>
+              </a:rPr>
+              <a:t>L = L_ce + λ_MSE · L_MSE + λ_con · L_con</a:t>
+            </a:r>
+          </a:p>
+          <a:p>
+            <a:pPr>
+              <a:spcAft>
+                <a:spcPts val="1200"/>
+              </a:spcAft>
+            </a:pPr>
+            <a:r>
+              <a:rPr sz="1700" b="0" i="0">
+                <a:solidFill>
+                  <a:srgbClr val="CADCFC"/>
+                </a:solidFill>
+                <a:latin typeface="Calibri"/>
+              </a:rPr>
+              <a:t>· </a:t>
+            </a:r>
+            <a:r>
+              <a:rPr sz="1700" b="0" i="0">
+                <a:solidFill>
+                  <a:srgbClr val="1A1A1A"/>
+                </a:solidFill>
+                <a:latin typeface="Calibri"/>
+              </a:rPr>
+              <a:t>L_ce 維持分類能力；L_MSE 確保風格轉換前後標籤一致；L_con 整理特徵空間</a:t>
+            </a:r>
+          </a:p>
+          <a:p>
+            <a:pPr>
+              <a:spcAft>
+                <a:spcPts val="1200"/>
+              </a:spcAft>
+            </a:pPr>
+            <a:r>
+              <a:rPr sz="1900" b="1" i="0">
+                <a:solidFill>
+                  <a:srgbClr val="1E2761"/>
+                </a:solidFill>
+                <a:latin typeface="Cambria"/>
+              </a:rPr>
+              <a:t>論文的消融（CDWC = 移除對比學習）</a:t>
+            </a:r>
+          </a:p>
+          <a:p>
+            <a:pPr>
+              <a:spcAft>
+                <a:spcPts val="1200"/>
+              </a:spcAft>
+            </a:pPr>
+            <a:r>
+              <a:rPr sz="1700" b="1" i="0">
+                <a:solidFill>
+                  <a:srgbClr val="C0392B"/>
+                </a:solidFill>
+                <a:latin typeface="Calibri"/>
+              </a:rPr>
+              <a:t>▍ </a:t>
+            </a:r>
+            <a:r>
+              <a:rPr sz="1700" b="1" i="0">
+                <a:solidFill>
+                  <a:srgbClr val="1A1A1A"/>
+                </a:solidFill>
+                <a:latin typeface="Calibri"/>
+              </a:rPr>
+              <a:t>0.6705 → 0.7230，對比學習貢獻 +5.25%</a:t>
+            </a:r>
+          </a:p>
+          <a:p>
+            <a:pPr>
+              <a:spcAft>
+                <a:spcPts val="1200"/>
+              </a:spcAft>
+            </a:pPr>
+            <a:r>
+              <a:rPr sz="1700" b="0" i="0">
+                <a:solidFill>
+                  <a:srgbClr val="CADCFC"/>
+                </a:solidFill>
+                <a:latin typeface="Calibri"/>
+              </a:rPr>
+              <a:t>· </a:t>
+            </a:r>
+            <a:r>
+              <a:rPr sz="1700" b="0" i="0">
+                <a:solidFill>
+                  <a:srgbClr val="1A1A1A"/>
+                </a:solidFill>
+                <a:latin typeface="Calibri"/>
+              </a:rPr>
+              <a:t>其中最大的單類改善是 Toluene：0.27 → 0.92</a:t>
+            </a:r>
+          </a:p>
+          <a:p>
+            <a:pPr lvl="1">
+              <a:spcAft>
+                <a:spcPts val="1200"/>
+              </a:spcAft>
+            </a:pPr>
+            <a:r>
+              <a:rPr sz="1400" b="0" i="0">
                 <a:solidFill>
                   <a:srgbClr val="5A5A66"/>
                 </a:solidFill>
                 <a:latin typeface="Calibri"/>
               </a:rPr>
-              <a:t>BatchNorm 把 Batch 1 的統計量套到漂移資料上；LayerNorm 逐樣本正規化。增益最大的正是漂移最嚴重的批次。</a:t>
+              <a:t>論文未提供 τ、λ_con 與投影維度的數值</a:t>
             </a:r>
           </a:p>
         </p:txBody>
@@ -10192,21 +11097,61 @@
                 </a:solidFill>
                 <a:latin typeface="Cambria"/>
               </a:rPr>
-              <a:t>對照論文後的轉折</a:t>
+              <a:t>文獻回顧：論文的方法比較</a:t>
+            </a:r>
+          </a:p>
+          <a:p>
+            <a:pPr>
+              <a:spcBef>
+                <a:spcPts val="600"/>
+              </a:spcBef>
+            </a:pPr>
+            <a:r>
+              <a:rPr sz="1500" b="0" i="1">
+                <a:solidFill>
+                  <a:srgbClr val="5A5A66"/>
+                </a:solidFill>
+                <a:latin typeface="Calibri"/>
+              </a:rPr>
+              <a:t>論文 Fig. 6</a:t>
             </a:r>
           </a:p>
         </p:txBody>
       </p:sp>
+      <p:pic>
+        <p:nvPicPr>
+          <p:cNvPr id="3" name="Picture 2" descr="paper_fig6_comparison.png"/>
+          <p:cNvPicPr>
+            <a:picLocks noChangeAspect="1"/>
+          </p:cNvPicPr>
+          <p:nvPr/>
+        </p:nvPicPr>
+        <p:blipFill>
+          <a:blip r:embed="rId2"/>
+          <a:stretch>
+            <a:fillRect/>
+          </a:stretch>
+        </p:blipFill>
+        <p:spPr>
+          <a:xfrm>
+            <a:off x="685800" y="1828800"/>
+            <a:ext cx="5053263" cy="4480560"/>
+          </a:xfrm>
+          <a:prstGeom prst="rect">
+            <a:avLst/>
+          </a:prstGeom>
+        </p:spPr>
+      </p:pic>
       <p:sp>
         <p:nvSpPr>
-          <p:cNvPr id="3" name="TextBox 2"/>
+          <p:cNvPr id="4" name="TextBox 3"/>
           <p:cNvSpPr txBox="1"/>
           <p:nvPr/>
         </p:nvSpPr>
         <p:spPr>
           <a:xfrm>
-            <a:off x="685800" y="1737360"/>
-            <a:ext cx="10820095" cy="4480560"/>
+            <a:off x="6104823" y="1874519"/>
+            <a:ext cx="5401072" cy="4343401"/>
           </a:xfrm>
           <a:prstGeom prst="rect">
             <a:avLst/>
@@ -10225,7 +11170,7 @@
               </a:spcAft>
             </a:pPr>
             <a:r>
-              <a:rPr sz="1700" b="1" i="0">
+              <a:rPr sz="1500" b="1" i="0">
                 <a:solidFill>
                   <a:srgbClr val="C0392B"/>
                 </a:solidFill>
@@ -10234,13 +11179,13 @@
               <a:t>▍ </a:t>
             </a:r>
             <a:r>
-              <a:rPr sz="1700" b="1" i="0">
+              <a:rPr sz="1500" b="1" i="0">
                 <a:solidFill>
                   <a:srgbClr val="1A1A1A"/>
                 </a:solidFill>
                 <a:latin typeface="Calibri"/>
               </a:rPr>
-              <a:t>論文的純 ResNet 基線 0.6344，贏過我們當時所有 stage（最高 0.4922）</a:t>
+              <a:t>CDCNN 0.7230，所有比較方法中最高</a:t>
             </a:r>
           </a:p>
           <a:p>
@@ -10250,7 +11195,7 @@
               </a:spcAft>
             </a:pPr>
             <a:r>
-              <a:rPr sz="1700" b="0" i="0">
+              <a:rPr sz="1500" b="0" i="0">
                 <a:solidFill>
                   <a:srgbClr val="CADCFC"/>
                 </a:solidFill>
@@ -10259,13 +11204,13 @@
               <a:t>· </a:t>
             </a:r>
             <a:r>
-              <a:rPr sz="1700" b="0" i="0">
+              <a:rPr sz="1500" b="0" i="0">
                 <a:solidFill>
                   <a:srgbClr val="1A1A1A"/>
                 </a:solidFill>
                 <a:latin typeface="Calibri"/>
               </a:rPr>
-              <a:t>差距在 CDCNN 三個元件「之外」——不是方法不夠，是上游有問題</a:t>
+              <a:t>TDACNN 0.7221 次之，但需 54 K 參數與集成</a:t>
             </a:r>
           </a:p>
           <a:p>
@@ -10275,13 +11220,22 @@
               </a:spcAft>
             </a:pPr>
             <a:r>
-              <a:rPr sz="1900" b="1" i="0">
-                <a:solidFill>
-                  <a:srgbClr val="1E2761"/>
-                </a:solidFill>
-                <a:latin typeface="Cambria"/>
-              </a:rPr>
-              <a:t>讀完全文與補充資料後找到三個未聲明的差異：</a:t>
+              <a:rPr sz="1500" b="0" i="0">
+                <a:solidFill>
+                  <a:srgbClr val="CADCFC"/>
+                </a:solidFill>
+                <a:latin typeface="Calibri"/>
+              </a:rPr>
+              <a:t>· </a:t>
+            </a:r>
+            <a:r>
+              <a:rPr sz="1500" b="0" i="0">
+                <a:solidFill>
+                  <a:srgbClr val="1A1A1A"/>
+                </a:solidFill>
+                <a:latin typeface="Calibri"/>
+              </a:rPr>
+              <a:t>CDWC（移除對比學習）0.6705</a:t>
             </a:r>
           </a:p>
           <a:p>
@@ -10291,7 +11245,7 @@
               </a:spcAft>
             </a:pPr>
             <a:r>
-              <a:rPr sz="1700" b="0" i="0">
+              <a:rPr sz="1500" b="0" i="0">
                 <a:solidFill>
                   <a:srgbClr val="CADCFC"/>
                 </a:solidFill>
@@ -10300,63 +11254,29 @@
               <a:t>· </a:t>
             </a:r>
             <a:r>
-              <a:rPr sz="1700" b="0" i="0">
+              <a:rPr sz="1500" b="0" i="0">
                 <a:solidFill>
                   <a:srgbClr val="1A1A1A"/>
                 </a:solidFill>
                 <a:latin typeface="Calibri"/>
               </a:rPr>
-              <a:t>對比損失應接在 FC128 之前、且沒有可學的投影 head</a:t>
-            </a:r>
-          </a:p>
-          <a:p>
-            <a:pPr>
+              <a:t>ResNet 骨幹 0.6344</a:t>
+            </a:r>
+          </a:p>
+          <a:p>
+            <a:pPr lvl="1">
               <a:spcAft>
                 <a:spcPts val="1200"/>
               </a:spcAft>
             </a:pPr>
             <a:r>
-              <a:rPr sz="1700" b="0" i="0">
-                <a:solidFill>
-                  <a:srgbClr val="CADCFC"/>
-                </a:solidFill>
-                <a:latin typeface="Calibri"/>
-              </a:rPr>
-              <a:t>· </a:t>
-            </a:r>
-            <a:r>
-              <a:rPr sz="1700" b="0" i="0">
-                <a:solidFill>
-                  <a:srgbClr val="1A1A1A"/>
-                </a:solidFill>
-                <a:latin typeface="Calibri"/>
-              </a:rPr>
-              <a:t>Eq. (16) 除以的是變異數而非標準差；Block 5 內層為 512 寬</a:t>
-            </a:r>
-          </a:p>
-          <a:p>
-            <a:pPr>
-              <a:spcAft>
-                <a:spcPts val="1200"/>
-              </a:spcAft>
-            </a:pPr>
-            <a:r>
-              <a:rPr sz="1700" b="0" i="0">
-                <a:solidFill>
-                  <a:srgbClr val="CADCFC"/>
-                </a:solidFill>
-                <a:latin typeface="Calibri"/>
-              </a:rPr>
-              <a:t>· </a:t>
-            </a:r>
-            <a:r>
-              <a:rPr sz="1700" b="0" i="0">
-                <a:solidFill>
-                  <a:srgbClr val="1A1A1A"/>
-                </a:solidFill>
-                <a:latin typeface="Calibri"/>
-              </a:rPr>
-              <a:t>論文本身亦有矛盾處：統計量維度前後不一致、Table 2 有兩處計數錯誤</a:t>
+              <a:rPr sz="1200" b="0" i="0">
+                <a:solidFill>
+                  <a:srgbClr val="5A5A66"/>
+                </a:solidFill>
+                <a:latin typeface="Calibri"/>
+              </a:rPr>
+              <a:t>多數深度網路（VGG、GoogLeNet）在此資料集低於 0.25</a:t>
             </a:r>
           </a:p>
         </p:txBody>
@@ -10409,57 +11329,622 @@
                 </a:solidFill>
                 <a:latin typeface="Cambria"/>
               </a:rPr>
-              <a:t>突破：逐樣本輸入正規化</a:t>
+              <a:t>文獻回顧：論文宣稱的表現</a:t>
+            </a:r>
+          </a:p>
+          <a:p>
+            <a:pPr>
+              <a:spcBef>
+                <a:spcPts val="600"/>
+              </a:spcBef>
+            </a:pPr>
+            <a:r>
+              <a:rPr sz="1500" b="0" i="1">
+                <a:solidFill>
+                  <a:srgbClr val="5A5A66"/>
+                </a:solidFill>
+                <a:latin typeface="Calibri"/>
+              </a:rPr>
+              <a:t>Batch 1 訓練、Batch 2–10 測試</a:t>
             </a:r>
           </a:p>
         </p:txBody>
       </p:sp>
-      <p:sp>
-        <p:nvSpPr>
-          <p:cNvPr id="3" name="Rounded Rectangle 2"/>
-          <p:cNvSpPr/>
+      <p:graphicFrame>
+        <p:nvGraphicFramePr>
+          <p:cNvPr id="3" name="Table 2"/>
+          <p:cNvGraphicFramePr>
+            <a:graphicFrameLocks noGrp="1"/>
+          </p:cNvGraphicFramePr>
           <p:nvPr/>
-        </p:nvSpPr>
-        <p:spPr>
-          <a:xfrm>
-            <a:off x="685800" y="1783080"/>
-            <a:ext cx="2464993" cy="1600200"/>
-          </a:xfrm>
-          <a:prstGeom prst="roundRect">
-            <a:avLst/>
-          </a:prstGeom>
-          <a:solidFill>
-            <a:srgbClr val="F2F5FC"/>
-          </a:solidFill>
-          <a:ln>
-            <a:solidFill>
-              <a:srgbClr val="CADCFC"/>
-            </a:solidFill>
-          </a:ln>
-          <a:effectLst/>
-        </p:spPr>
-        <p:style>
-          <a:lnRef idx="1">
-            <a:schemeClr val="accent1"/>
-          </a:lnRef>
-          <a:fillRef idx="3">
-            <a:schemeClr val="accent1"/>
-          </a:fillRef>
-          <a:effectRef idx="2">
-            <a:schemeClr val="accent1"/>
-          </a:effectRef>
-          <a:fontRef idx="minor">
-            <a:schemeClr val="lt1"/>
-          </a:fontRef>
-        </p:style>
-        <p:txBody>
-          <a:bodyPr rtlCol="0" anchor="ctr"/>
-          <a:lstStyle/>
-          <a:p>
-            <a:pPr algn="ctr"/>
-          </a:p>
-        </p:txBody>
-      </p:sp>
+        </p:nvGraphicFramePr>
+        <p:xfrm>
+          <a:off x="685800" y="1783080"/>
+          <a:ext cx="10820093" cy="3072384"/>
+        </p:xfrm>
+        <a:graphic>
+          <a:graphicData uri="http://schemas.openxmlformats.org/drawingml/2006/table">
+            <a:tbl>
+              <a:tblPr firstRow="1" bandRow="1">
+                <a:tableStyleId>{5C22544A-7EE6-4342-B048-85BDC9FD1C3A}</a:tableStyleId>
+              </a:tblPr>
+              <a:tblGrid>
+                <a:gridCol w="4544439"/>
+                <a:gridCol w="2380420"/>
+                <a:gridCol w="3895234"/>
+              </a:tblGrid>
+              <a:tr h="384048">
+                <a:tc>
+                  <a:txBody>
+                    <a:bodyPr/>
+                    <a:lstStyle/>
+                    <a:p>
+                      <a:pPr algn="l"/>
+                      <a:r>
+                        <a:rPr sz="1300" b="1">
+                          <a:solidFill>
+                            <a:srgbClr val="FFFFFF"/>
+                          </a:solidFill>
+                          <a:latin typeface="Calibri"/>
+                        </a:rPr>
+                        <a:t>方法</a:t>
+                      </a:r>
+                    </a:p>
+                  </a:txBody>
+                  <a:tcPr>
+                    <a:solidFill>
+                      <a:srgbClr val="1E2761"/>
+                    </a:solidFill>
+                  </a:tcPr>
+                </a:tc>
+                <a:tc>
+                  <a:txBody>
+                    <a:bodyPr/>
+                    <a:lstStyle/>
+                    <a:p>
+                      <a:pPr algn="r"/>
+                      <a:r>
+                        <a:rPr sz="1300" b="1">
+                          <a:solidFill>
+                            <a:srgbClr val="FFFFFF"/>
+                          </a:solidFill>
+                          <a:latin typeface="Calibri"/>
+                        </a:rPr>
+                        <a:t>平均準確率</a:t>
+                      </a:r>
+                    </a:p>
+                  </a:txBody>
+                  <a:tcPr>
+                    <a:solidFill>
+                      <a:srgbClr val="1E2761"/>
+                    </a:solidFill>
+                  </a:tcPr>
+                </a:tc>
+                <a:tc>
+                  <a:txBody>
+                    <a:bodyPr/>
+                    <a:lstStyle/>
+                    <a:p>
+                      <a:pPr algn="r"/>
+                      <a:r>
+                        <a:rPr sz="1300" b="1">
+                          <a:solidFill>
+                            <a:srgbClr val="FFFFFF"/>
+                          </a:solidFill>
+                          <a:latin typeface="Calibri"/>
+                        </a:rPr>
+                        <a:t>備註</a:t>
+                      </a:r>
+                    </a:p>
+                  </a:txBody>
+                  <a:tcPr>
+                    <a:solidFill>
+                      <a:srgbClr val="1E2761"/>
+                    </a:solidFill>
+                  </a:tcPr>
+                </a:tc>
+              </a:tr>
+              <a:tr h="384048">
+                <a:tc>
+                  <a:txBody>
+                    <a:bodyPr/>
+                    <a:lstStyle/>
+                    <a:p>
+                      <a:pPr algn="l"/>
+                      <a:r>
+                        <a:rPr sz="1300" b="1">
+                          <a:solidFill>
+                            <a:srgbClr val="C0392B"/>
+                          </a:solidFill>
+                          <a:latin typeface="Calibri"/>
+                        </a:rPr>
+                        <a:t>CDCNN（本論文）</a:t>
+                      </a:r>
+                    </a:p>
+                  </a:txBody>
+                  <a:tcPr>
+                    <a:solidFill>
+                      <a:srgbClr val="F2F5FC"/>
+                    </a:solidFill>
+                  </a:tcPr>
+                </a:tc>
+                <a:tc>
+                  <a:txBody>
+                    <a:bodyPr/>
+                    <a:lstStyle/>
+                    <a:p>
+                      <a:pPr algn="r"/>
+                      <a:r>
+                        <a:rPr sz="1300" b="1">
+                          <a:solidFill>
+                            <a:srgbClr val="C0392B"/>
+                          </a:solidFill>
+                          <a:latin typeface="Calibri"/>
+                        </a:rPr>
+                        <a:t>0.7230</a:t>
+                      </a:r>
+                    </a:p>
+                  </a:txBody>
+                  <a:tcPr>
+                    <a:solidFill>
+                      <a:srgbClr val="F2F5FC"/>
+                    </a:solidFill>
+                  </a:tcPr>
+                </a:tc>
+                <a:tc>
+                  <a:txBody>
+                    <a:bodyPr/>
+                    <a:lstStyle/>
+                    <a:p>
+                      <a:pPr algn="r"/>
+                      <a:r>
+                        <a:rPr sz="1300" b="1">
+                          <a:solidFill>
+                            <a:srgbClr val="C0392B"/>
+                          </a:solidFill>
+                          <a:latin typeface="Calibri"/>
+                        </a:rPr>
+                        <a:t>Target-free，0.77 K 參數</a:t>
+                      </a:r>
+                    </a:p>
+                  </a:txBody>
+                  <a:tcPr>
+                    <a:solidFill>
+                      <a:srgbClr val="F2F5FC"/>
+                    </a:solidFill>
+                  </a:tcPr>
+                </a:tc>
+              </a:tr>
+              <a:tr h="384048">
+                <a:tc>
+                  <a:txBody>
+                    <a:bodyPr/>
+                    <a:lstStyle/>
+                    <a:p>
+                      <a:pPr algn="l"/>
+                      <a:r>
+                        <a:rPr sz="1300" b="0">
+                          <a:solidFill>
+                            <a:srgbClr val="1A1A1A"/>
+                          </a:solidFill>
+                          <a:latin typeface="Calibri"/>
+                        </a:rPr>
+                        <a:t>TDACNN</a:t>
+                      </a:r>
+                    </a:p>
+                  </a:txBody>
+                  <a:tcPr>
+                    <a:solidFill>
+                      <a:srgbClr val="FFFFFF"/>
+                    </a:solidFill>
+                  </a:tcPr>
+                </a:tc>
+                <a:tc>
+                  <a:txBody>
+                    <a:bodyPr/>
+                    <a:lstStyle/>
+                    <a:p>
+                      <a:pPr algn="r"/>
+                      <a:r>
+                        <a:rPr sz="1300" b="0">
+                          <a:solidFill>
+                            <a:srgbClr val="1A1A1A"/>
+                          </a:solidFill>
+                          <a:latin typeface="Calibri"/>
+                        </a:rPr>
+                        <a:t>0.7221</a:t>
+                      </a:r>
+                    </a:p>
+                  </a:txBody>
+                  <a:tcPr>
+                    <a:solidFill>
+                      <a:srgbClr val="FFFFFF"/>
+                    </a:solidFill>
+                  </a:tcPr>
+                </a:tc>
+                <a:tc>
+                  <a:txBody>
+                    <a:bodyPr/>
+                    <a:lstStyle/>
+                    <a:p>
+                      <a:pPr algn="r"/>
+                      <a:r>
+                        <a:rPr sz="1300" b="0">
+                          <a:solidFill>
+                            <a:srgbClr val="1A1A1A"/>
+                          </a:solidFill>
+                          <a:latin typeface="Calibri"/>
+                        </a:rPr>
+                        <a:t>集成 4 分類器，54 K 參數</a:t>
+                      </a:r>
+                    </a:p>
+                  </a:txBody>
+                  <a:tcPr>
+                    <a:solidFill>
+                      <a:srgbClr val="FFFFFF"/>
+                    </a:solidFill>
+                  </a:tcPr>
+                </a:tc>
+              </a:tr>
+              <a:tr h="384048">
+                <a:tc>
+                  <a:txBody>
+                    <a:bodyPr/>
+                    <a:lstStyle/>
+                    <a:p>
+                      <a:pPr algn="l"/>
+                      <a:r>
+                        <a:rPr sz="1300" b="0">
+                          <a:solidFill>
+                            <a:srgbClr val="1A1A1A"/>
+                          </a:solidFill>
+                          <a:latin typeface="Calibri"/>
+                        </a:rPr>
+                        <a:t>PCA-SVM</a:t>
+                      </a:r>
+                    </a:p>
+                  </a:txBody>
+                  <a:tcPr>
+                    <a:solidFill>
+                      <a:srgbClr val="F2F5FC"/>
+                    </a:solidFill>
+                  </a:tcPr>
+                </a:tc>
+                <a:tc>
+                  <a:txBody>
+                    <a:bodyPr/>
+                    <a:lstStyle/>
+                    <a:p>
+                      <a:pPr algn="r"/>
+                      <a:r>
+                        <a:rPr sz="1300" b="0">
+                          <a:solidFill>
+                            <a:srgbClr val="1A1A1A"/>
+                          </a:solidFill>
+                          <a:latin typeface="Calibri"/>
+                        </a:rPr>
+                        <a:t>0.6860</a:t>
+                      </a:r>
+                    </a:p>
+                  </a:txBody>
+                  <a:tcPr>
+                    <a:solidFill>
+                      <a:srgbClr val="F2F5FC"/>
+                    </a:solidFill>
+                  </a:tcPr>
+                </a:tc>
+                <a:tc>
+                  <a:txBody>
+                    <a:bodyPr/>
+                    <a:lstStyle/>
+                    <a:p>
+                      <a:pPr algn="r"/>
+                      <a:r>
+                        <a:rPr sz="1300" b="0">
+                          <a:solidFill>
+                            <a:srgbClr val="1A1A1A"/>
+                          </a:solidFill>
+                          <a:latin typeface="Calibri"/>
+                        </a:rPr>
+                        <a:t> </a:t>
+                      </a:r>
+                    </a:p>
+                  </a:txBody>
+                  <a:tcPr>
+                    <a:solidFill>
+                      <a:srgbClr val="F2F5FC"/>
+                    </a:solidFill>
+                  </a:tcPr>
+                </a:tc>
+              </a:tr>
+              <a:tr h="384048">
+                <a:tc>
+                  <a:txBody>
+                    <a:bodyPr/>
+                    <a:lstStyle/>
+                    <a:p>
+                      <a:pPr algn="l"/>
+                      <a:r>
+                        <a:rPr sz="1300" b="0">
+                          <a:solidFill>
+                            <a:srgbClr val="1A1A1A"/>
+                          </a:solidFill>
+                          <a:latin typeface="Calibri"/>
+                        </a:rPr>
+                        <a:t>DBNs</a:t>
+                      </a:r>
+                    </a:p>
+                  </a:txBody>
+                  <a:tcPr>
+                    <a:solidFill>
+                      <a:srgbClr val="FFFFFF"/>
+                    </a:solidFill>
+                  </a:tcPr>
+                </a:tc>
+                <a:tc>
+                  <a:txBody>
+                    <a:bodyPr/>
+                    <a:lstStyle/>
+                    <a:p>
+                      <a:pPr algn="r"/>
+                      <a:r>
+                        <a:rPr sz="1300" b="0">
+                          <a:solidFill>
+                            <a:srgbClr val="1A1A1A"/>
+                          </a:solidFill>
+                          <a:latin typeface="Calibri"/>
+                        </a:rPr>
+                        <a:t>0.6665</a:t>
+                      </a:r>
+                    </a:p>
+                  </a:txBody>
+                  <a:tcPr>
+                    <a:solidFill>
+                      <a:srgbClr val="FFFFFF"/>
+                    </a:solidFill>
+                  </a:tcPr>
+                </a:tc>
+                <a:tc>
+                  <a:txBody>
+                    <a:bodyPr/>
+                    <a:lstStyle/>
+                    <a:p>
+                      <a:pPr algn="r"/>
+                      <a:r>
+                        <a:rPr sz="1300" b="0">
+                          <a:solidFill>
+                            <a:srgbClr val="1A1A1A"/>
+                          </a:solidFill>
+                          <a:latin typeface="Calibri"/>
+                        </a:rPr>
+                        <a:t> </a:t>
+                      </a:r>
+                    </a:p>
+                  </a:txBody>
+                  <a:tcPr>
+                    <a:solidFill>
+                      <a:srgbClr val="FFFFFF"/>
+                    </a:solidFill>
+                  </a:tcPr>
+                </a:tc>
+              </a:tr>
+              <a:tr h="384048">
+                <a:tc>
+                  <a:txBody>
+                    <a:bodyPr/>
+                    <a:lstStyle/>
+                    <a:p>
+                      <a:pPr algn="l"/>
+                      <a:r>
+                        <a:rPr sz="1300" b="0">
+                          <a:solidFill>
+                            <a:srgbClr val="1A1A1A"/>
+                          </a:solidFill>
+                          <a:latin typeface="Calibri"/>
+                        </a:rPr>
+                        <a:t>SVM-GFK</a:t>
+                      </a:r>
+                    </a:p>
+                  </a:txBody>
+                  <a:tcPr>
+                    <a:solidFill>
+                      <a:srgbClr val="F2F5FC"/>
+                    </a:solidFill>
+                  </a:tcPr>
+                </a:tc>
+                <a:tc>
+                  <a:txBody>
+                    <a:bodyPr/>
+                    <a:lstStyle/>
+                    <a:p>
+                      <a:pPr algn="r"/>
+                      <a:r>
+                        <a:rPr sz="1300" b="0">
+                          <a:solidFill>
+                            <a:srgbClr val="1A1A1A"/>
+                          </a:solidFill>
+                          <a:latin typeface="Calibri"/>
+                        </a:rPr>
+                        <a:t>0.6400</a:t>
+                      </a:r>
+                    </a:p>
+                  </a:txBody>
+                  <a:tcPr>
+                    <a:solidFill>
+                      <a:srgbClr val="F2F5FC"/>
+                    </a:solidFill>
+                  </a:tcPr>
+                </a:tc>
+                <a:tc>
+                  <a:txBody>
+                    <a:bodyPr/>
+                    <a:lstStyle/>
+                    <a:p>
+                      <a:pPr algn="r"/>
+                      <a:r>
+                        <a:rPr sz="1300" b="0">
+                          <a:solidFill>
+                            <a:srgbClr val="1A1A1A"/>
+                          </a:solidFill>
+                          <a:latin typeface="Calibri"/>
+                        </a:rPr>
+                        <a:t> </a:t>
+                      </a:r>
+                    </a:p>
+                  </a:txBody>
+                  <a:tcPr>
+                    <a:solidFill>
+                      <a:srgbClr val="F2F5FC"/>
+                    </a:solidFill>
+                  </a:tcPr>
+                </a:tc>
+              </a:tr>
+              <a:tr h="384048">
+                <a:tc>
+                  <a:txBody>
+                    <a:bodyPr/>
+                    <a:lstStyle/>
+                    <a:p>
+                      <a:pPr algn="l"/>
+                      <a:r>
+                        <a:rPr sz="1300" b="0">
+                          <a:solidFill>
+                            <a:srgbClr val="1A1A1A"/>
+                          </a:solidFill>
+                          <a:latin typeface="Calibri"/>
+                        </a:rPr>
+                        <a:t>ResNet（骨幹）</a:t>
+                      </a:r>
+                    </a:p>
+                  </a:txBody>
+                  <a:tcPr>
+                    <a:solidFill>
+                      <a:srgbClr val="FFFFFF"/>
+                    </a:solidFill>
+                  </a:tcPr>
+                </a:tc>
+                <a:tc>
+                  <a:txBody>
+                    <a:bodyPr/>
+                    <a:lstStyle/>
+                    <a:p>
+                      <a:pPr algn="r"/>
+                      <a:r>
+                        <a:rPr sz="1300" b="0">
+                          <a:solidFill>
+                            <a:srgbClr val="1A1A1A"/>
+                          </a:solidFill>
+                          <a:latin typeface="Calibri"/>
+                        </a:rPr>
+                        <a:t>0.6344</a:t>
+                      </a:r>
+                    </a:p>
+                  </a:txBody>
+                  <a:tcPr>
+                    <a:solidFill>
+                      <a:srgbClr val="FFFFFF"/>
+                    </a:solidFill>
+                  </a:tcPr>
+                </a:tc>
+                <a:tc>
+                  <a:txBody>
+                    <a:bodyPr/>
+                    <a:lstStyle/>
+                    <a:p>
+                      <a:pPr algn="r"/>
+                      <a:r>
+                        <a:rPr sz="1300" b="0">
+                          <a:solidFill>
+                            <a:srgbClr val="1A1A1A"/>
+                          </a:solidFill>
+                          <a:latin typeface="Calibri"/>
+                        </a:rPr>
+                        <a:t> </a:t>
+                      </a:r>
+                    </a:p>
+                  </a:txBody>
+                  <a:tcPr>
+                    <a:solidFill>
+                      <a:srgbClr val="FFFFFF"/>
+                    </a:solidFill>
+                  </a:tcPr>
+                </a:tc>
+              </a:tr>
+              <a:tr h="384048">
+                <a:tc>
+                  <a:txBody>
+                    <a:bodyPr/>
+                    <a:lstStyle/>
+                    <a:p>
+                      <a:pPr algn="l"/>
+                      <a:r>
+                        <a:rPr sz="1300" b="1">
+                          <a:solidFill>
+                            <a:srgbClr val="C0392B"/>
+                          </a:solidFill>
+                          <a:latin typeface="Calibri"/>
+                        </a:rPr>
+                        <a:t>CDWC（移除對比學習）</a:t>
+                      </a:r>
+                    </a:p>
+                  </a:txBody>
+                  <a:tcPr>
+                    <a:solidFill>
+                      <a:srgbClr val="F2F5FC"/>
+                    </a:solidFill>
+                  </a:tcPr>
+                </a:tc>
+                <a:tc>
+                  <a:txBody>
+                    <a:bodyPr/>
+                    <a:lstStyle/>
+                    <a:p>
+                      <a:pPr algn="r"/>
+                      <a:r>
+                        <a:rPr sz="1300" b="1">
+                          <a:solidFill>
+                            <a:srgbClr val="C0392B"/>
+                          </a:solidFill>
+                          <a:latin typeface="Calibri"/>
+                        </a:rPr>
+                        <a:t>0.6705</a:t>
+                      </a:r>
+                    </a:p>
+                  </a:txBody>
+                  <a:tcPr>
+                    <a:solidFill>
+                      <a:srgbClr val="F2F5FC"/>
+                    </a:solidFill>
+                  </a:tcPr>
+                </a:tc>
+                <a:tc>
+                  <a:txBody>
+                    <a:bodyPr/>
+                    <a:lstStyle/>
+                    <a:p>
+                      <a:pPr algn="r"/>
+                      <a:r>
+                        <a:rPr sz="1300" b="1">
+                          <a:solidFill>
+                            <a:srgbClr val="C0392B"/>
+                          </a:solidFill>
+                          <a:latin typeface="Calibri"/>
+                        </a:rPr>
+                        <a:t>對比學習貢獻 +5.25%</a:t>
+                      </a:r>
+                    </a:p>
+                  </a:txBody>
+                  <a:tcPr>
+                    <a:solidFill>
+                      <a:srgbClr val="F2F5FC"/>
+                    </a:solidFill>
+                  </a:tcPr>
+                </a:tc>
+              </a:tr>
+            </a:tbl>
+          </a:graphicData>
+        </a:graphic>
+      </p:graphicFrame>
       <p:sp>
         <p:nvSpPr>
           <p:cNvPr id="4" name="TextBox 3"/>
@@ -10468,8 +11953,8 @@
         </p:nvSpPr>
         <p:spPr>
           <a:xfrm>
-            <a:off x="685800" y="1965960"/>
-            <a:ext cx="2464993" cy="1280160"/>
+            <a:off x="685800" y="5111496"/>
+            <a:ext cx="10820095" cy="914400"/>
           </a:xfrm>
           <a:prstGeom prst="rect">
             <a:avLst/>
@@ -10482,23 +11967,7 @@
           </a:bodyPr>
           <a:lstStyle/>
           <a:p>
-            <a:pPr algn="ctr"/>
-            <a:r>
-              <a:rPr sz="4000" b="1" i="0">
-                <a:solidFill>
-                  <a:srgbClr val="1E2761"/>
-                </a:solidFill>
-                <a:latin typeface="Cambria"/>
-              </a:rPr>
-              <a:t>+0.109</a:t>
-            </a:r>
-          </a:p>
-          <a:p>
-            <a:pPr algn="ctr">
-              <a:spcBef>
-                <a:spcPts val="400"/>
-              </a:spcBef>
-            </a:pPr>
+            <a:pPr algn="l"/>
             <a:r>
               <a:rPr sz="1300" b="0" i="0">
                 <a:solidFill>
@@ -10506,396 +11975,7 @@
                 </a:solidFill>
                 <a:latin typeface="Calibri"/>
               </a:rPr>
-              <a:t>逐樣本輸入正規化</a:t>
-            </a:r>
-          </a:p>
-        </p:txBody>
-      </p:sp>
-      <p:sp>
-        <p:nvSpPr>
-          <p:cNvPr id="5" name="Rounded Rectangle 4"/>
-          <p:cNvSpPr/>
-          <p:nvPr/>
-        </p:nvSpPr>
-        <p:spPr>
-          <a:xfrm>
-            <a:off x="3470833" y="1783080"/>
-            <a:ext cx="2464993" cy="1600200"/>
-          </a:xfrm>
-          <a:prstGeom prst="roundRect">
-            <a:avLst/>
-          </a:prstGeom>
-          <a:solidFill>
-            <a:srgbClr val="F2F5FC"/>
-          </a:solidFill>
-          <a:ln>
-            <a:solidFill>
-              <a:srgbClr val="CADCFC"/>
-            </a:solidFill>
-          </a:ln>
-          <a:effectLst/>
-        </p:spPr>
-        <p:style>
-          <a:lnRef idx="1">
-            <a:schemeClr val="accent1"/>
-          </a:lnRef>
-          <a:fillRef idx="3">
-            <a:schemeClr val="accent1"/>
-          </a:fillRef>
-          <a:effectRef idx="2">
-            <a:schemeClr val="accent1"/>
-          </a:effectRef>
-          <a:fontRef idx="minor">
-            <a:schemeClr val="lt1"/>
-          </a:fontRef>
-        </p:style>
-        <p:txBody>
-          <a:bodyPr rtlCol="0" anchor="ctr"/>
-          <a:lstStyle/>
-          <a:p>
-            <a:pPr algn="ctr"/>
-          </a:p>
-        </p:txBody>
-      </p:sp>
-      <p:sp>
-        <p:nvSpPr>
-          <p:cNvPr id="6" name="TextBox 5"/>
-          <p:cNvSpPr txBox="1"/>
-          <p:nvPr/>
-        </p:nvSpPr>
-        <p:spPr>
-          <a:xfrm>
-            <a:off x="3470833" y="1965960"/>
-            <a:ext cx="2464993" cy="1280160"/>
-          </a:xfrm>
-          <a:prstGeom prst="rect">
-            <a:avLst/>
-          </a:prstGeom>
-          <a:noFill/>
-        </p:spPr>
-        <p:txBody>
-          <a:bodyPr wrap="square" lIns="0" rIns="0" tIns="0" bIns="0" anchor="t">
-            <a:spAutoFit/>
-          </a:bodyPr>
-          <a:lstStyle/>
-          <a:p>
-            <a:pPr algn="ctr"/>
-            <a:r>
-              <a:rPr sz="4000" b="1" i="0">
-                <a:solidFill>
-                  <a:srgbClr val="1E2761"/>
-                </a:solidFill>
-                <a:latin typeface="Cambria"/>
-              </a:rPr>
-              <a:t>+0.085</a:t>
-            </a:r>
-          </a:p>
-          <a:p>
-            <a:pPr algn="ctr">
-              <a:spcBef>
-                <a:spcPts val="400"/>
-              </a:spcBef>
-            </a:pPr>
-            <a:r>
-              <a:rPr sz="1300" b="0" i="0">
-                <a:solidFill>
-                  <a:srgbClr val="5A5A66"/>
-                </a:solidFill>
-                <a:latin typeface="Calibri"/>
-              </a:rPr>
-              <a:t>LayerNorm</a:t>
-            </a:r>
-          </a:p>
-        </p:txBody>
-      </p:sp>
-      <p:sp>
-        <p:nvSpPr>
-          <p:cNvPr id="7" name="Rounded Rectangle 6"/>
-          <p:cNvSpPr/>
-          <p:nvPr/>
-        </p:nvSpPr>
-        <p:spPr>
-          <a:xfrm>
-            <a:off x="6255867" y="1783080"/>
-            <a:ext cx="2464993" cy="1600200"/>
-          </a:xfrm>
-          <a:prstGeom prst="roundRect">
-            <a:avLst/>
-          </a:prstGeom>
-          <a:solidFill>
-            <a:srgbClr val="F2F5FC"/>
-          </a:solidFill>
-          <a:ln>
-            <a:solidFill>
-              <a:srgbClr val="CADCFC"/>
-            </a:solidFill>
-          </a:ln>
-          <a:effectLst/>
-        </p:spPr>
-        <p:style>
-          <a:lnRef idx="1">
-            <a:schemeClr val="accent1"/>
-          </a:lnRef>
-          <a:fillRef idx="3">
-            <a:schemeClr val="accent1"/>
-          </a:fillRef>
-          <a:effectRef idx="2">
-            <a:schemeClr val="accent1"/>
-          </a:effectRef>
-          <a:fontRef idx="minor">
-            <a:schemeClr val="lt1"/>
-          </a:fontRef>
-        </p:style>
-        <p:txBody>
-          <a:bodyPr rtlCol="0" anchor="ctr"/>
-          <a:lstStyle/>
-          <a:p>
-            <a:pPr algn="ctr"/>
-          </a:p>
-        </p:txBody>
-      </p:sp>
-      <p:sp>
-        <p:nvSpPr>
-          <p:cNvPr id="8" name="TextBox 7"/>
-          <p:cNvSpPr txBox="1"/>
-          <p:nvPr/>
-        </p:nvSpPr>
-        <p:spPr>
-          <a:xfrm>
-            <a:off x="6255867" y="1965960"/>
-            <a:ext cx="2464993" cy="1280160"/>
-          </a:xfrm>
-          <a:prstGeom prst="rect">
-            <a:avLst/>
-          </a:prstGeom>
-          <a:noFill/>
-        </p:spPr>
-        <p:txBody>
-          <a:bodyPr wrap="square" lIns="0" rIns="0" tIns="0" bIns="0" anchor="t">
-            <a:spAutoFit/>
-          </a:bodyPr>
-          <a:lstStyle/>
-          <a:p>
-            <a:pPr algn="ctr"/>
-            <a:r>
-              <a:rPr sz="4000" b="1" i="0">
-                <a:solidFill>
-                  <a:srgbClr val="1E2761"/>
-                </a:solidFill>
-                <a:latin typeface="Cambria"/>
-              </a:rPr>
-              <a:t>+0.149</a:t>
-            </a:r>
-          </a:p>
-          <a:p>
-            <a:pPr algn="ctr">
-              <a:spcBef>
-                <a:spcPts val="400"/>
-              </a:spcBef>
-            </a:pPr>
-            <a:r>
-              <a:rPr sz="1300" b="0" i="0">
-                <a:solidFill>
-                  <a:srgbClr val="5A5A66"/>
-                </a:solidFill>
-                <a:latin typeface="Calibri"/>
-              </a:rPr>
-              <a:t>兩者合併</a:t>
-            </a:r>
-          </a:p>
-        </p:txBody>
-      </p:sp>
-      <p:sp>
-        <p:nvSpPr>
-          <p:cNvPr id="9" name="Rounded Rectangle 8"/>
-          <p:cNvSpPr/>
-          <p:nvPr/>
-        </p:nvSpPr>
-        <p:spPr>
-          <a:xfrm>
-            <a:off x="9040901" y="1783080"/>
-            <a:ext cx="2464993" cy="1600200"/>
-          </a:xfrm>
-          <a:prstGeom prst="roundRect">
-            <a:avLst/>
-          </a:prstGeom>
-          <a:solidFill>
-            <a:srgbClr val="F2F5FC"/>
-          </a:solidFill>
-          <a:ln>
-            <a:solidFill>
-              <a:srgbClr val="CADCFC"/>
-            </a:solidFill>
-          </a:ln>
-          <a:effectLst/>
-        </p:spPr>
-        <p:style>
-          <a:lnRef idx="1">
-            <a:schemeClr val="accent1"/>
-          </a:lnRef>
-          <a:fillRef idx="3">
-            <a:schemeClr val="accent1"/>
-          </a:fillRef>
-          <a:effectRef idx="2">
-            <a:schemeClr val="accent1"/>
-          </a:effectRef>
-          <a:fontRef idx="minor">
-            <a:schemeClr val="lt1"/>
-          </a:fontRef>
-        </p:style>
-        <p:txBody>
-          <a:bodyPr rtlCol="0" anchor="ctr"/>
-          <a:lstStyle/>
-          <a:p>
-            <a:pPr algn="ctr"/>
-          </a:p>
-        </p:txBody>
-      </p:sp>
-      <p:sp>
-        <p:nvSpPr>
-          <p:cNvPr id="10" name="TextBox 9"/>
-          <p:cNvSpPr txBox="1"/>
-          <p:nvPr/>
-        </p:nvSpPr>
-        <p:spPr>
-          <a:xfrm>
-            <a:off x="9040901" y="1965960"/>
-            <a:ext cx="2464993" cy="1280160"/>
-          </a:xfrm>
-          <a:prstGeom prst="rect">
-            <a:avLst/>
-          </a:prstGeom>
-          <a:noFill/>
-        </p:spPr>
-        <p:txBody>
-          <a:bodyPr wrap="square" lIns="0" rIns="0" tIns="0" bIns="0" anchor="t">
-            <a:spAutoFit/>
-          </a:bodyPr>
-          <a:lstStyle/>
-          <a:p>
-            <a:pPr algn="ctr"/>
-            <a:r>
-              <a:rPr sz="4000" b="1" i="0">
-                <a:solidFill>
-                  <a:srgbClr val="1E2761"/>
-                </a:solidFill>
-                <a:latin typeface="Cambria"/>
-              </a:rPr>
-              <a:t>0/5</a:t>
-            </a:r>
-          </a:p>
-          <a:p>
-            <a:pPr algn="ctr">
-              <a:spcBef>
-                <a:spcPts val="400"/>
-              </a:spcBef>
-            </a:pPr>
-            <a:r>
-              <a:rPr sz="1300" b="0" i="0">
-                <a:solidFill>
-                  <a:srgbClr val="5A5A66"/>
-                </a:solidFill>
-                <a:latin typeface="Calibri"/>
-              </a:rPr>
-              <a:t>壓極端值（clip）有效的種子</a:t>
-            </a:r>
-          </a:p>
-        </p:txBody>
-      </p:sp>
-      <p:sp>
-        <p:nvSpPr>
-          <p:cNvPr id="11" name="TextBox 10"/>
-          <p:cNvSpPr txBox="1"/>
-          <p:nvPr/>
-        </p:nvSpPr>
-        <p:spPr>
-          <a:xfrm>
-            <a:off x="685800" y="3794760"/>
-            <a:ext cx="10820095" cy="2423160"/>
-          </a:xfrm>
-          <a:prstGeom prst="rect">
-            <a:avLst/>
-          </a:prstGeom>
-          <a:noFill/>
-        </p:spPr>
-        <p:txBody>
-          <a:bodyPr wrap="square" lIns="0" rIns="0" tIns="0" bIns="0" anchor="t">
-            <a:spAutoFit/>
-          </a:bodyPr>
-          <a:lstStyle/>
-          <a:p>
-            <a:pPr algn="l">
-              <a:spcAft>
-                <a:spcPts val="1200"/>
-              </a:spcAft>
-            </a:pPr>
-            <a:r>
-              <a:rPr sz="1700" b="1" i="0">
-                <a:solidFill>
-                  <a:srgbClr val="C0392B"/>
-                </a:solidFill>
-                <a:latin typeface="Calibri"/>
-              </a:rPr>
-              <a:t>▍ </a:t>
-            </a:r>
-            <a:r>
-              <a:rPr sz="1700" b="1" i="0">
-                <a:solidFill>
-                  <a:srgbClr val="1A1A1A"/>
-                </a:solidFill>
-                <a:latin typeface="Calibri"/>
-              </a:rPr>
-              <a:t>在 Batch 1 的 scaler 下，Batch 2 有 |z| ≈ 1.5×10⁴ 的極端值</a:t>
-            </a:r>
-          </a:p>
-          <a:p>
-            <a:pPr>
-              <a:spcAft>
-                <a:spcPts val="1200"/>
-              </a:spcAft>
-            </a:pPr>
-            <a:r>
-              <a:rPr sz="1700" b="0" i="0">
-                <a:solidFill>
-                  <a:srgbClr val="CADCFC"/>
-                </a:solidFill>
-                <a:latin typeface="Calibri"/>
-              </a:rPr>
-              <a:t>· </a:t>
-            </a:r>
-            <a:r>
-              <a:rPr sz="1700" b="0" i="0">
-                <a:solidFill>
-                  <a:srgbClr val="1A1A1A"/>
-                </a:solidFill>
-                <a:latin typeface="Calibri"/>
-              </a:rPr>
-              <a:t>但 signed-log 與 clip 都無效——有效的是移除每個樣本自己的偏移與增益</a:t>
-            </a:r>
-          </a:p>
-          <a:p>
-            <a:pPr>
-              <a:spcAft>
-                <a:spcPts val="1200"/>
-              </a:spcAft>
-            </a:pPr>
-            <a:r>
-              <a:rPr sz="1700" b="0" i="0">
-                <a:solidFill>
-                  <a:srgbClr val="CADCFC"/>
-                </a:solidFill>
-                <a:latin typeface="Calibri"/>
-              </a:rPr>
-              <a:t>· </a:t>
-            </a:r>
-            <a:r>
-              <a:rPr sz="1700" b="0" i="0">
-                <a:solidFill>
-                  <a:srgbClr val="1A1A1A"/>
-                </a:solidFill>
-                <a:latin typeface="Calibri"/>
-              </a:rPr>
-              <a:t>兩者皆為 5/5 種子改善</a:t>
+              <a:t>關鍵：論文自己的消融把 +5.25% 歸因於對比學習，並指出 Toluene 從 0.27 提升到 0.92。</a:t>
             </a:r>
           </a:p>
         </p:txBody>
